--- a/RAC/17장/17장_RAC백업과복구.pptx
+++ b/RAC/17장/17장_RAC백업과복구.pptx
@@ -47,6 +47,8 @@
     <p:sldId id="295" r:id="rId47"/>
     <p:sldId id="296" r:id="rId48"/>
     <p:sldId id="297" r:id="rId49"/>
+    <p:sldId id="298" r:id="rId50"/>
+    <p:sldId id="299" r:id="rId51"/>
   </p:sldIdLst>
   <p:sldSz cx="12191695" cy="6858000" type="screen4x3"/>
   <p:notesSz cx="6858000" cy="9144000"/>
@@ -1803,7 +1805,7 @@
           <a:lstStyle/>
           <a:p>
             <a:r>
-              <a:t>컨트롤파일을 실제로 지우는 실습은 위험하므로 이 방법으로 대신합니다. 실제 복구 절차와 같은 명령을 쓰면서 비파괴적이라는 것이 이 방법의 장점입니다. 복원한 파일에 인스턴스별 접두어가 온전히 있다는 것도 확인시키십시오. 12장에서 다룬 racdb1. 과 racdb2. 표기가 백업에도 그대로 보존되며, 이것이 복원 후 두 인스턴스가 각자의 설정을 되찾는 근거입니다. 4608 바이트라는 크기도 함께 확인하게 하십시오.</a:t>
+              <a:t>이 장에서 가장 조심해야 할 발견입니다. 이름에 restore 가 들어 있어 읽기 전용처럼 느껴지지만 복원 위치를 CRS 에 알려 주는 것까지가 이 명령의 동작입니다. 백업만 했을 때는 바뀌지 않았다는 대조가 원인을 특정해 줍니다. 실행 중인 인스턴스가 영향을 받지 않는다는 점이 오히려 위험합니다. 검증한 그날은 아무 문제가 없고 몇 주 뒤 계획 정지 후 재기동에서 드러나므로 진단하기 가장 어려운 종류의 사고입니다.</a:t>
             </a:r>
           </a:p>
         </p:txBody>
@@ -1873,7 +1875,7 @@
           <a:lstStyle/>
           <a:p>
             <a:r>
-              <a:t>이 랩에서는 실행하지 않고 절차만 익힙니다. RAC 특유의 주의점을 강조하십시오. 3 단계 전에 다른 인스턴스가 완전히 내려가 있어야 합니다. 하나만 살아 있어도 컨트롤파일을 잡고 있어 복원이 실패합니다. DBID 를 미리 기록해 두어야 한다는 점도 반드시 짚으십시오. 컨트롤파일이 없으면 데이터베이스가 자기 DBID 를 모릅니다. RMAN 접속 시 출력되는 값이며 운영 문서 첫 페이지에 적어 두는 것이 관례입니다.</a:t>
+              <a:t>컨트롤파일을 실제로 지우는 실습은 위험하므로 이 방법으로 대신합니다. 실제 복구 절차와 같은 명령을 쓰면서 비파괴적이라는 것이 이 방법의 장점입니다. 복원한 파일에 인스턴스별 접두어가 온전히 있다는 것도 확인시키십시오. 12장에서 다룬 racdb1. 과 racdb2. 표기가 백업에도 그대로 보존되며, 이것이 복원 후 두 인스턴스가 각자의 설정을 되찾는 근거입니다. 4608 바이트라는 크기도 함께 확인하게 하십시오.</a:t>
             </a:r>
           </a:p>
         </p:txBody>
@@ -1943,7 +1945,7 @@
           <a:lstStyle/>
           <a:p>
             <a:r>
-              <a:t>삭제 정책을 걸어 두지 않으면 언젠가 FRA 가 차고 데이터베이스가 멈춥니다. BACKED UP 1 TIMES TO DISK 가 출발점이라고 알려 주십시오. 그러면 FRA 가 찰 때 오라클이 백업된 아카이브를 자동으로 지웁니다. Data Guard 구성이라면 스탠바이 적용 여부까지 조건에 넣어야 합니다. 스탠바이에 아직 적용되지 않은 아카이브를 지우면 그쪽 복제가 끊깁니다. ADG 과정과 이어지는 지점입니다.</a:t>
+              <a:t>이 랩에서는 실행하지 않고 절차만 익힙니다. RAC 특유의 주의점을 강조하십시오. 3 단계 전에 다른 인스턴스가 완전히 내려가 있어야 합니다. 하나만 살아 있어도 컨트롤파일을 잡고 있어 복원이 실패합니다. DBID 를 미리 기록해 두어야 한다는 점도 반드시 짚으십시오. 컨트롤파일이 없으면 데이터베이스가 자기 DBID 를 모릅니다. RMAN 접속 시 출력되는 값이며 운영 문서 첫 페이지에 적어 두는 것이 관례입니다.</a:t>
             </a:r>
           </a:p>
         </p:txBody>
@@ -2013,7 +2015,7 @@
           <a:lstStyle/>
           <a:p>
             <a:r>
-              <a:t>세 번째가 이 장에서 얻은 항목입니다. 17.2 절에서 STATUS 가 INACTIVE 가 되어 ORA-16014 가 났고, 그 상태를 미리 잡아 줍니다. 네 번째와 다섯 번째가 RAC 특유입니다. 백업이 유효해도 한 노드에서만 유효하면 반쪽이고, 스레드마다 시퀀스가 독립적이므로 한 스레드만 끊길 수 있습니다. 전체를 뭉뚱그려 세면 그 끊김이 보이지 않으므로 반드시 thread# 로 group by 해야 합니다.</a:t>
+              <a:t>삭제 정책을 걸어 두지 않으면 언젠가 FRA 가 차고 데이터베이스가 멈춥니다. BACKED UP 1 TIMES TO DISK 가 출발점이라고 알려 주십시오. 그러면 FRA 가 찰 때 오라클이 백업된 아카이브를 자동으로 지웁니다. Data Guard 구성이라면 스탠바이 적용 여부까지 조건에 넣어야 합니다. 스탠바이에 아직 적용되지 않은 아카이브를 지우면 그쪽 복제가 끊깁니다. ADG 과정과 이어지는 지점입니다.</a:t>
             </a:r>
           </a:p>
         </p:txBody>
@@ -2153,7 +2155,7 @@
           <a:lstStyle/>
           <a:p>
             <a:r>
-              <a:t>이 장은 유일하게 기준선을 바꾸고 끝나는 장입니다. 왜 되돌리지 않는지 분명히 설명하십시오. 백업과 복구가 가능한 데이터베이스의 정상 구성이기 때문입니다. 대신 아카이브가 계속 쌓이므로 정기적으로 지우거나 삭제 정책을 걸어 두어야 한다는 조건이 붙습니다. 나머지는 모두 원래대로 돌려놓는다는 원칙은 그대로이며, 이 장에서도 실습 테이블스페이스와 백업을 모두 지웠습니다.</a:t>
+              <a:t>세 번째가 이 장에서 얻은 항목입니다. 17.2 절에서 STATUS 가 INACTIVE 가 되어 ORA-16014 가 났고, 그 상태를 미리 잡아 줍니다. 네 번째와 다섯 번째가 RAC 특유입니다. 백업이 유효해도 한 노드에서만 유효하면 반쪽이고, 스레드마다 시퀀스가 독립적이므로 한 스레드만 끊길 수 있습니다. 전체를 뭉뚱그려 세면 그 끊김이 보이지 않으므로 반드시 thread# 로 group by 해야 합니다.</a:t>
             </a:r>
           </a:p>
         </p:txBody>
@@ -2179,6 +2181,76 @@
 </file>
 
 <file path=ppt/notesSlides/notesSlide31.xml><?xml version="1.0" encoding="utf-8"?>
+<p:notes xmlns:a="http://schemas.openxmlformats.org/drawingml/2006/main" xmlns:p="http://schemas.openxmlformats.org/presentationml/2006/main" xmlns:r="http://schemas.openxmlformats.org/officeDocument/2006/relationships">
+  <p:cSld>
+    <p:spTree>
+      <p:nvGrpSpPr>
+        <p:cNvPr id="1" name=""/>
+        <p:cNvGrpSpPr/>
+        <p:nvPr/>
+      </p:nvGrpSpPr>
+      <p:grpSpPr>
+        <a:xfrm>
+          <a:off x="0" y="0"/>
+          <a:ext cx="0" cy="0"/>
+          <a:chOff x="0" y="0"/>
+          <a:chExt cx="0" cy="0"/>
+        </a:xfrm>
+      </p:grpSpPr>
+      <p:sp>
+        <p:nvSpPr>
+          <p:cNvPr id="2" name="Slide Image Placeholder 1"/>
+          <p:cNvSpPr>
+            <a:spLocks noGrp="1"/>
+          </p:cNvSpPr>
+          <p:nvPr>
+            <p:ph type="sldImg" idx="2"/>
+          </p:nvPr>
+        </p:nvSpPr>
+        <p:spPr/>
+      </p:sp>
+      <p:sp>
+        <p:nvSpPr>
+          <p:cNvPr id="3" name="Notes Placeholder 2"/>
+          <p:cNvSpPr>
+            <a:spLocks noGrp="1"/>
+          </p:cNvSpPr>
+          <p:nvPr>
+            <p:ph type="body" idx="3" sz="quarter"/>
+          </p:nvPr>
+        </p:nvSpPr>
+        <p:spPr/>
+        <p:txBody>
+          <a:bodyPr/>
+          <a:lstStyle/>
+          <a:p>
+            <a:r>
+              <a:t>이 장은 유일하게 기준선을 바꾸고 끝나는 장입니다. 왜 되돌리지 않는지 분명히 설명하십시오. 백업과 복구가 가능한 데이터베이스의 정상 구성이기 때문입니다. 대신 아카이브가 계속 쌓이므로 정기적으로 지우거나 삭제 정책을 걸어 두어야 한다는 조건이 붙습니다. 나머지는 모두 원래대로 돌려놓는다는 원칙은 그대로이며, 이 장에서도 실습 테이블스페이스와 백업을 모두 지웠습니다.</a:t>
+            </a:r>
+          </a:p>
+        </p:txBody>
+      </p:sp>
+      <p:sp>
+        <p:nvSpPr>
+          <p:cNvPr id="4" name="Slide Number Placeholder 3"/>
+          <p:cNvSpPr>
+            <a:spLocks noGrp="1"/>
+          </p:cNvSpPr>
+          <p:nvPr>
+            <p:ph type="sldNum" idx="5" sz="quarter"/>
+          </p:nvPr>
+        </p:nvSpPr>
+        <p:spPr/>
+      </p:sp>
+    </p:spTree>
+  </p:cSld>
+  <p:clrMapOvr>
+    <a:masterClrMapping/>
+  </p:clrMapOvr>
+</p:notes>
+</file>
+
+<file path=ppt/notesSlides/notesSlide32.xml><?xml version="1.0" encoding="utf-8"?>
 <p:notes xmlns:a="http://schemas.openxmlformats.org/drawingml/2006/main" xmlns:p="http://schemas.openxmlformats.org/presentationml/2006/main" xmlns:r="http://schemas.openxmlformats.org/officeDocument/2006/relationships">
   <p:cSld>
     <p:spTree>
@@ -12713,7 +12785,7 @@
                 </a:solidFill>
                 <a:latin typeface="맑은 고딕"/>
               </a:rPr>
-              <a:t>비파괴적으로 확인한다</a:t>
+              <a:t>자동 백업이 쓸 만한지 확인한다</a:t>
             </a:r>
           </a:p>
         </p:txBody>
@@ -12917,7 +12989,7 @@
                 </a:solidFill>
                 <a:latin typeface="맑은 고딕"/>
               </a:rPr>
-              <a:t>컨트롤파일을 모두 잃으면</a:t>
+              <a:t>그런데 읽기 전용이 아니다</a:t>
             </a:r>
           </a:p>
         </p:txBody>
@@ -12956,7 +13028,7 @@
                 </a:solidFill>
                 <a:latin typeface="맑은 고딕"/>
               </a:rPr>
-              <a:t>절차만 익힌다</a:t>
+              <a:t>이름에 속지 말 것</a:t>
             </a:r>
           </a:p>
         </p:txBody>
@@ -12995,7 +13067,7 @@
                 </a:solidFill>
                 <a:latin typeface="맑은 고딕"/>
               </a:rPr>
-              <a:t>•  1. srvctl stop database -o abort (정상 종료가 안 된다)</a:t>
+              <a:t>•  복원 전 Spfile: +DATA/RACDB/PARAMETERFILE/spfile.272...</a:t>
             </a:r>
           </a:p>
           <a:p>
@@ -13011,7 +13083,7 @@
                 </a:solidFill>
                 <a:latin typeface="맑은 고딕"/>
               </a:rPr>
-              <a:t>•  2. 한 노드에서 NOMOUNT (SPFILE 도 없으면 먼저 복원)</a:t>
+              <a:t>•  backup current controlfile 후에도 그대로 (백업은 안 바꾼다)</a:t>
             </a:r>
           </a:p>
           <a:p>
@@ -13027,7 +13099,7 @@
                 </a:solidFill>
                 <a:latin typeface="맑은 고딕"/>
               </a:rPr>
-              <a:t>•  3. set dbid 1240378513; restore controlfile from autobackup;</a:t>
+              <a:t>•  restore spfile to '/tmp/sp_probe.ora' 후 → Spfile: /tmp/sp_probe.ora</a:t>
             </a:r>
           </a:p>
           <a:p>
@@ -13043,7 +13115,7 @@
                 </a:solidFill>
                 <a:latin typeface="맑은 고딕"/>
               </a:rPr>
-              <a:t>•  4. alter database mount; recover database;</a:t>
+              <a:t>•  CRS 에 등록된 SPFILE 위치가 임시 경로로 바뀌었다</a:t>
             </a:r>
           </a:p>
           <a:p>
@@ -13059,7 +13131,7 @@
                 </a:solidFill>
                 <a:latin typeface="맑은 고딕"/>
               </a:rPr>
-              <a:t>•  5. alter database open resetlogs; → 6. 나머지 인스턴스 기동</a:t>
+              <a:t>•  실행 중인 인스턴스는 영향 없음 → 그날은 멀쩡해 보인다</a:t>
             </a:r>
           </a:p>
         </p:txBody>
@@ -13091,7 +13163,7 @@
         <p:spPr>
           <a:xfrm>
             <a:off x="0" y="0"/>
-            <a:ext cx="12191695" cy="6858000"/>
+            <a:ext cx="12191695" cy="1005840"/>
           </a:xfrm>
           <a:prstGeom prst="rect">
             <a:avLst/>
@@ -13134,8 +13206,8 @@
         </p:nvSpPr>
         <p:spPr>
           <a:xfrm>
-            <a:off x="822960" y="2011680"/>
-            <a:ext cx="10515600" cy="1097280"/>
+            <a:off x="548640" y="91440"/>
+            <a:ext cx="10972800" cy="777240"/>
           </a:xfrm>
           <a:prstGeom prst="rect">
             <a:avLst/>
@@ -13154,13 +13226,13 @@
               </a:spcAft>
             </a:pPr>
             <a:r>
-              <a:rPr sz="4000" b="1">
+              <a:rPr sz="2600" b="1">
                 <a:solidFill>
                   <a:srgbClr val="FFFFFF"/>
                 </a:solidFill>
                 <a:latin typeface="맑은 고딕"/>
               </a:rPr>
-              <a:t>17.8</a:t>
+              <a:t>반드시 되돌린다</a:t>
             </a:r>
           </a:p>
         </p:txBody>
@@ -13173,8 +13245,8 @@
         </p:nvSpPr>
         <p:spPr>
           <a:xfrm>
-            <a:off x="822960" y="3017520"/>
-            <a:ext cx="10515600" cy="914400"/>
+            <a:off x="640080" y="1078992"/>
+            <a:ext cx="10881360" cy="457200"/>
           </a:xfrm>
           <a:prstGeom prst="rect">
             <a:avLst/>
@@ -13193,71 +13265,27 @@
               </a:spcAft>
             </a:pPr>
             <a:r>
-              <a:rPr sz="2800" b="1">
-                <a:solidFill>
-                  <a:srgbClr val="FFFFFF"/>
-                </a:solidFill>
-                <a:latin typeface="맑은 고딕"/>
-              </a:rPr>
-              <a:t>정리와 운영 지침</a:t>
-            </a:r>
-          </a:p>
-        </p:txBody>
-      </p:sp>
-      <p:sp>
-        <p:nvSpPr>
-          <p:cNvPr id="5" name="Rectangle 4"/>
-          <p:cNvSpPr/>
-          <p:nvPr/>
-        </p:nvSpPr>
-        <p:spPr>
-          <a:xfrm>
-            <a:off x="822960" y="4114800"/>
-            <a:ext cx="5486400" cy="54864"/>
-          </a:xfrm>
-          <a:prstGeom prst="rect">
-            <a:avLst/>
-          </a:prstGeom>
-          <a:solidFill>
-            <a:srgbClr val="FFFFFF"/>
-          </a:solidFill>
-          <a:ln>
-            <a:noFill/>
-          </a:ln>
-          <a:effectLst/>
-        </p:spPr>
-        <p:style>
-          <a:lnRef idx="1">
-            <a:schemeClr val="accent1"/>
-          </a:lnRef>
-          <a:fillRef idx="3">
-            <a:schemeClr val="accent1"/>
-          </a:fillRef>
-          <a:effectRef idx="2">
-            <a:schemeClr val="accent1"/>
-          </a:effectRef>
-          <a:fontRef idx="minor">
-            <a:schemeClr val="lt1"/>
-          </a:fontRef>
-        </p:style>
-        <p:txBody>
-          <a:bodyPr rtlCol="0" anchor="ctr"/>
-          <a:lstStyle/>
-          <a:p>
-            <a:pPr algn="ctr"/>
-          </a:p>
-        </p:txBody>
-      </p:sp>
-      <p:sp>
-        <p:nvSpPr>
-          <p:cNvPr id="6" name="TextBox 5"/>
+              <a:rPr sz="1500" b="0">
+                <a:solidFill>
+                  <a:srgbClr val="5A6672"/>
+                </a:solidFill>
+                <a:latin typeface="맑은 고딕"/>
+              </a:rPr>
+              <a:t>복원 전에 값을 기록해 둘 것</a:t>
+            </a:r>
+          </a:p>
+        </p:txBody>
+      </p:sp>
+      <p:sp>
+        <p:nvSpPr>
+          <p:cNvPr id="5" name="TextBox 4"/>
           <p:cNvSpPr txBox="1"/>
           <p:nvPr/>
         </p:nvSpPr>
         <p:spPr>
           <a:xfrm>
-            <a:off x="822960" y="4297680"/>
-            <a:ext cx="10058400" cy="2011680"/>
+            <a:off x="640080" y="1737360"/>
+            <a:ext cx="10881360" cy="4754880"/>
           </a:xfrm>
           <a:prstGeom prst="rect">
             <a:avLst/>
@@ -13269,7 +13297,86 @@
             <a:spAutoFit/>
           </a:bodyPr>
           <a:lstStyle/>
-          <a:p/>
+          <a:p>
+            <a:pPr algn="l">
+              <a:spcAft>
+                <a:spcPts val="1000"/>
+              </a:spcAft>
+            </a:pPr>
+            <a:r>
+              <a:rPr sz="1700" b="0">
+                <a:solidFill>
+                  <a:srgbClr val="222222"/>
+                </a:solidFill>
+                <a:latin typeface="맑은 고딕"/>
+              </a:rPr>
+              <a:t>•  srvctl modify database -d racdb -spfile '+DATA/RACDB/PARAMETERFILE/spfile.272...'</a:t>
+            </a:r>
+          </a:p>
+          <a:p>
+            <a:pPr algn="l">
+              <a:spcAft>
+                <a:spcPts val="1000"/>
+              </a:spcAft>
+            </a:pPr>
+            <a:r>
+              <a:rPr sz="1700" b="0">
+                <a:solidFill>
+                  <a:srgbClr val="222222"/>
+                </a:solidFill>
+                <a:latin typeface="맑은 고딕"/>
+              </a:rPr>
+              <a:t>•  되돌릴 값을 알아야 하므로 복원 전에 먼저 기록한다</a:t>
+            </a:r>
+          </a:p>
+          <a:p>
+            <a:pPr algn="l">
+              <a:spcAft>
+                <a:spcPts val="1000"/>
+              </a:spcAft>
+            </a:pPr>
+            <a:r>
+              <a:rPr sz="1700" b="0">
+                <a:solidFill>
+                  <a:srgbClr val="222222"/>
+                </a:solidFill>
+                <a:latin typeface="맑은 고딕"/>
+              </a:rPr>
+              <a:t>•  더 안전한 검증 — list backup of spfile / of controlfile 로 존재만 확인</a:t>
+            </a:r>
+          </a:p>
+          <a:p>
+            <a:pPr algn="l">
+              <a:spcAft>
+                <a:spcPts val="1000"/>
+              </a:spcAft>
+            </a:pPr>
+            <a:r>
+              <a:rPr sz="1700" b="0">
+                <a:solidFill>
+                  <a:srgbClr val="222222"/>
+                </a:solidFill>
+                <a:latin typeface="맑은 고딕"/>
+              </a:rPr>
+              <a:t>•  실제 복구 상황이라면 이 동작이 맞다. 문제는 검증 목적일 때</a:t>
+            </a:r>
+          </a:p>
+          <a:p>
+            <a:pPr algn="l">
+              <a:spcAft>
+                <a:spcPts val="1000"/>
+              </a:spcAft>
+            </a:pPr>
+            <a:r>
+              <a:rPr sz="1700" b="0">
+                <a:solidFill>
+                  <a:srgbClr val="222222"/>
+                </a:solidFill>
+                <a:latin typeface="맑은 고딕"/>
+              </a:rPr>
+              <a:t>•  validate 계열은 읽기만 하고 restore 계열은 상태를 바꾼다</a:t>
+            </a:r>
+          </a:p>
         </p:txBody>
       </p:sp>
     </p:spTree>
@@ -13368,7 +13475,7 @@
                 </a:solidFill>
                 <a:latin typeface="맑은 고딕"/>
               </a:rPr>
-              <a:t>아카이브 관리 정책</a:t>
+              <a:t>컨트롤파일을 모두 잃으면</a:t>
             </a:r>
           </a:p>
         </p:txBody>
@@ -13407,7 +13514,7 @@
                 </a:solidFill>
                 <a:latin typeface="맑은 고딕"/>
               </a:rPr>
-              <a:t>정하지 않으면 FRA 가 찬다</a:t>
+              <a:t>절차만 익힌다</a:t>
             </a:r>
           </a:p>
         </p:txBody>
@@ -13446,7 +13553,7 @@
                 </a:solidFill>
                 <a:latin typeface="맑은 고딕"/>
               </a:rPr>
-              <a:t>•  NONE (기본값) — 자동으로 지우지 않는다</a:t>
+              <a:t>•  1. srvctl stop database -o abort (정상 종료가 안 된다)</a:t>
             </a:r>
           </a:p>
           <a:p>
@@ -13462,7 +13569,7 @@
                 </a:solidFill>
                 <a:latin typeface="맑은 고딕"/>
               </a:rPr>
-              <a:t>•  BACKED UP n TIMES TO DISK — 일반적인 선택</a:t>
+              <a:t>•  2. 한 노드에서 NOMOUNT (SPFILE 도 없으면 먼저 복원)</a:t>
             </a:r>
           </a:p>
           <a:p>
@@ -13478,7 +13585,7 @@
                 </a:solidFill>
                 <a:latin typeface="맑은 고딕"/>
               </a:rPr>
-              <a:t>•  APPLIED / SHIPPED ON ALL STANDBY — Data Guard 구성</a:t>
+              <a:t>•  3. set dbid 1240378513; restore controlfile from autobackup;</a:t>
             </a:r>
           </a:p>
           <a:p>
@@ -13494,7 +13601,7 @@
                 </a:solidFill>
                 <a:latin typeface="맑은 고딕"/>
               </a:rPr>
-              <a:t>•  정책은 데이터베이스 단위. 인스턴스별로 다르게 못 한다</a:t>
+              <a:t>•  4. alter database mount; recover database;</a:t>
             </a:r>
           </a:p>
           <a:p>
@@ -13510,7 +13617,7 @@
                 </a:solidFill>
                 <a:latin typeface="맑은 고딕"/>
               </a:rPr>
-              <a:t>•  이 랩은 NONE 이라 실습 후 수동으로 지웠다</a:t>
+              <a:t>•  5. alter database open resetlogs; → 6. 나머지 인스턴스 기동</a:t>
             </a:r>
           </a:p>
         </p:txBody>
@@ -13785,7 +13892,7 @@
         <p:spPr>
           <a:xfrm>
             <a:off x="0" y="0"/>
-            <a:ext cx="12191695" cy="1005840"/>
+            <a:ext cx="12191695" cy="6858000"/>
           </a:xfrm>
           <a:prstGeom prst="rect">
             <a:avLst/>
@@ -13828,8 +13935,8 @@
         </p:nvSpPr>
         <p:spPr>
           <a:xfrm>
-            <a:off x="548640" y="91440"/>
-            <a:ext cx="10972800" cy="777240"/>
+            <a:off x="822960" y="2011680"/>
+            <a:ext cx="10515600" cy="1097280"/>
           </a:xfrm>
           <a:prstGeom prst="rect">
             <a:avLst/>
@@ -13848,13 +13955,13 @@
               </a:spcAft>
             </a:pPr>
             <a:r>
-              <a:rPr sz="2600" b="1">
+              <a:rPr sz="4000" b="1">
                 <a:solidFill>
                   <a:srgbClr val="FFFFFF"/>
                 </a:solidFill>
                 <a:latin typeface="맑은 고딕"/>
               </a:rPr>
-              <a:t>이 장의 점검 항목</a:t>
+              <a:t>17.8</a:t>
             </a:r>
           </a:p>
         </p:txBody>
@@ -13867,8 +13974,8 @@
         </p:nvSpPr>
         <p:spPr>
           <a:xfrm>
-            <a:off x="640080" y="1078992"/>
-            <a:ext cx="10881360" cy="457200"/>
+            <a:off x="822960" y="3017520"/>
+            <a:ext cx="10515600" cy="914400"/>
           </a:xfrm>
           <a:prstGeom prst="rect">
             <a:avLst/>
@@ -13887,27 +13994,71 @@
               </a:spcAft>
             </a:pPr>
             <a:r>
-              <a:rPr sz="1500" b="0">
-                <a:solidFill>
-                  <a:srgbClr val="5A6672"/>
-                </a:solidFill>
-                <a:latin typeface="맑은 고딕"/>
-              </a:rPr>
-              <a:t>RAC 특유의 셋</a:t>
-            </a:r>
-          </a:p>
-        </p:txBody>
-      </p:sp>
-      <p:sp>
-        <p:nvSpPr>
-          <p:cNvPr id="5" name="TextBox 4"/>
+              <a:rPr sz="2800" b="1">
+                <a:solidFill>
+                  <a:srgbClr val="FFFFFF"/>
+                </a:solidFill>
+                <a:latin typeface="맑은 고딕"/>
+              </a:rPr>
+              <a:t>정리와 운영 지침</a:t>
+            </a:r>
+          </a:p>
+        </p:txBody>
+      </p:sp>
+      <p:sp>
+        <p:nvSpPr>
+          <p:cNvPr id="5" name="Rectangle 4"/>
+          <p:cNvSpPr/>
+          <p:nvPr/>
+        </p:nvSpPr>
+        <p:spPr>
+          <a:xfrm>
+            <a:off x="822960" y="4114800"/>
+            <a:ext cx="5486400" cy="54864"/>
+          </a:xfrm>
+          <a:prstGeom prst="rect">
+            <a:avLst/>
+          </a:prstGeom>
+          <a:solidFill>
+            <a:srgbClr val="FFFFFF"/>
+          </a:solidFill>
+          <a:ln>
+            <a:noFill/>
+          </a:ln>
+          <a:effectLst/>
+        </p:spPr>
+        <p:style>
+          <a:lnRef idx="1">
+            <a:schemeClr val="accent1"/>
+          </a:lnRef>
+          <a:fillRef idx="3">
+            <a:schemeClr val="accent1"/>
+          </a:fillRef>
+          <a:effectRef idx="2">
+            <a:schemeClr val="accent1"/>
+          </a:effectRef>
+          <a:fontRef idx="minor">
+            <a:schemeClr val="lt1"/>
+          </a:fontRef>
+        </p:style>
+        <p:txBody>
+          <a:bodyPr rtlCol="0" anchor="ctr"/>
+          <a:lstStyle/>
+          <a:p>
+            <a:pPr algn="ctr"/>
+          </a:p>
+        </p:txBody>
+      </p:sp>
+      <p:sp>
+        <p:nvSpPr>
+          <p:cNvPr id="6" name="TextBox 5"/>
           <p:cNvSpPr txBox="1"/>
           <p:nvPr/>
         </p:nvSpPr>
         <p:spPr>
           <a:xfrm>
-            <a:off x="640080" y="1737360"/>
-            <a:ext cx="10881360" cy="4754880"/>
+            <a:off x="822960" y="4297680"/>
+            <a:ext cx="10058400" cy="2011680"/>
           </a:xfrm>
           <a:prstGeom prst="rect">
             <a:avLst/>
@@ -13919,86 +14070,7 @@
             <a:spAutoFit/>
           </a:bodyPr>
           <a:lstStyle/>
-          <a:p>
-            <a:pPr algn="l">
-              <a:spcAft>
-                <a:spcPts val="1000"/>
-              </a:spcAft>
-            </a:pPr>
-            <a:r>
-              <a:rPr sz="1700" b="0">
-                <a:solidFill>
-                  <a:srgbClr val="222222"/>
-                </a:solidFill>
-                <a:latin typeface="맑은 고딕"/>
-              </a:rPr>
-              <a:t>•  매일 — 스레드별 아카이브 최근 생성 시각</a:t>
-            </a:r>
-          </a:p>
-          <a:p>
-            <a:pPr algn="l">
-              <a:spcAft>
-                <a:spcPts val="1000"/>
-              </a:spcAft>
-            </a:pPr>
-            <a:r>
-              <a:rPr sz="1700" b="0">
-                <a:solidFill>
-                  <a:srgbClr val="222222"/>
-                </a:solidFill>
-                <a:latin typeface="맑은 고딕"/>
-              </a:rPr>
-              <a:t>•  매일 — FRA 사용률 (space_used / space_limit)</a:t>
-            </a:r>
-          </a:p>
-          <a:p>
-            <a:pPr algn="l">
-              <a:spcAft>
-                <a:spcPts val="1000"/>
-              </a:spcAft>
-            </a:pPr>
-            <a:r>
-              <a:rPr sz="1700" b="0">
-                <a:solidFill>
-                  <a:srgbClr val="222222"/>
-                </a:solidFill>
-                <a:latin typeface="맑은 고딕"/>
-              </a:rPr>
-              <a:t>•  매일 — GV$ARCHIVE_DEST 의 STATUS 가 VALID 인가</a:t>
-            </a:r>
-          </a:p>
-          <a:p>
-            <a:pPr algn="l">
-              <a:spcAft>
-                <a:spcPts val="1000"/>
-              </a:spcAft>
-            </a:pPr>
-            <a:r>
-              <a:rPr sz="1700" b="0">
-                <a:solidFill>
-                  <a:srgbClr val="222222"/>
-                </a:solidFill>
-                <a:latin typeface="맑은 고딕"/>
-              </a:rPr>
-              <a:t>•  주간 — 다른 노드에서 restore database validate</a:t>
-            </a:r>
-          </a:p>
-          <a:p>
-            <a:pPr algn="l">
-              <a:spcAft>
-                <a:spcPts val="1000"/>
-              </a:spcAft>
-            </a:pPr>
-            <a:r>
-              <a:rPr sz="1700" b="0">
-                <a:solidFill>
-                  <a:srgbClr val="222222"/>
-                </a:solidFill>
-                <a:latin typeface="맑은 고딕"/>
-              </a:rPr>
-              <a:t>•  주간 — 스레드별 시퀀스 끊김 확인</a:t>
-            </a:r>
-          </a:p>
+          <a:p/>
         </p:txBody>
       </p:sp>
     </p:spTree>
@@ -14097,7 +14169,7 @@
                 </a:solidFill>
                 <a:latin typeface="맑은 고딕"/>
               </a:rPr>
-              <a:t>정리와 기준선</a:t>
+              <a:t>아카이브 관리 정책</a:t>
             </a:r>
           </a:p>
         </p:txBody>
@@ -14136,7 +14208,7 @@
                 </a:solidFill>
                 <a:latin typeface="맑은 고딕"/>
               </a:rPr>
-              <a:t>ARCHIVELOG 만 되돌리지 않는다</a:t>
+              <a:t>정하지 않으면 FRA 가 찬다</a:t>
             </a:r>
           </a:p>
         </p:txBody>
@@ -14175,7 +14247,7 @@
                 </a:solidFill>
                 <a:latin typeface="맑은 고딕"/>
               </a:rPr>
-              <a:t>•  실습 테이블스페이스 삭제, 백업·아카이브 삭제</a:t>
+              <a:t>•  NONE (기본값) — 자동으로 지우지 않는다</a:t>
             </a:r>
           </a:p>
           <a:p>
@@ -14191,7 +14263,7 @@
                 </a:solidFill>
                 <a:latin typeface="맑은 고딕"/>
               </a:rPr>
-              <a:t>•  FRA 825MB / 5개 파일 (컨트롤파일 1 + 리두 멤버 4)</a:t>
+              <a:t>•  BACKED UP n TIMES TO DISK — 일반적인 선택</a:t>
             </a:r>
           </a:p>
           <a:p>
@@ -14207,7 +14279,7 @@
                 </a:solidFill>
                 <a:latin typeface="맑은 고딕"/>
               </a:rPr>
-              <a:t>•  V$SPPARAMETER 로 log_archive_dest_1 미지정 확인</a:t>
+              <a:t>•  APPLIED / SHIPPED ON ALL STANDBY — Data Guard 구성</a:t>
             </a:r>
           </a:p>
           <a:p>
@@ -14223,7 +14295,7 @@
                 </a:solidFill>
                 <a:latin typeface="맑은 고딕"/>
               </a:rPr>
-              <a:t>•  CRS 자원 17개, 두 인스턴스 OPEN</a:t>
+              <a:t>•  정책은 데이터베이스 단위. 인스턴스별로 다르게 못 한다</a:t>
             </a:r>
           </a:p>
           <a:p>
@@ -14239,7 +14311,7 @@
                 </a:solidFill>
                 <a:latin typeface="맑은 고딕"/>
               </a:rPr>
-              <a:t>•  ARCHIVELOG 는 유지 — 이후 장에서도 이 상태를 전제</a:t>
+              <a:t>•  이 랩은 NONE 이라 실습 후 수동으로 지웠다</a:t>
             </a:r>
           </a:p>
         </p:txBody>
@@ -14253,6 +14325,508 @@
 </file>
 
 <file path=ppt/slides/slide42.xml><?xml version="1.0" encoding="utf-8"?>
+<p:sld xmlns:a="http://schemas.openxmlformats.org/drawingml/2006/main" xmlns:p="http://schemas.openxmlformats.org/presentationml/2006/main" xmlns:r="http://schemas.openxmlformats.org/officeDocument/2006/relationships">
+  <p:cSld>
+    <p:spTree>
+      <p:nvGrpSpPr>
+        <p:cNvPr id="1" name=""/>
+        <p:cNvGrpSpPr/>
+        <p:nvPr/>
+      </p:nvGrpSpPr>
+      <p:grpSpPr/>
+      <p:sp>
+        <p:nvSpPr>
+          <p:cNvPr id="2" name="Rectangle 1"/>
+          <p:cNvSpPr/>
+          <p:nvPr/>
+        </p:nvSpPr>
+        <p:spPr>
+          <a:xfrm>
+            <a:off x="0" y="0"/>
+            <a:ext cx="12191695" cy="1005840"/>
+          </a:xfrm>
+          <a:prstGeom prst="rect">
+            <a:avLst/>
+          </a:prstGeom>
+          <a:solidFill>
+            <a:srgbClr val="C0392B"/>
+          </a:solidFill>
+          <a:ln>
+            <a:noFill/>
+          </a:ln>
+          <a:effectLst/>
+        </p:spPr>
+        <p:style>
+          <a:lnRef idx="1">
+            <a:schemeClr val="accent1"/>
+          </a:lnRef>
+          <a:fillRef idx="3">
+            <a:schemeClr val="accent1"/>
+          </a:fillRef>
+          <a:effectRef idx="2">
+            <a:schemeClr val="accent1"/>
+          </a:effectRef>
+          <a:fontRef idx="minor">
+            <a:schemeClr val="lt1"/>
+          </a:fontRef>
+        </p:style>
+        <p:txBody>
+          <a:bodyPr rtlCol="0" anchor="ctr"/>
+          <a:lstStyle/>
+          <a:p>
+            <a:pPr algn="ctr"/>
+          </a:p>
+        </p:txBody>
+      </p:sp>
+      <p:sp>
+        <p:nvSpPr>
+          <p:cNvPr id="3" name="TextBox 2"/>
+          <p:cNvSpPr txBox="1"/>
+          <p:nvPr/>
+        </p:nvSpPr>
+        <p:spPr>
+          <a:xfrm>
+            <a:off x="548640" y="91440"/>
+            <a:ext cx="10972800" cy="777240"/>
+          </a:xfrm>
+          <a:prstGeom prst="rect">
+            <a:avLst/>
+          </a:prstGeom>
+          <a:noFill/>
+        </p:spPr>
+        <p:txBody>
+          <a:bodyPr wrap="square">
+            <a:spAutoFit/>
+          </a:bodyPr>
+          <a:lstStyle/>
+          <a:p>
+            <a:pPr algn="l">
+              <a:spcAft>
+                <a:spcPts val="600"/>
+              </a:spcAft>
+            </a:pPr>
+            <a:r>
+              <a:rPr sz="2600" b="1">
+                <a:solidFill>
+                  <a:srgbClr val="FFFFFF"/>
+                </a:solidFill>
+                <a:latin typeface="맑은 고딕"/>
+              </a:rPr>
+              <a:t>이 장의 점검 항목</a:t>
+            </a:r>
+          </a:p>
+        </p:txBody>
+      </p:sp>
+      <p:sp>
+        <p:nvSpPr>
+          <p:cNvPr id="4" name="TextBox 3"/>
+          <p:cNvSpPr txBox="1"/>
+          <p:nvPr/>
+        </p:nvSpPr>
+        <p:spPr>
+          <a:xfrm>
+            <a:off x="640080" y="1078992"/>
+            <a:ext cx="10881360" cy="457200"/>
+          </a:xfrm>
+          <a:prstGeom prst="rect">
+            <a:avLst/>
+          </a:prstGeom>
+          <a:noFill/>
+        </p:spPr>
+        <p:txBody>
+          <a:bodyPr wrap="square">
+            <a:spAutoFit/>
+          </a:bodyPr>
+          <a:lstStyle/>
+          <a:p>
+            <a:pPr algn="l">
+              <a:spcAft>
+                <a:spcPts val="600"/>
+              </a:spcAft>
+            </a:pPr>
+            <a:r>
+              <a:rPr sz="1500" b="0">
+                <a:solidFill>
+                  <a:srgbClr val="5A6672"/>
+                </a:solidFill>
+                <a:latin typeface="맑은 고딕"/>
+              </a:rPr>
+              <a:t>RAC 특유의 셋</a:t>
+            </a:r>
+          </a:p>
+        </p:txBody>
+      </p:sp>
+      <p:sp>
+        <p:nvSpPr>
+          <p:cNvPr id="5" name="TextBox 4"/>
+          <p:cNvSpPr txBox="1"/>
+          <p:nvPr/>
+        </p:nvSpPr>
+        <p:spPr>
+          <a:xfrm>
+            <a:off x="640080" y="1737360"/>
+            <a:ext cx="10881360" cy="4754880"/>
+          </a:xfrm>
+          <a:prstGeom prst="rect">
+            <a:avLst/>
+          </a:prstGeom>
+          <a:noFill/>
+        </p:spPr>
+        <p:txBody>
+          <a:bodyPr wrap="square">
+            <a:spAutoFit/>
+          </a:bodyPr>
+          <a:lstStyle/>
+          <a:p>
+            <a:pPr algn="l">
+              <a:spcAft>
+                <a:spcPts val="1000"/>
+              </a:spcAft>
+            </a:pPr>
+            <a:r>
+              <a:rPr sz="1700" b="0">
+                <a:solidFill>
+                  <a:srgbClr val="222222"/>
+                </a:solidFill>
+                <a:latin typeface="맑은 고딕"/>
+              </a:rPr>
+              <a:t>•  매일 — 스레드별 아카이브 최근 생성 시각</a:t>
+            </a:r>
+          </a:p>
+          <a:p>
+            <a:pPr algn="l">
+              <a:spcAft>
+                <a:spcPts val="1000"/>
+              </a:spcAft>
+            </a:pPr>
+            <a:r>
+              <a:rPr sz="1700" b="0">
+                <a:solidFill>
+                  <a:srgbClr val="222222"/>
+                </a:solidFill>
+                <a:latin typeface="맑은 고딕"/>
+              </a:rPr>
+              <a:t>•  매일 — FRA 사용률 (space_used / space_limit)</a:t>
+            </a:r>
+          </a:p>
+          <a:p>
+            <a:pPr algn="l">
+              <a:spcAft>
+                <a:spcPts val="1000"/>
+              </a:spcAft>
+            </a:pPr>
+            <a:r>
+              <a:rPr sz="1700" b="0">
+                <a:solidFill>
+                  <a:srgbClr val="222222"/>
+                </a:solidFill>
+                <a:latin typeface="맑은 고딕"/>
+              </a:rPr>
+              <a:t>•  매일 — GV$ARCHIVE_DEST 의 STATUS 가 VALID 인가</a:t>
+            </a:r>
+          </a:p>
+          <a:p>
+            <a:pPr algn="l">
+              <a:spcAft>
+                <a:spcPts val="1000"/>
+              </a:spcAft>
+            </a:pPr>
+            <a:r>
+              <a:rPr sz="1700" b="0">
+                <a:solidFill>
+                  <a:srgbClr val="222222"/>
+                </a:solidFill>
+                <a:latin typeface="맑은 고딕"/>
+              </a:rPr>
+              <a:t>•  주간 — 다른 노드에서 restore database validate</a:t>
+            </a:r>
+          </a:p>
+          <a:p>
+            <a:pPr algn="l">
+              <a:spcAft>
+                <a:spcPts val="1000"/>
+              </a:spcAft>
+            </a:pPr>
+            <a:r>
+              <a:rPr sz="1700" b="0">
+                <a:solidFill>
+                  <a:srgbClr val="222222"/>
+                </a:solidFill>
+                <a:latin typeface="맑은 고딕"/>
+              </a:rPr>
+              <a:t>•  주간 — 스레드별 시퀀스 끊김 확인</a:t>
+            </a:r>
+          </a:p>
+        </p:txBody>
+      </p:sp>
+    </p:spTree>
+  </p:cSld>
+  <p:clrMapOvr>
+    <a:masterClrMapping/>
+  </p:clrMapOvr>
+</p:sld>
+</file>
+
+<file path=ppt/slides/slide43.xml><?xml version="1.0" encoding="utf-8"?>
+<p:sld xmlns:a="http://schemas.openxmlformats.org/drawingml/2006/main" xmlns:p="http://schemas.openxmlformats.org/presentationml/2006/main" xmlns:r="http://schemas.openxmlformats.org/officeDocument/2006/relationships">
+  <p:cSld>
+    <p:spTree>
+      <p:nvGrpSpPr>
+        <p:cNvPr id="1" name=""/>
+        <p:cNvGrpSpPr/>
+        <p:nvPr/>
+      </p:nvGrpSpPr>
+      <p:grpSpPr/>
+      <p:sp>
+        <p:nvSpPr>
+          <p:cNvPr id="2" name="Rectangle 1"/>
+          <p:cNvSpPr/>
+          <p:nvPr/>
+        </p:nvSpPr>
+        <p:spPr>
+          <a:xfrm>
+            <a:off x="0" y="0"/>
+            <a:ext cx="12191695" cy="1005840"/>
+          </a:xfrm>
+          <a:prstGeom prst="rect">
+            <a:avLst/>
+          </a:prstGeom>
+          <a:solidFill>
+            <a:srgbClr val="C0392B"/>
+          </a:solidFill>
+          <a:ln>
+            <a:noFill/>
+          </a:ln>
+          <a:effectLst/>
+        </p:spPr>
+        <p:style>
+          <a:lnRef idx="1">
+            <a:schemeClr val="accent1"/>
+          </a:lnRef>
+          <a:fillRef idx="3">
+            <a:schemeClr val="accent1"/>
+          </a:fillRef>
+          <a:effectRef idx="2">
+            <a:schemeClr val="accent1"/>
+          </a:effectRef>
+          <a:fontRef idx="minor">
+            <a:schemeClr val="lt1"/>
+          </a:fontRef>
+        </p:style>
+        <p:txBody>
+          <a:bodyPr rtlCol="0" anchor="ctr"/>
+          <a:lstStyle/>
+          <a:p>
+            <a:pPr algn="ctr"/>
+          </a:p>
+        </p:txBody>
+      </p:sp>
+      <p:sp>
+        <p:nvSpPr>
+          <p:cNvPr id="3" name="TextBox 2"/>
+          <p:cNvSpPr txBox="1"/>
+          <p:nvPr/>
+        </p:nvSpPr>
+        <p:spPr>
+          <a:xfrm>
+            <a:off x="548640" y="91440"/>
+            <a:ext cx="10972800" cy="777240"/>
+          </a:xfrm>
+          <a:prstGeom prst="rect">
+            <a:avLst/>
+          </a:prstGeom>
+          <a:noFill/>
+        </p:spPr>
+        <p:txBody>
+          <a:bodyPr wrap="square">
+            <a:spAutoFit/>
+          </a:bodyPr>
+          <a:lstStyle/>
+          <a:p>
+            <a:pPr algn="l">
+              <a:spcAft>
+                <a:spcPts val="600"/>
+              </a:spcAft>
+            </a:pPr>
+            <a:r>
+              <a:rPr sz="2600" b="1">
+                <a:solidFill>
+                  <a:srgbClr val="FFFFFF"/>
+                </a:solidFill>
+                <a:latin typeface="맑은 고딕"/>
+              </a:rPr>
+              <a:t>정리와 기준선</a:t>
+            </a:r>
+          </a:p>
+        </p:txBody>
+      </p:sp>
+      <p:sp>
+        <p:nvSpPr>
+          <p:cNvPr id="4" name="TextBox 3"/>
+          <p:cNvSpPr txBox="1"/>
+          <p:nvPr/>
+        </p:nvSpPr>
+        <p:spPr>
+          <a:xfrm>
+            <a:off x="640080" y="1078992"/>
+            <a:ext cx="10881360" cy="457200"/>
+          </a:xfrm>
+          <a:prstGeom prst="rect">
+            <a:avLst/>
+          </a:prstGeom>
+          <a:noFill/>
+        </p:spPr>
+        <p:txBody>
+          <a:bodyPr wrap="square">
+            <a:spAutoFit/>
+          </a:bodyPr>
+          <a:lstStyle/>
+          <a:p>
+            <a:pPr algn="l">
+              <a:spcAft>
+                <a:spcPts val="600"/>
+              </a:spcAft>
+            </a:pPr>
+            <a:r>
+              <a:rPr sz="1500" b="0">
+                <a:solidFill>
+                  <a:srgbClr val="5A6672"/>
+                </a:solidFill>
+                <a:latin typeface="맑은 고딕"/>
+              </a:rPr>
+              <a:t>ARCHIVELOG 만 되돌리지 않는다</a:t>
+            </a:r>
+          </a:p>
+        </p:txBody>
+      </p:sp>
+      <p:sp>
+        <p:nvSpPr>
+          <p:cNvPr id="5" name="TextBox 4"/>
+          <p:cNvSpPr txBox="1"/>
+          <p:nvPr/>
+        </p:nvSpPr>
+        <p:spPr>
+          <a:xfrm>
+            <a:off x="640080" y="1737360"/>
+            <a:ext cx="10881360" cy="4754880"/>
+          </a:xfrm>
+          <a:prstGeom prst="rect">
+            <a:avLst/>
+          </a:prstGeom>
+          <a:noFill/>
+        </p:spPr>
+        <p:txBody>
+          <a:bodyPr wrap="square">
+            <a:spAutoFit/>
+          </a:bodyPr>
+          <a:lstStyle/>
+          <a:p>
+            <a:pPr algn="l">
+              <a:spcAft>
+                <a:spcPts val="1000"/>
+              </a:spcAft>
+            </a:pPr>
+            <a:r>
+              <a:rPr sz="1700" b="0">
+                <a:solidFill>
+                  <a:srgbClr val="222222"/>
+                </a:solidFill>
+                <a:latin typeface="맑은 고딕"/>
+              </a:rPr>
+              <a:t>•  실습 테이블스페이스 삭제, 백업·아카이브 삭제</a:t>
+            </a:r>
+          </a:p>
+          <a:p>
+            <a:pPr algn="l">
+              <a:spcAft>
+                <a:spcPts val="1000"/>
+              </a:spcAft>
+            </a:pPr>
+            <a:r>
+              <a:rPr sz="1700" b="0">
+                <a:solidFill>
+                  <a:srgbClr val="222222"/>
+                </a:solidFill>
+                <a:latin typeface="맑은 고딕"/>
+              </a:rPr>
+              <a:t>•  SPFILE 등록 정보 원복 확인 (17.7.4 절의 부작용)</a:t>
+            </a:r>
+          </a:p>
+          <a:p>
+            <a:pPr algn="l">
+              <a:spcAft>
+                <a:spcPts val="1000"/>
+              </a:spcAft>
+            </a:pPr>
+            <a:r>
+              <a:rPr sz="1700" b="0">
+                <a:solidFill>
+                  <a:srgbClr val="222222"/>
+                </a:solidFill>
+                <a:latin typeface="맑은 고딕"/>
+              </a:rPr>
+              <a:t>•  FRA 825MB / 5개 파일 (컨트롤파일 1 + 리두 멤버 4)</a:t>
+            </a:r>
+          </a:p>
+          <a:p>
+            <a:pPr algn="l">
+              <a:spcAft>
+                <a:spcPts val="1000"/>
+              </a:spcAft>
+            </a:pPr>
+            <a:r>
+              <a:rPr sz="1700" b="0">
+                <a:solidFill>
+                  <a:srgbClr val="222222"/>
+                </a:solidFill>
+                <a:latin typeface="맑은 고딕"/>
+              </a:rPr>
+              <a:t>•  V$SPPARAMETER 로 log_archive_dest_1 미지정 확인</a:t>
+            </a:r>
+          </a:p>
+          <a:p>
+            <a:pPr algn="l">
+              <a:spcAft>
+                <a:spcPts val="1000"/>
+              </a:spcAft>
+            </a:pPr>
+            <a:r>
+              <a:rPr sz="1700" b="0">
+                <a:solidFill>
+                  <a:srgbClr val="222222"/>
+                </a:solidFill>
+                <a:latin typeface="맑은 고딕"/>
+              </a:rPr>
+              <a:t>•  CRS 자원 17개, 두 인스턴스 OPEN</a:t>
+            </a:r>
+          </a:p>
+          <a:p>
+            <a:pPr algn="l">
+              <a:spcAft>
+                <a:spcPts val="1000"/>
+              </a:spcAft>
+            </a:pPr>
+            <a:r>
+              <a:rPr sz="1700" b="0">
+                <a:solidFill>
+                  <a:srgbClr val="222222"/>
+                </a:solidFill>
+                <a:latin typeface="맑은 고딕"/>
+              </a:rPr>
+              <a:t>•  ARCHIVELOG 는 유지 — 이후 장에서도 이 상태를 전제</a:t>
+            </a:r>
+          </a:p>
+        </p:txBody>
+      </p:sp>
+    </p:spTree>
+  </p:cSld>
+  <p:clrMapOvr>
+    <a:masterClrMapping/>
+  </p:clrMapOvr>
+</p:sld>
+</file>
+
+<file path=ppt/slides/slide44.xml><?xml version="1.0" encoding="utf-8"?>
 <p:sld xmlns:a="http://schemas.openxmlformats.org/drawingml/2006/main" xmlns:p="http://schemas.openxmlformats.org/presentationml/2006/main" xmlns:r="http://schemas.openxmlformats.org/officeDocument/2006/relationships">
   <p:cSld>
     <p:spTree>

--- a/RAC/17장/17장_RAC백업과복구.pptx
+++ b/RAC/17장/17장_RAC백업과복구.pptx
@@ -4,53 +4,56 @@
   <p:sldMasterIdLst>
     <p:sldMasterId id="2147483648" r:id="rId1"/>
   </p:sldMasterIdLst>
+  <p:notesMasterIdLst>
+    <p:notesMasterId r:id="rId46"/>
+  </p:notesMasterIdLst>
   <p:sldIdLst>
-    <p:sldId id="256" r:id="rId7"/>
-    <p:sldId id="257" r:id="rId8"/>
-    <p:sldId id="258" r:id="rId9"/>
-    <p:sldId id="259" r:id="rId10"/>
-    <p:sldId id="260" r:id="rId12"/>
-    <p:sldId id="261" r:id="rId13"/>
-    <p:sldId id="262" r:id="rId14"/>
-    <p:sldId id="263" r:id="rId15"/>
-    <p:sldId id="264" r:id="rId16"/>
-    <p:sldId id="265" r:id="rId17"/>
-    <p:sldId id="266" r:id="rId18"/>
-    <p:sldId id="267" r:id="rId19"/>
-    <p:sldId id="268" r:id="rId20"/>
-    <p:sldId id="269" r:id="rId21"/>
-    <p:sldId id="270" r:id="rId22"/>
-    <p:sldId id="271" r:id="rId23"/>
-    <p:sldId id="272" r:id="rId24"/>
-    <p:sldId id="273" r:id="rId25"/>
-    <p:sldId id="274" r:id="rId26"/>
-    <p:sldId id="275" r:id="rId27"/>
-    <p:sldId id="276" r:id="rId28"/>
-    <p:sldId id="277" r:id="rId29"/>
-    <p:sldId id="278" r:id="rId30"/>
-    <p:sldId id="279" r:id="rId31"/>
-    <p:sldId id="280" r:id="rId32"/>
-    <p:sldId id="281" r:id="rId33"/>
-    <p:sldId id="282" r:id="rId34"/>
-    <p:sldId id="283" r:id="rId35"/>
-    <p:sldId id="284" r:id="rId36"/>
-    <p:sldId id="285" r:id="rId37"/>
-    <p:sldId id="286" r:id="rId38"/>
-    <p:sldId id="287" r:id="rId39"/>
-    <p:sldId id="288" r:id="rId40"/>
-    <p:sldId id="289" r:id="rId41"/>
-    <p:sldId id="290" r:id="rId42"/>
-    <p:sldId id="291" r:id="rId43"/>
-    <p:sldId id="292" r:id="rId44"/>
-    <p:sldId id="293" r:id="rId45"/>
-    <p:sldId id="294" r:id="rId46"/>
-    <p:sldId id="295" r:id="rId47"/>
-    <p:sldId id="296" r:id="rId48"/>
-    <p:sldId id="297" r:id="rId49"/>
-    <p:sldId id="298" r:id="rId50"/>
-    <p:sldId id="299" r:id="rId51"/>
+    <p:sldId id="256" r:id="rId2"/>
+    <p:sldId id="257" r:id="rId3"/>
+    <p:sldId id="258" r:id="rId4"/>
+    <p:sldId id="259" r:id="rId5"/>
+    <p:sldId id="260" r:id="rId6"/>
+    <p:sldId id="261" r:id="rId7"/>
+    <p:sldId id="262" r:id="rId8"/>
+    <p:sldId id="263" r:id="rId9"/>
+    <p:sldId id="264" r:id="rId10"/>
+    <p:sldId id="265" r:id="rId11"/>
+    <p:sldId id="266" r:id="rId12"/>
+    <p:sldId id="267" r:id="rId13"/>
+    <p:sldId id="268" r:id="rId14"/>
+    <p:sldId id="269" r:id="rId15"/>
+    <p:sldId id="270" r:id="rId16"/>
+    <p:sldId id="271" r:id="rId17"/>
+    <p:sldId id="272" r:id="rId18"/>
+    <p:sldId id="273" r:id="rId19"/>
+    <p:sldId id="274" r:id="rId20"/>
+    <p:sldId id="275" r:id="rId21"/>
+    <p:sldId id="276" r:id="rId22"/>
+    <p:sldId id="277" r:id="rId23"/>
+    <p:sldId id="278" r:id="rId24"/>
+    <p:sldId id="279" r:id="rId25"/>
+    <p:sldId id="280" r:id="rId26"/>
+    <p:sldId id="281" r:id="rId27"/>
+    <p:sldId id="282" r:id="rId28"/>
+    <p:sldId id="283" r:id="rId29"/>
+    <p:sldId id="284" r:id="rId30"/>
+    <p:sldId id="285" r:id="rId31"/>
+    <p:sldId id="286" r:id="rId32"/>
+    <p:sldId id="287" r:id="rId33"/>
+    <p:sldId id="288" r:id="rId34"/>
+    <p:sldId id="289" r:id="rId35"/>
+    <p:sldId id="290" r:id="rId36"/>
+    <p:sldId id="291" r:id="rId37"/>
+    <p:sldId id="292" r:id="rId38"/>
+    <p:sldId id="293" r:id="rId39"/>
+    <p:sldId id="294" r:id="rId40"/>
+    <p:sldId id="295" r:id="rId41"/>
+    <p:sldId id="296" r:id="rId42"/>
+    <p:sldId id="297" r:id="rId43"/>
+    <p:sldId id="298" r:id="rId44"/>
+    <p:sldId id="299" r:id="rId45"/>
   </p:sldIdLst>
-  <p:sldSz cx="12191695" cy="6858000" type="screen4x3"/>
+  <p:sldSz cx="12192000" cy="6858000"/>
   <p:notesSz cx="6858000" cy="9144000"/>
   <p:defaultTextStyle>
     <a:defPPr>
@@ -147,11 +150,27 @@
       </a:defRPr>
     </a:lvl9pPr>
   </p:defaultTextStyle>
+  <p:extLst>
+    <p:ext uri="{EFAFB233-063F-42B5-8137-9DF3F51BA10A}">
+      <p15:sldGuideLst xmlns:p15="http://schemas.microsoft.com/office/powerpoint/2012/main">
+        <p15:guide id="1" orient="horz" pos="2160">
+          <p15:clr>
+            <a:srgbClr val="A4A3A4"/>
+          </p15:clr>
+        </p15:guide>
+        <p15:guide id="2" pos="2880">
+          <p15:clr>
+            <a:srgbClr val="A4A3A4"/>
+          </p15:clr>
+        </p15:guide>
+      </p15:sldGuideLst>
+    </p:ext>
+  </p:extLst>
 </p:presentation>
 </file>
 
 <file path=ppt/notesMasters/notesMaster1.xml><?xml version="1.0" encoding="utf-8"?>
-<p:notesMaster xmlns:a="http://schemas.openxmlformats.org/drawingml/2006/main" xmlns:p="http://schemas.openxmlformats.org/presentationml/2006/main" xmlns:r="http://schemas.openxmlformats.org/officeDocument/2006/relationships">
+<p:notesMaster xmlns:a="http://schemas.openxmlformats.org/drawingml/2006/main" xmlns:r="http://schemas.openxmlformats.org/officeDocument/2006/relationships" xmlns:p="http://schemas.openxmlformats.org/presentationml/2006/main">
   <p:cSld>
     <p:bg>
       <p:bgRef idx="1001">
@@ -174,7 +193,7 @@
       </p:grpSpPr>
       <p:sp>
         <p:nvSpPr>
-          <p:cNvPr id="2" name="Header Placeholder 1"/>
+          <p:cNvPr id="2" name="머리글 개체 틀 1"/>
           <p:cNvSpPr>
             <a:spLocks noGrp="1"/>
           </p:cNvSpPr>
@@ -185,7 +204,7 @@
         <p:spPr>
           <a:xfrm>
             <a:off x="0" y="0"/>
-            <a:ext cx="2971800" cy="457200"/>
+            <a:ext cx="2971800" cy="458788"/>
           </a:xfrm>
           <a:prstGeom prst="rect">
             <a:avLst/>
@@ -199,13 +218,13 @@
             </a:lvl1pPr>
           </a:lstStyle>
           <a:p>
-            <a:endParaRPr lang="en-US"/>
-          </a:p>
-        </p:txBody>
-      </p:sp>
-      <p:sp>
-        <p:nvSpPr>
-          <p:cNvPr id="3" name="Date Placeholder 2"/>
+            <a:endParaRPr lang="ko-KR" altLang="en-US"/>
+          </a:p>
+        </p:txBody>
+      </p:sp>
+      <p:sp>
+        <p:nvSpPr>
+          <p:cNvPr id="3" name="날짜 개체 틀 2"/>
           <p:cNvSpPr>
             <a:spLocks noGrp="1"/>
           </p:cNvSpPr>
@@ -216,7 +235,7 @@
         <p:spPr>
           <a:xfrm>
             <a:off x="3884613" y="0"/>
-            <a:ext cx="2971800" cy="457200"/>
+            <a:ext cx="2971800" cy="458788"/>
           </a:xfrm>
           <a:prstGeom prst="rect">
             <a:avLst/>
@@ -230,17 +249,17 @@
             </a:lvl1pPr>
           </a:lstStyle>
           <a:p>
-            <a:fld id="{0F89C1C7-3DCD-1040-A9CF-14679D8B5DDD}" type="datetimeFigureOut">
-              <a:rPr lang="en-US" smtClean="0"/>
-              <a:t>10/17/16</a:t>
+            <a:fld id="{2E2CBDCD-331D-4409-B712-5C8EFB0EFE87}" type="datetimeFigureOut">
+              <a:rPr lang="ko-KR" altLang="en-US" smtClean="0"/>
+              <a:t>2026-10-29</a:t>
             </a:fld>
-            <a:endParaRPr lang="en-US"/>
-          </a:p>
-        </p:txBody>
-      </p:sp>
-      <p:sp>
-        <p:nvSpPr>
-          <p:cNvPr id="4" name="Slide Image Placeholder 3"/>
+            <a:endParaRPr lang="ko-KR" altLang="en-US"/>
+          </a:p>
+        </p:txBody>
+      </p:sp>
+      <p:sp>
+        <p:nvSpPr>
+          <p:cNvPr id="4" name="슬라이드 이미지 개체 틀 3"/>
           <p:cNvSpPr>
             <a:spLocks noGrp="1" noRot="1" noChangeAspect="1"/>
           </p:cNvSpPr>
@@ -250,8 +269,8 @@
         </p:nvSpPr>
         <p:spPr>
           <a:xfrm>
-            <a:off x="1143000" y="685800"/>
-            <a:ext cx="4572000" cy="3429000"/>
+            <a:off x="685800" y="1143000"/>
+            <a:ext cx="5486400" cy="3086100"/>
           </a:xfrm>
           <a:prstGeom prst="rect">
             <a:avLst/>
@@ -267,13 +286,13 @@
           <a:bodyPr vert="horz" lIns="91440" tIns="45720" rIns="91440" bIns="45720" rtlCol="0" anchor="ctr"/>
           <a:lstStyle/>
           <a:p>
-            <a:endParaRPr lang="en-US"/>
-          </a:p>
-        </p:txBody>
-      </p:sp>
-      <p:sp>
-        <p:nvSpPr>
-          <p:cNvPr id="5" name="Notes Placeholder 4"/>
+            <a:endParaRPr lang="ko-KR" altLang="en-US"/>
+          </a:p>
+        </p:txBody>
+      </p:sp>
+      <p:sp>
+        <p:nvSpPr>
+          <p:cNvPr id="5" name="슬라이드 노트 개체 틀 4"/>
           <p:cNvSpPr>
             <a:spLocks noGrp="1"/>
           </p:cNvSpPr>
@@ -283,8 +302,8 @@
         </p:nvSpPr>
         <p:spPr>
           <a:xfrm>
-            <a:off x="685800" y="4343400"/>
-            <a:ext cx="5486400" cy="4114800"/>
+            <a:off x="685800" y="4400550"/>
+            <a:ext cx="5486400" cy="3600450"/>
           </a:xfrm>
           <a:prstGeom prst="rect">
             <a:avLst/>
@@ -296,44 +315,43 @@
           <a:p>
             <a:pPr lvl="0"/>
             <a:r>
-              <a:rPr lang="en-US" smtClean="0"/>
-              <a:t>Click to edit Master text styles</a:t>
+              <a:rPr lang="ko-KR" altLang="en-US"/>
+              <a:t>마스터 텍스트 스타일을 편집하려면 클릭</a:t>
             </a:r>
           </a:p>
           <a:p>
             <a:pPr lvl="1"/>
             <a:r>
-              <a:rPr lang="en-US" smtClean="0"/>
-              <a:t>Second level</a:t>
+              <a:rPr lang="ko-KR" altLang="en-US"/>
+              <a:t>두 번째 수준</a:t>
             </a:r>
           </a:p>
           <a:p>
             <a:pPr lvl="2"/>
             <a:r>
-              <a:rPr lang="en-US" smtClean="0"/>
-              <a:t>Third level</a:t>
+              <a:rPr lang="ko-KR" altLang="en-US"/>
+              <a:t>세 번째 수준</a:t>
             </a:r>
           </a:p>
           <a:p>
             <a:pPr lvl="3"/>
             <a:r>
-              <a:rPr lang="en-US" smtClean="0"/>
-              <a:t>Fourth level</a:t>
+              <a:rPr lang="ko-KR" altLang="en-US"/>
+              <a:t>네 번째 수준</a:t>
             </a:r>
           </a:p>
           <a:p>
             <a:pPr lvl="4"/>
             <a:r>
-              <a:rPr lang="en-US" smtClean="0"/>
-              <a:t>Fifth level</a:t>
-            </a:r>
-            <a:endParaRPr lang="en-US"/>
-          </a:p>
-        </p:txBody>
-      </p:sp>
-      <p:sp>
-        <p:nvSpPr>
-          <p:cNvPr id="6" name="Footer Placeholder 5"/>
+              <a:rPr lang="ko-KR" altLang="en-US"/>
+              <a:t>다섯 번째 수준</a:t>
+            </a:r>
+          </a:p>
+        </p:txBody>
+      </p:sp>
+      <p:sp>
+        <p:nvSpPr>
+          <p:cNvPr id="6" name="바닥글 개체 틀 5"/>
           <p:cNvSpPr>
             <a:spLocks noGrp="1"/>
           </p:cNvSpPr>
@@ -344,7 +362,7 @@
         <p:spPr>
           <a:xfrm>
             <a:off x="0" y="8685213"/>
-            <a:ext cx="2971800" cy="457200"/>
+            <a:ext cx="2971800" cy="458787"/>
           </a:xfrm>
           <a:prstGeom prst="rect">
             <a:avLst/>
@@ -358,13 +376,13 @@
             </a:lvl1pPr>
           </a:lstStyle>
           <a:p>
-            <a:endParaRPr lang="en-US"/>
-          </a:p>
-        </p:txBody>
-      </p:sp>
-      <p:sp>
-        <p:nvSpPr>
-          <p:cNvPr id="7" name="Slide Number Placeholder 6"/>
+            <a:endParaRPr lang="ko-KR" altLang="en-US"/>
+          </a:p>
+        </p:txBody>
+      </p:sp>
+      <p:sp>
+        <p:nvSpPr>
+          <p:cNvPr id="7" name="슬라이드 번호 개체 틀 6"/>
           <p:cNvSpPr>
             <a:spLocks noGrp="1"/>
           </p:cNvSpPr>
@@ -375,7 +393,7 @@
         <p:spPr>
           <a:xfrm>
             <a:off x="3884613" y="8685213"/>
-            <a:ext cx="2971800" cy="457200"/>
+            <a:ext cx="2971800" cy="458787"/>
           </a:xfrm>
           <a:prstGeom prst="rect">
             <a:avLst/>
@@ -389,24 +407,24 @@
             </a:lvl1pPr>
           </a:lstStyle>
           <a:p>
-            <a:fld id="{BB5E49A5-4136-284D-997B-48E1D791AD67}" type="slidenum">
-              <a:rPr lang="en-US" smtClean="0"/>
+            <a:fld id="{2ADABB2D-8114-443B-9C33-D2F033CD6B7E}" type="slidenum">
+              <a:rPr lang="ko-KR" altLang="en-US" smtClean="0"/>
               <a:t>‹#›</a:t>
             </a:fld>
-            <a:endParaRPr lang="en-US"/>
+            <a:endParaRPr lang="ko-KR" altLang="en-US"/>
           </a:p>
         </p:txBody>
       </p:sp>
     </p:spTree>
     <p:extLst>
       <p:ext uri="{BB962C8B-B14F-4D97-AF65-F5344CB8AC3E}">
-        <p14:creationId xmlns:p14="http://schemas.microsoft.com/office/powerpoint/2010/main" val="2623252185"/>
+        <p14:creationId xmlns:p14="http://schemas.microsoft.com/office/powerpoint/2010/main" val="68329862"/>
       </p:ext>
     </p:extLst>
   </p:cSld>
   <p:clrMap bg1="lt1" tx1="dk1" bg2="lt2" tx2="dk2" accent1="accent1" accent2="accent2" accent3="accent3" accent4="accent4" accent5="accent5" accent6="accent6" hlink="hlink" folHlink="folHlink"/>
   <p:notesStyle>
-    <a:lvl1pPr marL="0" algn="l" defTabSz="457200" rtl="0" eaLnBrk="1" latinLnBrk="0" hangingPunct="1">
+    <a:lvl1pPr marL="0" algn="l" defTabSz="914400" rtl="0" eaLnBrk="1" latinLnBrk="1" hangingPunct="1">
       <a:defRPr sz="1200" kern="1200">
         <a:solidFill>
           <a:schemeClr val="tx1"/>
@@ -416,7 +434,7 @@
         <a:cs typeface="+mn-cs"/>
       </a:defRPr>
     </a:lvl1pPr>
-    <a:lvl2pPr marL="457200" algn="l" defTabSz="457200" rtl="0" eaLnBrk="1" latinLnBrk="0" hangingPunct="1">
+    <a:lvl2pPr marL="457200" algn="l" defTabSz="914400" rtl="0" eaLnBrk="1" latinLnBrk="1" hangingPunct="1">
       <a:defRPr sz="1200" kern="1200">
         <a:solidFill>
           <a:schemeClr val="tx1"/>
@@ -426,7 +444,7 @@
         <a:cs typeface="+mn-cs"/>
       </a:defRPr>
     </a:lvl2pPr>
-    <a:lvl3pPr marL="914400" algn="l" defTabSz="457200" rtl="0" eaLnBrk="1" latinLnBrk="0" hangingPunct="1">
+    <a:lvl3pPr marL="914400" algn="l" defTabSz="914400" rtl="0" eaLnBrk="1" latinLnBrk="1" hangingPunct="1">
       <a:defRPr sz="1200" kern="1200">
         <a:solidFill>
           <a:schemeClr val="tx1"/>
@@ -436,7 +454,7 @@
         <a:cs typeface="+mn-cs"/>
       </a:defRPr>
     </a:lvl3pPr>
-    <a:lvl4pPr marL="1371600" algn="l" defTabSz="457200" rtl="0" eaLnBrk="1" latinLnBrk="0" hangingPunct="1">
+    <a:lvl4pPr marL="1371600" algn="l" defTabSz="914400" rtl="0" eaLnBrk="1" latinLnBrk="1" hangingPunct="1">
       <a:defRPr sz="1200" kern="1200">
         <a:solidFill>
           <a:schemeClr val="tx1"/>
@@ -446,7 +464,7 @@
         <a:cs typeface="+mn-cs"/>
       </a:defRPr>
     </a:lvl4pPr>
-    <a:lvl5pPr marL="1828800" algn="l" defTabSz="457200" rtl="0" eaLnBrk="1" latinLnBrk="0" hangingPunct="1">
+    <a:lvl5pPr marL="1828800" algn="l" defTabSz="914400" rtl="0" eaLnBrk="1" latinLnBrk="1" hangingPunct="1">
       <a:defRPr sz="1200" kern="1200">
         <a:solidFill>
           <a:schemeClr val="tx1"/>
@@ -456,7 +474,7 @@
         <a:cs typeface="+mn-cs"/>
       </a:defRPr>
     </a:lvl5pPr>
-    <a:lvl6pPr marL="2286000" algn="l" defTabSz="457200" rtl="0" eaLnBrk="1" latinLnBrk="0" hangingPunct="1">
+    <a:lvl6pPr marL="2286000" algn="l" defTabSz="914400" rtl="0" eaLnBrk="1" latinLnBrk="1" hangingPunct="1">
       <a:defRPr sz="1200" kern="1200">
         <a:solidFill>
           <a:schemeClr val="tx1"/>
@@ -466,7 +484,7 @@
         <a:cs typeface="+mn-cs"/>
       </a:defRPr>
     </a:lvl6pPr>
-    <a:lvl7pPr marL="2743200" algn="l" defTabSz="457200" rtl="0" eaLnBrk="1" latinLnBrk="0" hangingPunct="1">
+    <a:lvl7pPr marL="2743200" algn="l" defTabSz="914400" rtl="0" eaLnBrk="1" latinLnBrk="1" hangingPunct="1">
       <a:defRPr sz="1200" kern="1200">
         <a:solidFill>
           <a:schemeClr val="tx1"/>
@@ -476,7 +494,7 @@
         <a:cs typeface="+mn-cs"/>
       </a:defRPr>
     </a:lvl7pPr>
-    <a:lvl8pPr marL="3200400" algn="l" defTabSz="457200" rtl="0" eaLnBrk="1" latinLnBrk="0" hangingPunct="1">
+    <a:lvl8pPr marL="3200400" algn="l" defTabSz="914400" rtl="0" eaLnBrk="1" latinLnBrk="1" hangingPunct="1">
       <a:defRPr sz="1200" kern="1200">
         <a:solidFill>
           <a:schemeClr val="tx1"/>
@@ -486,7 +504,7 @@
         <a:cs typeface="+mn-cs"/>
       </a:defRPr>
     </a:lvl8pPr>
-    <a:lvl9pPr marL="3657600" algn="l" defTabSz="457200" rtl="0" eaLnBrk="1" latinLnBrk="0" hangingPunct="1">
+    <a:lvl9pPr marL="3657600" algn="l" defTabSz="914400" rtl="0" eaLnBrk="1" latinLnBrk="1" hangingPunct="1">
       <a:defRPr sz="1200" kern="1200">
         <a:solidFill>
           <a:schemeClr val="tx1"/>
@@ -501,7 +519,7 @@
 </file>
 
 <file path=ppt/notesSlides/notesSlide1.xml><?xml version="1.0" encoding="utf-8"?>
-<p:notes xmlns:a="http://schemas.openxmlformats.org/drawingml/2006/main" xmlns:p="http://schemas.openxmlformats.org/presentationml/2006/main" xmlns:r="http://schemas.openxmlformats.org/officeDocument/2006/relationships">
+<p:notes xmlns:a="http://schemas.openxmlformats.org/drawingml/2006/main" xmlns:r="http://schemas.openxmlformats.org/officeDocument/2006/relationships" xmlns:p="http://schemas.openxmlformats.org/presentationml/2006/main">
   <p:cSld>
     <p:spTree>
       <p:nvGrpSpPr>
@@ -521,7 +539,7 @@
         <p:nvSpPr>
           <p:cNvPr id="2" name="Slide Image Placeholder 1"/>
           <p:cNvSpPr>
-            <a:spLocks noGrp="1"/>
+            <a:spLocks noGrp="1" noRot="1" noChangeAspect="1"/>
           </p:cNvSpPr>
           <p:nvPr>
             <p:ph type="sldImg" idx="2"/>
@@ -536,7 +554,7 @@
             <a:spLocks noGrp="1"/>
           </p:cNvSpPr>
           <p:nvPr>
-            <p:ph type="body" idx="3" sz="quarter"/>
+            <p:ph type="body" sz="quarter" idx="3"/>
           </p:nvPr>
         </p:nvSpPr>
         <p:spPr/>
@@ -557,7 +575,7 @@
             <a:spLocks noGrp="1"/>
           </p:cNvSpPr>
           <p:nvPr>
-            <p:ph type="sldNum" idx="5" sz="quarter"/>
+            <p:ph type="sldNum" sz="quarter" idx="5"/>
           </p:nvPr>
         </p:nvSpPr>
         <p:spPr/>
@@ -571,7 +589,7 @@
 </file>
 
 <file path=ppt/notesSlides/notesSlide10.xml><?xml version="1.0" encoding="utf-8"?>
-<p:notes xmlns:a="http://schemas.openxmlformats.org/drawingml/2006/main" xmlns:p="http://schemas.openxmlformats.org/presentationml/2006/main" xmlns:r="http://schemas.openxmlformats.org/officeDocument/2006/relationships">
+<p:notes xmlns:a="http://schemas.openxmlformats.org/drawingml/2006/main" xmlns:r="http://schemas.openxmlformats.org/officeDocument/2006/relationships" xmlns:p="http://schemas.openxmlformats.org/presentationml/2006/main">
   <p:cSld>
     <p:spTree>
       <p:nvGrpSpPr>
@@ -591,7 +609,7 @@
         <p:nvSpPr>
           <p:cNvPr id="2" name="Slide Image Placeholder 1"/>
           <p:cNvSpPr>
-            <a:spLocks noGrp="1"/>
+            <a:spLocks noGrp="1" noRot="1" noChangeAspect="1"/>
           </p:cNvSpPr>
           <p:nvPr>
             <p:ph type="sldImg" idx="2"/>
@@ -606,7 +624,7 @@
             <a:spLocks noGrp="1"/>
           </p:cNvSpPr>
           <p:nvPr>
-            <p:ph type="body" idx="3" sz="quarter"/>
+            <p:ph type="body" sz="quarter" idx="3"/>
           </p:nvPr>
         </p:nvSpPr>
         <p:spPr/>
@@ -627,7 +645,7 @@
             <a:spLocks noGrp="1"/>
           </p:cNvSpPr>
           <p:nvPr>
-            <p:ph type="sldNum" idx="5" sz="quarter"/>
+            <p:ph type="sldNum" sz="quarter" idx="5"/>
           </p:nvPr>
         </p:nvSpPr>
         <p:spPr/>
@@ -641,7 +659,7 @@
 </file>
 
 <file path=ppt/notesSlides/notesSlide11.xml><?xml version="1.0" encoding="utf-8"?>
-<p:notes xmlns:a="http://schemas.openxmlformats.org/drawingml/2006/main" xmlns:p="http://schemas.openxmlformats.org/presentationml/2006/main" xmlns:r="http://schemas.openxmlformats.org/officeDocument/2006/relationships">
+<p:notes xmlns:a="http://schemas.openxmlformats.org/drawingml/2006/main" xmlns:r="http://schemas.openxmlformats.org/officeDocument/2006/relationships" xmlns:p="http://schemas.openxmlformats.org/presentationml/2006/main">
   <p:cSld>
     <p:spTree>
       <p:nvGrpSpPr>
@@ -661,7 +679,7 @@
         <p:nvSpPr>
           <p:cNvPr id="2" name="Slide Image Placeholder 1"/>
           <p:cNvSpPr>
-            <a:spLocks noGrp="1"/>
+            <a:spLocks noGrp="1" noRot="1" noChangeAspect="1"/>
           </p:cNvSpPr>
           <p:nvPr>
             <p:ph type="sldImg" idx="2"/>
@@ -676,7 +694,7 @@
             <a:spLocks noGrp="1"/>
           </p:cNvSpPr>
           <p:nvPr>
-            <p:ph type="body" idx="3" sz="quarter"/>
+            <p:ph type="body" sz="quarter" idx="3"/>
           </p:nvPr>
         </p:nvSpPr>
         <p:spPr/>
@@ -697,7 +715,7 @@
             <a:spLocks noGrp="1"/>
           </p:cNvSpPr>
           <p:nvPr>
-            <p:ph type="sldNum" idx="5" sz="quarter"/>
+            <p:ph type="sldNum" sz="quarter" idx="5"/>
           </p:nvPr>
         </p:nvSpPr>
         <p:spPr/>
@@ -711,7 +729,7 @@
 </file>
 
 <file path=ppt/notesSlides/notesSlide12.xml><?xml version="1.0" encoding="utf-8"?>
-<p:notes xmlns:a="http://schemas.openxmlformats.org/drawingml/2006/main" xmlns:p="http://schemas.openxmlformats.org/presentationml/2006/main" xmlns:r="http://schemas.openxmlformats.org/officeDocument/2006/relationships">
+<p:notes xmlns:a="http://schemas.openxmlformats.org/drawingml/2006/main" xmlns:r="http://schemas.openxmlformats.org/officeDocument/2006/relationships" xmlns:p="http://schemas.openxmlformats.org/presentationml/2006/main">
   <p:cSld>
     <p:spTree>
       <p:nvGrpSpPr>
@@ -731,7 +749,7 @@
         <p:nvSpPr>
           <p:cNvPr id="2" name="Slide Image Placeholder 1"/>
           <p:cNvSpPr>
-            <a:spLocks noGrp="1"/>
+            <a:spLocks noGrp="1" noRot="1" noChangeAspect="1"/>
           </p:cNvSpPr>
           <p:nvPr>
             <p:ph type="sldImg" idx="2"/>
@@ -746,7 +764,7 @@
             <a:spLocks noGrp="1"/>
           </p:cNvSpPr>
           <p:nvPr>
-            <p:ph type="body" idx="3" sz="quarter"/>
+            <p:ph type="body" sz="quarter" idx="3"/>
           </p:nvPr>
         </p:nvSpPr>
         <p:spPr/>
@@ -767,7 +785,7 @@
             <a:spLocks noGrp="1"/>
           </p:cNvSpPr>
           <p:nvPr>
-            <p:ph type="sldNum" idx="5" sz="quarter"/>
+            <p:ph type="sldNum" sz="quarter" idx="5"/>
           </p:nvPr>
         </p:nvSpPr>
         <p:spPr/>
@@ -781,7 +799,7 @@
 </file>
 
 <file path=ppt/notesSlides/notesSlide13.xml><?xml version="1.0" encoding="utf-8"?>
-<p:notes xmlns:a="http://schemas.openxmlformats.org/drawingml/2006/main" xmlns:p="http://schemas.openxmlformats.org/presentationml/2006/main" xmlns:r="http://schemas.openxmlformats.org/officeDocument/2006/relationships">
+<p:notes xmlns:a="http://schemas.openxmlformats.org/drawingml/2006/main" xmlns:r="http://schemas.openxmlformats.org/officeDocument/2006/relationships" xmlns:p="http://schemas.openxmlformats.org/presentationml/2006/main">
   <p:cSld>
     <p:spTree>
       <p:nvGrpSpPr>
@@ -801,7 +819,7 @@
         <p:nvSpPr>
           <p:cNvPr id="2" name="Slide Image Placeholder 1"/>
           <p:cNvSpPr>
-            <a:spLocks noGrp="1"/>
+            <a:spLocks noGrp="1" noRot="1" noChangeAspect="1"/>
           </p:cNvSpPr>
           <p:nvPr>
             <p:ph type="sldImg" idx="2"/>
@@ -816,7 +834,7 @@
             <a:spLocks noGrp="1"/>
           </p:cNvSpPr>
           <p:nvPr>
-            <p:ph type="body" idx="3" sz="quarter"/>
+            <p:ph type="body" sz="quarter" idx="3"/>
           </p:nvPr>
         </p:nvSpPr>
         <p:spPr/>
@@ -837,7 +855,7 @@
             <a:spLocks noGrp="1"/>
           </p:cNvSpPr>
           <p:nvPr>
-            <p:ph type="sldNum" idx="5" sz="quarter"/>
+            <p:ph type="sldNum" sz="quarter" idx="5"/>
           </p:nvPr>
         </p:nvSpPr>
         <p:spPr/>
@@ -851,7 +869,7 @@
 </file>
 
 <file path=ppt/notesSlides/notesSlide14.xml><?xml version="1.0" encoding="utf-8"?>
-<p:notes xmlns:a="http://schemas.openxmlformats.org/drawingml/2006/main" xmlns:p="http://schemas.openxmlformats.org/presentationml/2006/main" xmlns:r="http://schemas.openxmlformats.org/officeDocument/2006/relationships">
+<p:notes xmlns:a="http://schemas.openxmlformats.org/drawingml/2006/main" xmlns:r="http://schemas.openxmlformats.org/officeDocument/2006/relationships" xmlns:p="http://schemas.openxmlformats.org/presentationml/2006/main">
   <p:cSld>
     <p:spTree>
       <p:nvGrpSpPr>
@@ -871,7 +889,7 @@
         <p:nvSpPr>
           <p:cNvPr id="2" name="Slide Image Placeholder 1"/>
           <p:cNvSpPr>
-            <a:spLocks noGrp="1"/>
+            <a:spLocks noGrp="1" noRot="1" noChangeAspect="1"/>
           </p:cNvSpPr>
           <p:nvPr>
             <p:ph type="sldImg" idx="2"/>
@@ -886,7 +904,7 @@
             <a:spLocks noGrp="1"/>
           </p:cNvSpPr>
           <p:nvPr>
-            <p:ph type="body" idx="3" sz="quarter"/>
+            <p:ph type="body" sz="quarter" idx="3"/>
           </p:nvPr>
         </p:nvSpPr>
         <p:spPr/>
@@ -907,7 +925,7 @@
             <a:spLocks noGrp="1"/>
           </p:cNvSpPr>
           <p:nvPr>
-            <p:ph type="sldNum" idx="5" sz="quarter"/>
+            <p:ph type="sldNum" sz="quarter" idx="5"/>
           </p:nvPr>
         </p:nvSpPr>
         <p:spPr/>
@@ -921,7 +939,7 @@
 </file>
 
 <file path=ppt/notesSlides/notesSlide15.xml><?xml version="1.0" encoding="utf-8"?>
-<p:notes xmlns:a="http://schemas.openxmlformats.org/drawingml/2006/main" xmlns:p="http://schemas.openxmlformats.org/presentationml/2006/main" xmlns:r="http://schemas.openxmlformats.org/officeDocument/2006/relationships">
+<p:notes xmlns:a="http://schemas.openxmlformats.org/drawingml/2006/main" xmlns:r="http://schemas.openxmlformats.org/officeDocument/2006/relationships" xmlns:p="http://schemas.openxmlformats.org/presentationml/2006/main">
   <p:cSld>
     <p:spTree>
       <p:nvGrpSpPr>
@@ -941,7 +959,7 @@
         <p:nvSpPr>
           <p:cNvPr id="2" name="Slide Image Placeholder 1"/>
           <p:cNvSpPr>
-            <a:spLocks noGrp="1"/>
+            <a:spLocks noGrp="1" noRot="1" noChangeAspect="1"/>
           </p:cNvSpPr>
           <p:nvPr>
             <p:ph type="sldImg" idx="2"/>
@@ -956,7 +974,7 @@
             <a:spLocks noGrp="1"/>
           </p:cNvSpPr>
           <p:nvPr>
-            <p:ph type="body" idx="3" sz="quarter"/>
+            <p:ph type="body" sz="quarter" idx="3"/>
           </p:nvPr>
         </p:nvSpPr>
         <p:spPr/>
@@ -977,7 +995,7 @@
             <a:spLocks noGrp="1"/>
           </p:cNvSpPr>
           <p:nvPr>
-            <p:ph type="sldNum" idx="5" sz="quarter"/>
+            <p:ph type="sldNum" sz="quarter" idx="5"/>
           </p:nvPr>
         </p:nvSpPr>
         <p:spPr/>
@@ -991,7 +1009,7 @@
 </file>
 
 <file path=ppt/notesSlides/notesSlide16.xml><?xml version="1.0" encoding="utf-8"?>
-<p:notes xmlns:a="http://schemas.openxmlformats.org/drawingml/2006/main" xmlns:p="http://schemas.openxmlformats.org/presentationml/2006/main" xmlns:r="http://schemas.openxmlformats.org/officeDocument/2006/relationships">
+<p:notes xmlns:a="http://schemas.openxmlformats.org/drawingml/2006/main" xmlns:r="http://schemas.openxmlformats.org/officeDocument/2006/relationships" xmlns:p="http://schemas.openxmlformats.org/presentationml/2006/main">
   <p:cSld>
     <p:spTree>
       <p:nvGrpSpPr>
@@ -1011,7 +1029,7 @@
         <p:nvSpPr>
           <p:cNvPr id="2" name="Slide Image Placeholder 1"/>
           <p:cNvSpPr>
-            <a:spLocks noGrp="1"/>
+            <a:spLocks noGrp="1" noRot="1" noChangeAspect="1"/>
           </p:cNvSpPr>
           <p:nvPr>
             <p:ph type="sldImg" idx="2"/>
@@ -1026,7 +1044,7 @@
             <a:spLocks noGrp="1"/>
           </p:cNvSpPr>
           <p:nvPr>
-            <p:ph type="body" idx="3" sz="quarter"/>
+            <p:ph type="body" sz="quarter" idx="3"/>
           </p:nvPr>
         </p:nvSpPr>
         <p:spPr/>
@@ -1047,7 +1065,7 @@
             <a:spLocks noGrp="1"/>
           </p:cNvSpPr>
           <p:nvPr>
-            <p:ph type="sldNum" idx="5" sz="quarter"/>
+            <p:ph type="sldNum" sz="quarter" idx="5"/>
           </p:nvPr>
         </p:nvSpPr>
         <p:spPr/>
@@ -1061,7 +1079,7 @@
 </file>
 
 <file path=ppt/notesSlides/notesSlide17.xml><?xml version="1.0" encoding="utf-8"?>
-<p:notes xmlns:a="http://schemas.openxmlformats.org/drawingml/2006/main" xmlns:p="http://schemas.openxmlformats.org/presentationml/2006/main" xmlns:r="http://schemas.openxmlformats.org/officeDocument/2006/relationships">
+<p:notes xmlns:a="http://schemas.openxmlformats.org/drawingml/2006/main" xmlns:r="http://schemas.openxmlformats.org/officeDocument/2006/relationships" xmlns:p="http://schemas.openxmlformats.org/presentationml/2006/main">
   <p:cSld>
     <p:spTree>
       <p:nvGrpSpPr>
@@ -1081,7 +1099,7 @@
         <p:nvSpPr>
           <p:cNvPr id="2" name="Slide Image Placeholder 1"/>
           <p:cNvSpPr>
-            <a:spLocks noGrp="1"/>
+            <a:spLocks noGrp="1" noRot="1" noChangeAspect="1"/>
           </p:cNvSpPr>
           <p:nvPr>
             <p:ph type="sldImg" idx="2"/>
@@ -1096,7 +1114,7 @@
             <a:spLocks noGrp="1"/>
           </p:cNvSpPr>
           <p:nvPr>
-            <p:ph type="body" idx="3" sz="quarter"/>
+            <p:ph type="body" sz="quarter" idx="3"/>
           </p:nvPr>
         </p:nvSpPr>
         <p:spPr/>
@@ -1117,7 +1135,7 @@
             <a:spLocks noGrp="1"/>
           </p:cNvSpPr>
           <p:nvPr>
-            <p:ph type="sldNum" idx="5" sz="quarter"/>
+            <p:ph type="sldNum" sz="quarter" idx="5"/>
           </p:nvPr>
         </p:nvSpPr>
         <p:spPr/>
@@ -1131,7 +1149,7 @@
 </file>
 
 <file path=ppt/notesSlides/notesSlide18.xml><?xml version="1.0" encoding="utf-8"?>
-<p:notes xmlns:a="http://schemas.openxmlformats.org/drawingml/2006/main" xmlns:p="http://schemas.openxmlformats.org/presentationml/2006/main" xmlns:r="http://schemas.openxmlformats.org/officeDocument/2006/relationships">
+<p:notes xmlns:a="http://schemas.openxmlformats.org/drawingml/2006/main" xmlns:r="http://schemas.openxmlformats.org/officeDocument/2006/relationships" xmlns:p="http://schemas.openxmlformats.org/presentationml/2006/main">
   <p:cSld>
     <p:spTree>
       <p:nvGrpSpPr>
@@ -1151,7 +1169,7 @@
         <p:nvSpPr>
           <p:cNvPr id="2" name="Slide Image Placeholder 1"/>
           <p:cNvSpPr>
-            <a:spLocks noGrp="1"/>
+            <a:spLocks noGrp="1" noRot="1" noChangeAspect="1"/>
           </p:cNvSpPr>
           <p:nvPr>
             <p:ph type="sldImg" idx="2"/>
@@ -1166,7 +1184,7 @@
             <a:spLocks noGrp="1"/>
           </p:cNvSpPr>
           <p:nvPr>
-            <p:ph type="body" idx="3" sz="quarter"/>
+            <p:ph type="body" sz="quarter" idx="3"/>
           </p:nvPr>
         </p:nvSpPr>
         <p:spPr/>
@@ -1187,7 +1205,7 @@
             <a:spLocks noGrp="1"/>
           </p:cNvSpPr>
           <p:nvPr>
-            <p:ph type="sldNum" idx="5" sz="quarter"/>
+            <p:ph type="sldNum" sz="quarter" idx="5"/>
           </p:nvPr>
         </p:nvSpPr>
         <p:spPr/>
@@ -1201,7 +1219,7 @@
 </file>
 
 <file path=ppt/notesSlides/notesSlide19.xml><?xml version="1.0" encoding="utf-8"?>
-<p:notes xmlns:a="http://schemas.openxmlformats.org/drawingml/2006/main" xmlns:p="http://schemas.openxmlformats.org/presentationml/2006/main" xmlns:r="http://schemas.openxmlformats.org/officeDocument/2006/relationships">
+<p:notes xmlns:a="http://schemas.openxmlformats.org/drawingml/2006/main" xmlns:r="http://schemas.openxmlformats.org/officeDocument/2006/relationships" xmlns:p="http://schemas.openxmlformats.org/presentationml/2006/main">
   <p:cSld>
     <p:spTree>
       <p:nvGrpSpPr>
@@ -1221,7 +1239,7 @@
         <p:nvSpPr>
           <p:cNvPr id="2" name="Slide Image Placeholder 1"/>
           <p:cNvSpPr>
-            <a:spLocks noGrp="1"/>
+            <a:spLocks noGrp="1" noRot="1" noChangeAspect="1"/>
           </p:cNvSpPr>
           <p:nvPr>
             <p:ph type="sldImg" idx="2"/>
@@ -1236,7 +1254,7 @@
             <a:spLocks noGrp="1"/>
           </p:cNvSpPr>
           <p:nvPr>
-            <p:ph type="body" idx="3" sz="quarter"/>
+            <p:ph type="body" sz="quarter" idx="3"/>
           </p:nvPr>
         </p:nvSpPr>
         <p:spPr/>
@@ -1257,7 +1275,7 @@
             <a:spLocks noGrp="1"/>
           </p:cNvSpPr>
           <p:nvPr>
-            <p:ph type="sldNum" idx="5" sz="quarter"/>
+            <p:ph type="sldNum" sz="quarter" idx="5"/>
           </p:nvPr>
         </p:nvSpPr>
         <p:spPr/>
@@ -1271,7 +1289,7 @@
 </file>
 
 <file path=ppt/notesSlides/notesSlide2.xml><?xml version="1.0" encoding="utf-8"?>
-<p:notes xmlns:a="http://schemas.openxmlformats.org/drawingml/2006/main" xmlns:p="http://schemas.openxmlformats.org/presentationml/2006/main" xmlns:r="http://schemas.openxmlformats.org/officeDocument/2006/relationships">
+<p:notes xmlns:a="http://schemas.openxmlformats.org/drawingml/2006/main" xmlns:r="http://schemas.openxmlformats.org/officeDocument/2006/relationships" xmlns:p="http://schemas.openxmlformats.org/presentationml/2006/main">
   <p:cSld>
     <p:spTree>
       <p:nvGrpSpPr>
@@ -1291,7 +1309,7 @@
         <p:nvSpPr>
           <p:cNvPr id="2" name="Slide Image Placeholder 1"/>
           <p:cNvSpPr>
-            <a:spLocks noGrp="1"/>
+            <a:spLocks noGrp="1" noRot="1" noChangeAspect="1"/>
           </p:cNvSpPr>
           <p:nvPr>
             <p:ph type="sldImg" idx="2"/>
@@ -1306,7 +1324,7 @@
             <a:spLocks noGrp="1"/>
           </p:cNvSpPr>
           <p:nvPr>
-            <p:ph type="body" idx="3" sz="quarter"/>
+            <p:ph type="body" sz="quarter" idx="3"/>
           </p:nvPr>
         </p:nvSpPr>
         <p:spPr/>
@@ -1327,7 +1345,7 @@
             <a:spLocks noGrp="1"/>
           </p:cNvSpPr>
           <p:nvPr>
-            <p:ph type="sldNum" idx="5" sz="quarter"/>
+            <p:ph type="sldNum" sz="quarter" idx="5"/>
           </p:nvPr>
         </p:nvSpPr>
         <p:spPr/>
@@ -1341,7 +1359,7 @@
 </file>
 
 <file path=ppt/notesSlides/notesSlide20.xml><?xml version="1.0" encoding="utf-8"?>
-<p:notes xmlns:a="http://schemas.openxmlformats.org/drawingml/2006/main" xmlns:p="http://schemas.openxmlformats.org/presentationml/2006/main" xmlns:r="http://schemas.openxmlformats.org/officeDocument/2006/relationships">
+<p:notes xmlns:a="http://schemas.openxmlformats.org/drawingml/2006/main" xmlns:r="http://schemas.openxmlformats.org/officeDocument/2006/relationships" xmlns:p="http://schemas.openxmlformats.org/presentationml/2006/main">
   <p:cSld>
     <p:spTree>
       <p:nvGrpSpPr>
@@ -1361,7 +1379,7 @@
         <p:nvSpPr>
           <p:cNvPr id="2" name="Slide Image Placeholder 1"/>
           <p:cNvSpPr>
-            <a:spLocks noGrp="1"/>
+            <a:spLocks noGrp="1" noRot="1" noChangeAspect="1"/>
           </p:cNvSpPr>
           <p:nvPr>
             <p:ph type="sldImg" idx="2"/>
@@ -1376,7 +1394,7 @@
             <a:spLocks noGrp="1"/>
           </p:cNvSpPr>
           <p:nvPr>
-            <p:ph type="body" idx="3" sz="quarter"/>
+            <p:ph type="body" sz="quarter" idx="3"/>
           </p:nvPr>
         </p:nvSpPr>
         <p:spPr/>
@@ -1397,7 +1415,7 @@
             <a:spLocks noGrp="1"/>
           </p:cNvSpPr>
           <p:nvPr>
-            <p:ph type="sldNum" idx="5" sz="quarter"/>
+            <p:ph type="sldNum" sz="quarter" idx="5"/>
           </p:nvPr>
         </p:nvSpPr>
         <p:spPr/>
@@ -1411,7 +1429,7 @@
 </file>
 
 <file path=ppt/notesSlides/notesSlide21.xml><?xml version="1.0" encoding="utf-8"?>
-<p:notes xmlns:a="http://schemas.openxmlformats.org/drawingml/2006/main" xmlns:p="http://schemas.openxmlformats.org/presentationml/2006/main" xmlns:r="http://schemas.openxmlformats.org/officeDocument/2006/relationships">
+<p:notes xmlns:a="http://schemas.openxmlformats.org/drawingml/2006/main" xmlns:r="http://schemas.openxmlformats.org/officeDocument/2006/relationships" xmlns:p="http://schemas.openxmlformats.org/presentationml/2006/main">
   <p:cSld>
     <p:spTree>
       <p:nvGrpSpPr>
@@ -1431,7 +1449,7 @@
         <p:nvSpPr>
           <p:cNvPr id="2" name="Slide Image Placeholder 1"/>
           <p:cNvSpPr>
-            <a:spLocks noGrp="1"/>
+            <a:spLocks noGrp="1" noRot="1" noChangeAspect="1"/>
           </p:cNvSpPr>
           <p:nvPr>
             <p:ph type="sldImg" idx="2"/>
@@ -1446,7 +1464,7 @@
             <a:spLocks noGrp="1"/>
           </p:cNvSpPr>
           <p:nvPr>
-            <p:ph type="body" idx="3" sz="quarter"/>
+            <p:ph type="body" sz="quarter" idx="3"/>
           </p:nvPr>
         </p:nvSpPr>
         <p:spPr/>
@@ -1467,7 +1485,7 @@
             <a:spLocks noGrp="1"/>
           </p:cNvSpPr>
           <p:nvPr>
-            <p:ph type="sldNum" idx="5" sz="quarter"/>
+            <p:ph type="sldNum" sz="quarter" idx="5"/>
           </p:nvPr>
         </p:nvSpPr>
         <p:spPr/>
@@ -1481,7 +1499,7 @@
 </file>
 
 <file path=ppt/notesSlides/notesSlide22.xml><?xml version="1.0" encoding="utf-8"?>
-<p:notes xmlns:a="http://schemas.openxmlformats.org/drawingml/2006/main" xmlns:p="http://schemas.openxmlformats.org/presentationml/2006/main" xmlns:r="http://schemas.openxmlformats.org/officeDocument/2006/relationships">
+<p:notes xmlns:a="http://schemas.openxmlformats.org/drawingml/2006/main" xmlns:r="http://schemas.openxmlformats.org/officeDocument/2006/relationships" xmlns:p="http://schemas.openxmlformats.org/presentationml/2006/main">
   <p:cSld>
     <p:spTree>
       <p:nvGrpSpPr>
@@ -1501,7 +1519,7 @@
         <p:nvSpPr>
           <p:cNvPr id="2" name="Slide Image Placeholder 1"/>
           <p:cNvSpPr>
-            <a:spLocks noGrp="1"/>
+            <a:spLocks noGrp="1" noRot="1" noChangeAspect="1"/>
           </p:cNvSpPr>
           <p:nvPr>
             <p:ph type="sldImg" idx="2"/>
@@ -1516,7 +1534,7 @@
             <a:spLocks noGrp="1"/>
           </p:cNvSpPr>
           <p:nvPr>
-            <p:ph type="body" idx="3" sz="quarter"/>
+            <p:ph type="body" sz="quarter" idx="3"/>
           </p:nvPr>
         </p:nvSpPr>
         <p:spPr/>
@@ -1537,7 +1555,7 @@
             <a:spLocks noGrp="1"/>
           </p:cNvSpPr>
           <p:nvPr>
-            <p:ph type="sldNum" idx="5" sz="quarter"/>
+            <p:ph type="sldNum" sz="quarter" idx="5"/>
           </p:nvPr>
         </p:nvSpPr>
         <p:spPr/>
@@ -1551,7 +1569,7 @@
 </file>
 
 <file path=ppt/notesSlides/notesSlide23.xml><?xml version="1.0" encoding="utf-8"?>
-<p:notes xmlns:a="http://schemas.openxmlformats.org/drawingml/2006/main" xmlns:p="http://schemas.openxmlformats.org/presentationml/2006/main" xmlns:r="http://schemas.openxmlformats.org/officeDocument/2006/relationships">
+<p:notes xmlns:a="http://schemas.openxmlformats.org/drawingml/2006/main" xmlns:r="http://schemas.openxmlformats.org/officeDocument/2006/relationships" xmlns:p="http://schemas.openxmlformats.org/presentationml/2006/main">
   <p:cSld>
     <p:spTree>
       <p:nvGrpSpPr>
@@ -1571,7 +1589,7 @@
         <p:nvSpPr>
           <p:cNvPr id="2" name="Slide Image Placeholder 1"/>
           <p:cNvSpPr>
-            <a:spLocks noGrp="1"/>
+            <a:spLocks noGrp="1" noRot="1" noChangeAspect="1"/>
           </p:cNvSpPr>
           <p:nvPr>
             <p:ph type="sldImg" idx="2"/>
@@ -1586,7 +1604,7 @@
             <a:spLocks noGrp="1"/>
           </p:cNvSpPr>
           <p:nvPr>
-            <p:ph type="body" idx="3" sz="quarter"/>
+            <p:ph type="body" sz="quarter" idx="3"/>
           </p:nvPr>
         </p:nvSpPr>
         <p:spPr/>
@@ -1607,7 +1625,7 @@
             <a:spLocks noGrp="1"/>
           </p:cNvSpPr>
           <p:nvPr>
-            <p:ph type="sldNum" idx="5" sz="quarter"/>
+            <p:ph type="sldNum" sz="quarter" idx="5"/>
           </p:nvPr>
         </p:nvSpPr>
         <p:spPr/>
@@ -1621,7 +1639,7 @@
 </file>
 
 <file path=ppt/notesSlides/notesSlide24.xml><?xml version="1.0" encoding="utf-8"?>
-<p:notes xmlns:a="http://schemas.openxmlformats.org/drawingml/2006/main" xmlns:p="http://schemas.openxmlformats.org/presentationml/2006/main" xmlns:r="http://schemas.openxmlformats.org/officeDocument/2006/relationships">
+<p:notes xmlns:a="http://schemas.openxmlformats.org/drawingml/2006/main" xmlns:r="http://schemas.openxmlformats.org/officeDocument/2006/relationships" xmlns:p="http://schemas.openxmlformats.org/presentationml/2006/main">
   <p:cSld>
     <p:spTree>
       <p:nvGrpSpPr>
@@ -1641,7 +1659,7 @@
         <p:nvSpPr>
           <p:cNvPr id="2" name="Slide Image Placeholder 1"/>
           <p:cNvSpPr>
-            <a:spLocks noGrp="1"/>
+            <a:spLocks noGrp="1" noRot="1" noChangeAspect="1"/>
           </p:cNvSpPr>
           <p:nvPr>
             <p:ph type="sldImg" idx="2"/>
@@ -1656,7 +1674,7 @@
             <a:spLocks noGrp="1"/>
           </p:cNvSpPr>
           <p:nvPr>
-            <p:ph type="body" idx="3" sz="quarter"/>
+            <p:ph type="body" sz="quarter" idx="3"/>
           </p:nvPr>
         </p:nvSpPr>
         <p:spPr/>
@@ -1677,7 +1695,7 @@
             <a:spLocks noGrp="1"/>
           </p:cNvSpPr>
           <p:nvPr>
-            <p:ph type="sldNum" idx="5" sz="quarter"/>
+            <p:ph type="sldNum" sz="quarter" idx="5"/>
           </p:nvPr>
         </p:nvSpPr>
         <p:spPr/>
@@ -1691,7 +1709,7 @@
 </file>
 
 <file path=ppt/notesSlides/notesSlide25.xml><?xml version="1.0" encoding="utf-8"?>
-<p:notes xmlns:a="http://schemas.openxmlformats.org/drawingml/2006/main" xmlns:p="http://schemas.openxmlformats.org/presentationml/2006/main" xmlns:r="http://schemas.openxmlformats.org/officeDocument/2006/relationships">
+<p:notes xmlns:a="http://schemas.openxmlformats.org/drawingml/2006/main" xmlns:r="http://schemas.openxmlformats.org/officeDocument/2006/relationships" xmlns:p="http://schemas.openxmlformats.org/presentationml/2006/main">
   <p:cSld>
     <p:spTree>
       <p:nvGrpSpPr>
@@ -1711,7 +1729,7 @@
         <p:nvSpPr>
           <p:cNvPr id="2" name="Slide Image Placeholder 1"/>
           <p:cNvSpPr>
-            <a:spLocks noGrp="1"/>
+            <a:spLocks noGrp="1" noRot="1" noChangeAspect="1"/>
           </p:cNvSpPr>
           <p:nvPr>
             <p:ph type="sldImg" idx="2"/>
@@ -1726,7 +1744,7 @@
             <a:spLocks noGrp="1"/>
           </p:cNvSpPr>
           <p:nvPr>
-            <p:ph type="body" idx="3" sz="quarter"/>
+            <p:ph type="body" sz="quarter" idx="3"/>
           </p:nvPr>
         </p:nvSpPr>
         <p:spPr/>
@@ -1747,7 +1765,7 @@
             <a:spLocks noGrp="1"/>
           </p:cNvSpPr>
           <p:nvPr>
-            <p:ph type="sldNum" idx="5" sz="quarter"/>
+            <p:ph type="sldNum" sz="quarter" idx="5"/>
           </p:nvPr>
         </p:nvSpPr>
         <p:spPr/>
@@ -1761,7 +1779,7 @@
 </file>
 
 <file path=ppt/notesSlides/notesSlide26.xml><?xml version="1.0" encoding="utf-8"?>
-<p:notes xmlns:a="http://schemas.openxmlformats.org/drawingml/2006/main" xmlns:p="http://schemas.openxmlformats.org/presentationml/2006/main" xmlns:r="http://schemas.openxmlformats.org/officeDocument/2006/relationships">
+<p:notes xmlns:a="http://schemas.openxmlformats.org/drawingml/2006/main" xmlns:r="http://schemas.openxmlformats.org/officeDocument/2006/relationships" xmlns:p="http://schemas.openxmlformats.org/presentationml/2006/main">
   <p:cSld>
     <p:spTree>
       <p:nvGrpSpPr>
@@ -1781,7 +1799,7 @@
         <p:nvSpPr>
           <p:cNvPr id="2" name="Slide Image Placeholder 1"/>
           <p:cNvSpPr>
-            <a:spLocks noGrp="1"/>
+            <a:spLocks noGrp="1" noRot="1" noChangeAspect="1"/>
           </p:cNvSpPr>
           <p:nvPr>
             <p:ph type="sldImg" idx="2"/>
@@ -1796,7 +1814,7 @@
             <a:spLocks noGrp="1"/>
           </p:cNvSpPr>
           <p:nvPr>
-            <p:ph type="body" idx="3" sz="quarter"/>
+            <p:ph type="body" sz="quarter" idx="3"/>
           </p:nvPr>
         </p:nvSpPr>
         <p:spPr/>
@@ -1817,7 +1835,7 @@
             <a:spLocks noGrp="1"/>
           </p:cNvSpPr>
           <p:nvPr>
-            <p:ph type="sldNum" idx="5" sz="quarter"/>
+            <p:ph type="sldNum" sz="quarter" idx="5"/>
           </p:nvPr>
         </p:nvSpPr>
         <p:spPr/>
@@ -1831,7 +1849,7 @@
 </file>
 
 <file path=ppt/notesSlides/notesSlide27.xml><?xml version="1.0" encoding="utf-8"?>
-<p:notes xmlns:a="http://schemas.openxmlformats.org/drawingml/2006/main" xmlns:p="http://schemas.openxmlformats.org/presentationml/2006/main" xmlns:r="http://schemas.openxmlformats.org/officeDocument/2006/relationships">
+<p:notes xmlns:a="http://schemas.openxmlformats.org/drawingml/2006/main" xmlns:r="http://schemas.openxmlformats.org/officeDocument/2006/relationships" xmlns:p="http://schemas.openxmlformats.org/presentationml/2006/main">
   <p:cSld>
     <p:spTree>
       <p:nvGrpSpPr>
@@ -1851,7 +1869,7 @@
         <p:nvSpPr>
           <p:cNvPr id="2" name="Slide Image Placeholder 1"/>
           <p:cNvSpPr>
-            <a:spLocks noGrp="1"/>
+            <a:spLocks noGrp="1" noRot="1" noChangeAspect="1"/>
           </p:cNvSpPr>
           <p:nvPr>
             <p:ph type="sldImg" idx="2"/>
@@ -1866,7 +1884,7 @@
             <a:spLocks noGrp="1"/>
           </p:cNvSpPr>
           <p:nvPr>
-            <p:ph type="body" idx="3" sz="quarter"/>
+            <p:ph type="body" sz="quarter" idx="3"/>
           </p:nvPr>
         </p:nvSpPr>
         <p:spPr/>
@@ -1887,7 +1905,7 @@
             <a:spLocks noGrp="1"/>
           </p:cNvSpPr>
           <p:nvPr>
-            <p:ph type="sldNum" idx="5" sz="quarter"/>
+            <p:ph type="sldNum" sz="quarter" idx="5"/>
           </p:nvPr>
         </p:nvSpPr>
         <p:spPr/>
@@ -1901,7 +1919,7 @@
 </file>
 
 <file path=ppt/notesSlides/notesSlide28.xml><?xml version="1.0" encoding="utf-8"?>
-<p:notes xmlns:a="http://schemas.openxmlformats.org/drawingml/2006/main" xmlns:p="http://schemas.openxmlformats.org/presentationml/2006/main" xmlns:r="http://schemas.openxmlformats.org/officeDocument/2006/relationships">
+<p:notes xmlns:a="http://schemas.openxmlformats.org/drawingml/2006/main" xmlns:r="http://schemas.openxmlformats.org/officeDocument/2006/relationships" xmlns:p="http://schemas.openxmlformats.org/presentationml/2006/main">
   <p:cSld>
     <p:spTree>
       <p:nvGrpSpPr>
@@ -1921,7 +1939,7 @@
         <p:nvSpPr>
           <p:cNvPr id="2" name="Slide Image Placeholder 1"/>
           <p:cNvSpPr>
-            <a:spLocks noGrp="1"/>
+            <a:spLocks noGrp="1" noRot="1" noChangeAspect="1"/>
           </p:cNvSpPr>
           <p:nvPr>
             <p:ph type="sldImg" idx="2"/>
@@ -1936,7 +1954,7 @@
             <a:spLocks noGrp="1"/>
           </p:cNvSpPr>
           <p:nvPr>
-            <p:ph type="body" idx="3" sz="quarter"/>
+            <p:ph type="body" sz="quarter" idx="3"/>
           </p:nvPr>
         </p:nvSpPr>
         <p:spPr/>
@@ -1957,7 +1975,7 @@
             <a:spLocks noGrp="1"/>
           </p:cNvSpPr>
           <p:nvPr>
-            <p:ph type="sldNum" idx="5" sz="quarter"/>
+            <p:ph type="sldNum" sz="quarter" idx="5"/>
           </p:nvPr>
         </p:nvSpPr>
         <p:spPr/>
@@ -1971,7 +1989,7 @@
 </file>
 
 <file path=ppt/notesSlides/notesSlide29.xml><?xml version="1.0" encoding="utf-8"?>
-<p:notes xmlns:a="http://schemas.openxmlformats.org/drawingml/2006/main" xmlns:p="http://schemas.openxmlformats.org/presentationml/2006/main" xmlns:r="http://schemas.openxmlformats.org/officeDocument/2006/relationships">
+<p:notes xmlns:a="http://schemas.openxmlformats.org/drawingml/2006/main" xmlns:r="http://schemas.openxmlformats.org/officeDocument/2006/relationships" xmlns:p="http://schemas.openxmlformats.org/presentationml/2006/main">
   <p:cSld>
     <p:spTree>
       <p:nvGrpSpPr>
@@ -1991,7 +2009,7 @@
         <p:nvSpPr>
           <p:cNvPr id="2" name="Slide Image Placeholder 1"/>
           <p:cNvSpPr>
-            <a:spLocks noGrp="1"/>
+            <a:spLocks noGrp="1" noRot="1" noChangeAspect="1"/>
           </p:cNvSpPr>
           <p:nvPr>
             <p:ph type="sldImg" idx="2"/>
@@ -2006,7 +2024,7 @@
             <a:spLocks noGrp="1"/>
           </p:cNvSpPr>
           <p:nvPr>
-            <p:ph type="body" idx="3" sz="quarter"/>
+            <p:ph type="body" sz="quarter" idx="3"/>
           </p:nvPr>
         </p:nvSpPr>
         <p:spPr/>
@@ -2027,7 +2045,7 @@
             <a:spLocks noGrp="1"/>
           </p:cNvSpPr>
           <p:nvPr>
-            <p:ph type="sldNum" idx="5" sz="quarter"/>
+            <p:ph type="sldNum" sz="quarter" idx="5"/>
           </p:nvPr>
         </p:nvSpPr>
         <p:spPr/>
@@ -2041,7 +2059,7 @@
 </file>
 
 <file path=ppt/notesSlides/notesSlide3.xml><?xml version="1.0" encoding="utf-8"?>
-<p:notes xmlns:a="http://schemas.openxmlformats.org/drawingml/2006/main" xmlns:p="http://schemas.openxmlformats.org/presentationml/2006/main" xmlns:r="http://schemas.openxmlformats.org/officeDocument/2006/relationships">
+<p:notes xmlns:a="http://schemas.openxmlformats.org/drawingml/2006/main" xmlns:r="http://schemas.openxmlformats.org/officeDocument/2006/relationships" xmlns:p="http://schemas.openxmlformats.org/presentationml/2006/main">
   <p:cSld>
     <p:spTree>
       <p:nvGrpSpPr>
@@ -2061,7 +2079,7 @@
         <p:nvSpPr>
           <p:cNvPr id="2" name="Slide Image Placeholder 1"/>
           <p:cNvSpPr>
-            <a:spLocks noGrp="1"/>
+            <a:spLocks noGrp="1" noRot="1" noChangeAspect="1"/>
           </p:cNvSpPr>
           <p:nvPr>
             <p:ph type="sldImg" idx="2"/>
@@ -2076,7 +2094,7 @@
             <a:spLocks noGrp="1"/>
           </p:cNvSpPr>
           <p:nvPr>
-            <p:ph type="body" idx="3" sz="quarter"/>
+            <p:ph type="body" sz="quarter" idx="3"/>
           </p:nvPr>
         </p:nvSpPr>
         <p:spPr/>
@@ -2097,7 +2115,7 @@
             <a:spLocks noGrp="1"/>
           </p:cNvSpPr>
           <p:nvPr>
-            <p:ph type="sldNum" idx="5" sz="quarter"/>
+            <p:ph type="sldNum" sz="quarter" idx="5"/>
           </p:nvPr>
         </p:nvSpPr>
         <p:spPr/>
@@ -2111,7 +2129,7 @@
 </file>
 
 <file path=ppt/notesSlides/notesSlide30.xml><?xml version="1.0" encoding="utf-8"?>
-<p:notes xmlns:a="http://schemas.openxmlformats.org/drawingml/2006/main" xmlns:p="http://schemas.openxmlformats.org/presentationml/2006/main" xmlns:r="http://schemas.openxmlformats.org/officeDocument/2006/relationships">
+<p:notes xmlns:a="http://schemas.openxmlformats.org/drawingml/2006/main" xmlns:r="http://schemas.openxmlformats.org/officeDocument/2006/relationships" xmlns:p="http://schemas.openxmlformats.org/presentationml/2006/main">
   <p:cSld>
     <p:spTree>
       <p:nvGrpSpPr>
@@ -2131,7 +2149,7 @@
         <p:nvSpPr>
           <p:cNvPr id="2" name="Slide Image Placeholder 1"/>
           <p:cNvSpPr>
-            <a:spLocks noGrp="1"/>
+            <a:spLocks noGrp="1" noRot="1" noChangeAspect="1"/>
           </p:cNvSpPr>
           <p:nvPr>
             <p:ph type="sldImg" idx="2"/>
@@ -2146,7 +2164,7 @@
             <a:spLocks noGrp="1"/>
           </p:cNvSpPr>
           <p:nvPr>
-            <p:ph type="body" idx="3" sz="quarter"/>
+            <p:ph type="body" sz="quarter" idx="3"/>
           </p:nvPr>
         </p:nvSpPr>
         <p:spPr/>
@@ -2167,7 +2185,7 @@
             <a:spLocks noGrp="1"/>
           </p:cNvSpPr>
           <p:nvPr>
-            <p:ph type="sldNum" idx="5" sz="quarter"/>
+            <p:ph type="sldNum" sz="quarter" idx="5"/>
           </p:nvPr>
         </p:nvSpPr>
         <p:spPr/>
@@ -2181,7 +2199,7 @@
 </file>
 
 <file path=ppt/notesSlides/notesSlide31.xml><?xml version="1.0" encoding="utf-8"?>
-<p:notes xmlns:a="http://schemas.openxmlformats.org/drawingml/2006/main" xmlns:p="http://schemas.openxmlformats.org/presentationml/2006/main" xmlns:r="http://schemas.openxmlformats.org/officeDocument/2006/relationships">
+<p:notes xmlns:a="http://schemas.openxmlformats.org/drawingml/2006/main" xmlns:r="http://schemas.openxmlformats.org/officeDocument/2006/relationships" xmlns:p="http://schemas.openxmlformats.org/presentationml/2006/main">
   <p:cSld>
     <p:spTree>
       <p:nvGrpSpPr>
@@ -2201,7 +2219,7 @@
         <p:nvSpPr>
           <p:cNvPr id="2" name="Slide Image Placeholder 1"/>
           <p:cNvSpPr>
-            <a:spLocks noGrp="1"/>
+            <a:spLocks noGrp="1" noRot="1" noChangeAspect="1"/>
           </p:cNvSpPr>
           <p:nvPr>
             <p:ph type="sldImg" idx="2"/>
@@ -2216,7 +2234,7 @@
             <a:spLocks noGrp="1"/>
           </p:cNvSpPr>
           <p:nvPr>
-            <p:ph type="body" idx="3" sz="quarter"/>
+            <p:ph type="body" sz="quarter" idx="3"/>
           </p:nvPr>
         </p:nvSpPr>
         <p:spPr/>
@@ -2237,7 +2255,7 @@
             <a:spLocks noGrp="1"/>
           </p:cNvSpPr>
           <p:nvPr>
-            <p:ph type="sldNum" idx="5" sz="quarter"/>
+            <p:ph type="sldNum" sz="quarter" idx="5"/>
           </p:nvPr>
         </p:nvSpPr>
         <p:spPr/>
@@ -2251,7 +2269,7 @@
 </file>
 
 <file path=ppt/notesSlides/notesSlide32.xml><?xml version="1.0" encoding="utf-8"?>
-<p:notes xmlns:a="http://schemas.openxmlformats.org/drawingml/2006/main" xmlns:p="http://schemas.openxmlformats.org/presentationml/2006/main" xmlns:r="http://schemas.openxmlformats.org/officeDocument/2006/relationships">
+<p:notes xmlns:a="http://schemas.openxmlformats.org/drawingml/2006/main" xmlns:r="http://schemas.openxmlformats.org/officeDocument/2006/relationships" xmlns:p="http://schemas.openxmlformats.org/presentationml/2006/main">
   <p:cSld>
     <p:spTree>
       <p:nvGrpSpPr>
@@ -2271,7 +2289,7 @@
         <p:nvSpPr>
           <p:cNvPr id="2" name="Slide Image Placeholder 1"/>
           <p:cNvSpPr>
-            <a:spLocks noGrp="1"/>
+            <a:spLocks noGrp="1" noRot="1" noChangeAspect="1"/>
           </p:cNvSpPr>
           <p:nvPr>
             <p:ph type="sldImg" idx="2"/>
@@ -2286,7 +2304,7 @@
             <a:spLocks noGrp="1"/>
           </p:cNvSpPr>
           <p:nvPr>
-            <p:ph type="body" idx="3" sz="quarter"/>
+            <p:ph type="body" sz="quarter" idx="3"/>
           </p:nvPr>
         </p:nvSpPr>
         <p:spPr/>
@@ -2307,7 +2325,7 @@
             <a:spLocks noGrp="1"/>
           </p:cNvSpPr>
           <p:nvPr>
-            <p:ph type="sldNum" idx="5" sz="quarter"/>
+            <p:ph type="sldNum" sz="quarter" idx="5"/>
           </p:nvPr>
         </p:nvSpPr>
         <p:spPr/>
@@ -2321,7 +2339,7 @@
 </file>
 
 <file path=ppt/notesSlides/notesSlide4.xml><?xml version="1.0" encoding="utf-8"?>
-<p:notes xmlns:a="http://schemas.openxmlformats.org/drawingml/2006/main" xmlns:p="http://schemas.openxmlformats.org/presentationml/2006/main" xmlns:r="http://schemas.openxmlformats.org/officeDocument/2006/relationships">
+<p:notes xmlns:a="http://schemas.openxmlformats.org/drawingml/2006/main" xmlns:r="http://schemas.openxmlformats.org/officeDocument/2006/relationships" xmlns:p="http://schemas.openxmlformats.org/presentationml/2006/main">
   <p:cSld>
     <p:spTree>
       <p:nvGrpSpPr>
@@ -2341,7 +2359,7 @@
         <p:nvSpPr>
           <p:cNvPr id="2" name="Slide Image Placeholder 1"/>
           <p:cNvSpPr>
-            <a:spLocks noGrp="1"/>
+            <a:spLocks noGrp="1" noRot="1" noChangeAspect="1"/>
           </p:cNvSpPr>
           <p:nvPr>
             <p:ph type="sldImg" idx="2"/>
@@ -2356,7 +2374,7 @@
             <a:spLocks noGrp="1"/>
           </p:cNvSpPr>
           <p:nvPr>
-            <p:ph type="body" idx="3" sz="quarter"/>
+            <p:ph type="body" sz="quarter" idx="3"/>
           </p:nvPr>
         </p:nvSpPr>
         <p:spPr/>
@@ -2377,7 +2395,7 @@
             <a:spLocks noGrp="1"/>
           </p:cNvSpPr>
           <p:nvPr>
-            <p:ph type="sldNum" idx="5" sz="quarter"/>
+            <p:ph type="sldNum" sz="quarter" idx="5"/>
           </p:nvPr>
         </p:nvSpPr>
         <p:spPr/>
@@ -2391,7 +2409,7 @@
 </file>
 
 <file path=ppt/notesSlides/notesSlide5.xml><?xml version="1.0" encoding="utf-8"?>
-<p:notes xmlns:a="http://schemas.openxmlformats.org/drawingml/2006/main" xmlns:p="http://schemas.openxmlformats.org/presentationml/2006/main" xmlns:r="http://schemas.openxmlformats.org/officeDocument/2006/relationships">
+<p:notes xmlns:a="http://schemas.openxmlformats.org/drawingml/2006/main" xmlns:r="http://schemas.openxmlformats.org/officeDocument/2006/relationships" xmlns:p="http://schemas.openxmlformats.org/presentationml/2006/main">
   <p:cSld>
     <p:spTree>
       <p:nvGrpSpPr>
@@ -2411,7 +2429,7 @@
         <p:nvSpPr>
           <p:cNvPr id="2" name="Slide Image Placeholder 1"/>
           <p:cNvSpPr>
-            <a:spLocks noGrp="1"/>
+            <a:spLocks noGrp="1" noRot="1" noChangeAspect="1"/>
           </p:cNvSpPr>
           <p:nvPr>
             <p:ph type="sldImg" idx="2"/>
@@ -2426,7 +2444,7 @@
             <a:spLocks noGrp="1"/>
           </p:cNvSpPr>
           <p:nvPr>
-            <p:ph type="body" idx="3" sz="quarter"/>
+            <p:ph type="body" sz="quarter" idx="3"/>
           </p:nvPr>
         </p:nvSpPr>
         <p:spPr/>
@@ -2447,7 +2465,7 @@
             <a:spLocks noGrp="1"/>
           </p:cNvSpPr>
           <p:nvPr>
-            <p:ph type="sldNum" idx="5" sz="quarter"/>
+            <p:ph type="sldNum" sz="quarter" idx="5"/>
           </p:nvPr>
         </p:nvSpPr>
         <p:spPr/>
@@ -2461,7 +2479,7 @@
 </file>
 
 <file path=ppt/notesSlides/notesSlide6.xml><?xml version="1.0" encoding="utf-8"?>
-<p:notes xmlns:a="http://schemas.openxmlformats.org/drawingml/2006/main" xmlns:p="http://schemas.openxmlformats.org/presentationml/2006/main" xmlns:r="http://schemas.openxmlformats.org/officeDocument/2006/relationships">
+<p:notes xmlns:a="http://schemas.openxmlformats.org/drawingml/2006/main" xmlns:r="http://schemas.openxmlformats.org/officeDocument/2006/relationships" xmlns:p="http://schemas.openxmlformats.org/presentationml/2006/main">
   <p:cSld>
     <p:spTree>
       <p:nvGrpSpPr>
@@ -2481,7 +2499,7 @@
         <p:nvSpPr>
           <p:cNvPr id="2" name="Slide Image Placeholder 1"/>
           <p:cNvSpPr>
-            <a:spLocks noGrp="1"/>
+            <a:spLocks noGrp="1" noRot="1" noChangeAspect="1"/>
           </p:cNvSpPr>
           <p:nvPr>
             <p:ph type="sldImg" idx="2"/>
@@ -2496,7 +2514,7 @@
             <a:spLocks noGrp="1"/>
           </p:cNvSpPr>
           <p:nvPr>
-            <p:ph type="body" idx="3" sz="quarter"/>
+            <p:ph type="body" sz="quarter" idx="3"/>
           </p:nvPr>
         </p:nvSpPr>
         <p:spPr/>
@@ -2517,7 +2535,7 @@
             <a:spLocks noGrp="1"/>
           </p:cNvSpPr>
           <p:nvPr>
-            <p:ph type="sldNum" idx="5" sz="quarter"/>
+            <p:ph type="sldNum" sz="quarter" idx="5"/>
           </p:nvPr>
         </p:nvSpPr>
         <p:spPr/>
@@ -2531,7 +2549,7 @@
 </file>
 
 <file path=ppt/notesSlides/notesSlide7.xml><?xml version="1.0" encoding="utf-8"?>
-<p:notes xmlns:a="http://schemas.openxmlformats.org/drawingml/2006/main" xmlns:p="http://schemas.openxmlformats.org/presentationml/2006/main" xmlns:r="http://schemas.openxmlformats.org/officeDocument/2006/relationships">
+<p:notes xmlns:a="http://schemas.openxmlformats.org/drawingml/2006/main" xmlns:r="http://schemas.openxmlformats.org/officeDocument/2006/relationships" xmlns:p="http://schemas.openxmlformats.org/presentationml/2006/main">
   <p:cSld>
     <p:spTree>
       <p:nvGrpSpPr>
@@ -2551,7 +2569,7 @@
         <p:nvSpPr>
           <p:cNvPr id="2" name="Slide Image Placeholder 1"/>
           <p:cNvSpPr>
-            <a:spLocks noGrp="1"/>
+            <a:spLocks noGrp="1" noRot="1" noChangeAspect="1"/>
           </p:cNvSpPr>
           <p:nvPr>
             <p:ph type="sldImg" idx="2"/>
@@ -2566,7 +2584,7 @@
             <a:spLocks noGrp="1"/>
           </p:cNvSpPr>
           <p:nvPr>
-            <p:ph type="body" idx="3" sz="quarter"/>
+            <p:ph type="body" sz="quarter" idx="3"/>
           </p:nvPr>
         </p:nvSpPr>
         <p:spPr/>
@@ -2587,7 +2605,7 @@
             <a:spLocks noGrp="1"/>
           </p:cNvSpPr>
           <p:nvPr>
-            <p:ph type="sldNum" idx="5" sz="quarter"/>
+            <p:ph type="sldNum" sz="quarter" idx="5"/>
           </p:nvPr>
         </p:nvSpPr>
         <p:spPr/>
@@ -2601,7 +2619,7 @@
 </file>
 
 <file path=ppt/notesSlides/notesSlide8.xml><?xml version="1.0" encoding="utf-8"?>
-<p:notes xmlns:a="http://schemas.openxmlformats.org/drawingml/2006/main" xmlns:p="http://schemas.openxmlformats.org/presentationml/2006/main" xmlns:r="http://schemas.openxmlformats.org/officeDocument/2006/relationships">
+<p:notes xmlns:a="http://schemas.openxmlformats.org/drawingml/2006/main" xmlns:r="http://schemas.openxmlformats.org/officeDocument/2006/relationships" xmlns:p="http://schemas.openxmlformats.org/presentationml/2006/main">
   <p:cSld>
     <p:spTree>
       <p:nvGrpSpPr>
@@ -2621,7 +2639,7 @@
         <p:nvSpPr>
           <p:cNvPr id="2" name="Slide Image Placeholder 1"/>
           <p:cNvSpPr>
-            <a:spLocks noGrp="1"/>
+            <a:spLocks noGrp="1" noRot="1" noChangeAspect="1"/>
           </p:cNvSpPr>
           <p:nvPr>
             <p:ph type="sldImg" idx="2"/>
@@ -2636,7 +2654,7 @@
             <a:spLocks noGrp="1"/>
           </p:cNvSpPr>
           <p:nvPr>
-            <p:ph type="body" idx="3" sz="quarter"/>
+            <p:ph type="body" sz="quarter" idx="3"/>
           </p:nvPr>
         </p:nvSpPr>
         <p:spPr/>
@@ -2657,7 +2675,7 @@
             <a:spLocks noGrp="1"/>
           </p:cNvSpPr>
           <p:nvPr>
-            <p:ph type="sldNum" idx="5" sz="quarter"/>
+            <p:ph type="sldNum" sz="quarter" idx="5"/>
           </p:nvPr>
         </p:nvSpPr>
         <p:spPr/>
@@ -2671,7 +2689,7 @@
 </file>
 
 <file path=ppt/notesSlides/notesSlide9.xml><?xml version="1.0" encoding="utf-8"?>
-<p:notes xmlns:a="http://schemas.openxmlformats.org/drawingml/2006/main" xmlns:p="http://schemas.openxmlformats.org/presentationml/2006/main" xmlns:r="http://schemas.openxmlformats.org/officeDocument/2006/relationships">
+<p:notes xmlns:a="http://schemas.openxmlformats.org/drawingml/2006/main" xmlns:r="http://schemas.openxmlformats.org/officeDocument/2006/relationships" xmlns:p="http://schemas.openxmlformats.org/presentationml/2006/main">
   <p:cSld>
     <p:spTree>
       <p:nvGrpSpPr>
@@ -2691,7 +2709,7 @@
         <p:nvSpPr>
           <p:cNvPr id="2" name="Slide Image Placeholder 1"/>
           <p:cNvSpPr>
-            <a:spLocks noGrp="1"/>
+            <a:spLocks noGrp="1" noRot="1" noChangeAspect="1"/>
           </p:cNvSpPr>
           <p:nvPr>
             <p:ph type="sldImg" idx="2"/>
@@ -2706,7 +2724,7 @@
             <a:spLocks noGrp="1"/>
           </p:cNvSpPr>
           <p:nvPr>
-            <p:ph type="body" idx="3" sz="quarter"/>
+            <p:ph type="body" sz="quarter" idx="3"/>
           </p:nvPr>
         </p:nvSpPr>
         <p:spPr/>
@@ -2727,7 +2745,7 @@
             <a:spLocks noGrp="1"/>
           </p:cNvSpPr>
           <p:nvPr>
-            <p:ph type="sldNum" idx="5" sz="quarter"/>
+            <p:ph type="sldNum" sz="quarter" idx="5"/>
           </p:nvPr>
         </p:nvSpPr>
         <p:spPr/>
@@ -2778,10 +2796,9 @@
           <a:lstStyle/>
           <a:p>
             <a:r>
-              <a:rPr lang="en-US" smtClean="0"/>
+              <a:rPr lang="en-US"/>
               <a:t>Click to edit Master title style</a:t>
             </a:r>
-            <a:endParaRPr lang="en-US"/>
           </a:p>
         </p:txBody>
       </p:sp>
@@ -2897,10 +2914,9 @@
           </a:lstStyle>
           <a:p>
             <a:r>
-              <a:rPr lang="en-US" smtClean="0"/>
+              <a:rPr lang="en-US"/>
               <a:t>Click to edit Master subtitle style</a:t>
             </a:r>
-            <a:endParaRPr lang="en-US"/>
           </a:p>
         </p:txBody>
       </p:sp>
@@ -2921,7 +2937,7 @@
           <a:p>
             <a:fld id="{5BCAD085-E8A6-8845-BD4E-CB4CCA059FC4}" type="datetimeFigureOut">
               <a:rPr lang="en-US" smtClean="0"/>
-              <a:t>1/27/13</a:t>
+              <a:t>10/29/2026</a:t>
             </a:fld>
             <a:endParaRPr lang="en-US"/>
           </a:p>
@@ -3015,10 +3031,9 @@
           <a:lstStyle/>
           <a:p>
             <a:r>
-              <a:rPr lang="en-US" smtClean="0"/>
+              <a:rPr lang="en-US"/>
               <a:t>Click to edit Master title style</a:t>
             </a:r>
-            <a:endParaRPr lang="en-US"/>
           </a:p>
         </p:txBody>
       </p:sp>
@@ -3039,38 +3054,37 @@
           <a:p>
             <a:pPr lvl="0"/>
             <a:r>
-              <a:rPr lang="en-US" smtClean="0"/>
+              <a:rPr lang="en-US"/>
               <a:t>Click to edit Master text styles</a:t>
             </a:r>
           </a:p>
           <a:p>
             <a:pPr lvl="1"/>
             <a:r>
-              <a:rPr lang="en-US" smtClean="0"/>
+              <a:rPr lang="en-US"/>
               <a:t>Second level</a:t>
             </a:r>
           </a:p>
           <a:p>
             <a:pPr lvl="2"/>
             <a:r>
-              <a:rPr lang="en-US" smtClean="0"/>
+              <a:rPr lang="en-US"/>
               <a:t>Third level</a:t>
             </a:r>
           </a:p>
           <a:p>
             <a:pPr lvl="3"/>
             <a:r>
-              <a:rPr lang="en-US" smtClean="0"/>
+              <a:rPr lang="en-US"/>
               <a:t>Fourth level</a:t>
             </a:r>
           </a:p>
           <a:p>
             <a:pPr lvl="4"/>
             <a:r>
-              <a:rPr lang="en-US" smtClean="0"/>
+              <a:rPr lang="en-US"/>
               <a:t>Fifth level</a:t>
             </a:r>
-            <a:endParaRPr lang="en-US"/>
           </a:p>
         </p:txBody>
       </p:sp>
@@ -3091,7 +3105,7 @@
           <a:p>
             <a:fld id="{5BCAD085-E8A6-8845-BD4E-CB4CCA059FC4}" type="datetimeFigureOut">
               <a:rPr lang="en-US" smtClean="0"/>
-              <a:t>1/27/13</a:t>
+              <a:t>10/29/2026</a:t>
             </a:fld>
             <a:endParaRPr lang="en-US"/>
           </a:p>
@@ -3190,10 +3204,9 @@
           <a:lstStyle/>
           <a:p>
             <a:r>
-              <a:rPr lang="en-US" smtClean="0"/>
+              <a:rPr lang="en-US"/>
               <a:t>Click to edit Master title style</a:t>
             </a:r>
-            <a:endParaRPr lang="en-US"/>
           </a:p>
         </p:txBody>
       </p:sp>
@@ -3219,38 +3232,37 @@
           <a:p>
             <a:pPr lvl="0"/>
             <a:r>
-              <a:rPr lang="en-US" smtClean="0"/>
+              <a:rPr lang="en-US"/>
               <a:t>Click to edit Master text styles</a:t>
             </a:r>
           </a:p>
           <a:p>
             <a:pPr lvl="1"/>
             <a:r>
-              <a:rPr lang="en-US" smtClean="0"/>
+              <a:rPr lang="en-US"/>
               <a:t>Second level</a:t>
             </a:r>
           </a:p>
           <a:p>
             <a:pPr lvl="2"/>
             <a:r>
-              <a:rPr lang="en-US" smtClean="0"/>
+              <a:rPr lang="en-US"/>
               <a:t>Third level</a:t>
             </a:r>
           </a:p>
           <a:p>
             <a:pPr lvl="3"/>
             <a:r>
-              <a:rPr lang="en-US" smtClean="0"/>
+              <a:rPr lang="en-US"/>
               <a:t>Fourth level</a:t>
             </a:r>
           </a:p>
           <a:p>
             <a:pPr lvl="4"/>
             <a:r>
-              <a:rPr lang="en-US" smtClean="0"/>
+              <a:rPr lang="en-US"/>
               <a:t>Fifth level</a:t>
             </a:r>
-            <a:endParaRPr lang="en-US"/>
           </a:p>
         </p:txBody>
       </p:sp>
@@ -3271,7 +3283,7 @@
           <a:p>
             <a:fld id="{5BCAD085-E8A6-8845-BD4E-CB4CCA059FC4}" type="datetimeFigureOut">
               <a:rPr lang="en-US" smtClean="0"/>
-              <a:t>1/27/13</a:t>
+              <a:t>10/29/2026</a:t>
             </a:fld>
             <a:endParaRPr lang="en-US"/>
           </a:p>
@@ -3365,10 +3377,9 @@
           <a:lstStyle/>
           <a:p>
             <a:r>
-              <a:rPr lang="en-US" smtClean="0"/>
+              <a:rPr lang="en-US"/>
               <a:t>Click to edit Master title style</a:t>
             </a:r>
-            <a:endParaRPr lang="en-US"/>
           </a:p>
         </p:txBody>
       </p:sp>
@@ -3389,38 +3400,37 @@
           <a:p>
             <a:pPr lvl="0"/>
             <a:r>
-              <a:rPr lang="en-US" smtClean="0"/>
+              <a:rPr lang="en-US"/>
               <a:t>Click to edit Master text styles</a:t>
             </a:r>
           </a:p>
           <a:p>
             <a:pPr lvl="1"/>
             <a:r>
-              <a:rPr lang="en-US" smtClean="0"/>
+              <a:rPr lang="en-US"/>
               <a:t>Second level</a:t>
             </a:r>
           </a:p>
           <a:p>
             <a:pPr lvl="2"/>
             <a:r>
-              <a:rPr lang="en-US" smtClean="0"/>
+              <a:rPr lang="en-US"/>
               <a:t>Third level</a:t>
             </a:r>
           </a:p>
           <a:p>
             <a:pPr lvl="3"/>
             <a:r>
-              <a:rPr lang="en-US" smtClean="0"/>
+              <a:rPr lang="en-US"/>
               <a:t>Fourth level</a:t>
             </a:r>
           </a:p>
           <a:p>
             <a:pPr lvl="4"/>
             <a:r>
-              <a:rPr lang="en-US" smtClean="0"/>
+              <a:rPr lang="en-US"/>
               <a:t>Fifth level</a:t>
             </a:r>
-            <a:endParaRPr lang="en-US"/>
           </a:p>
         </p:txBody>
       </p:sp>
@@ -3441,7 +3451,7 @@
           <a:p>
             <a:fld id="{5BCAD085-E8A6-8845-BD4E-CB4CCA059FC4}" type="datetimeFigureOut">
               <a:rPr lang="en-US" smtClean="0"/>
-              <a:t>1/27/13</a:t>
+              <a:t>10/29/2026</a:t>
             </a:fld>
             <a:endParaRPr lang="en-US"/>
           </a:p>
@@ -3544,10 +3554,9 @@
           </a:lstStyle>
           <a:p>
             <a:r>
-              <a:rPr lang="en-US" smtClean="0"/>
+              <a:rPr lang="en-US"/>
               <a:t>Click to edit Master title style</a:t>
             </a:r>
-            <a:endParaRPr lang="en-US"/>
           </a:p>
         </p:txBody>
       </p:sp>
@@ -3664,7 +3673,7 @@
           <a:p>
             <a:pPr lvl="0"/>
             <a:r>
-              <a:rPr lang="en-US" smtClean="0"/>
+              <a:rPr lang="en-US"/>
               <a:t>Click to edit Master text styles</a:t>
             </a:r>
           </a:p>
@@ -3687,7 +3696,7 @@
           <a:p>
             <a:fld id="{5BCAD085-E8A6-8845-BD4E-CB4CCA059FC4}" type="datetimeFigureOut">
               <a:rPr lang="en-US" smtClean="0"/>
-              <a:t>1/27/13</a:t>
+              <a:t>10/29/2026</a:t>
             </a:fld>
             <a:endParaRPr lang="en-US"/>
           </a:p>
@@ -3781,10 +3790,9 @@
           <a:lstStyle/>
           <a:p>
             <a:r>
-              <a:rPr lang="en-US" smtClean="0"/>
+              <a:rPr lang="en-US"/>
               <a:t>Click to edit Master title style</a:t>
             </a:r>
-            <a:endParaRPr lang="en-US"/>
           </a:p>
         </p:txBody>
       </p:sp>
@@ -3838,38 +3846,37 @@
           <a:p>
             <a:pPr lvl="0"/>
             <a:r>
-              <a:rPr lang="en-US" smtClean="0"/>
+              <a:rPr lang="en-US"/>
               <a:t>Click to edit Master text styles</a:t>
             </a:r>
           </a:p>
           <a:p>
             <a:pPr lvl="1"/>
             <a:r>
-              <a:rPr lang="en-US" smtClean="0"/>
+              <a:rPr lang="en-US"/>
               <a:t>Second level</a:t>
             </a:r>
           </a:p>
           <a:p>
             <a:pPr lvl="2"/>
             <a:r>
-              <a:rPr lang="en-US" smtClean="0"/>
+              <a:rPr lang="en-US"/>
               <a:t>Third level</a:t>
             </a:r>
           </a:p>
           <a:p>
             <a:pPr lvl="3"/>
             <a:r>
-              <a:rPr lang="en-US" smtClean="0"/>
+              <a:rPr lang="en-US"/>
               <a:t>Fourth level</a:t>
             </a:r>
           </a:p>
           <a:p>
             <a:pPr lvl="4"/>
             <a:r>
-              <a:rPr lang="en-US" smtClean="0"/>
+              <a:rPr lang="en-US"/>
               <a:t>Fifth level</a:t>
             </a:r>
-            <a:endParaRPr lang="en-US"/>
           </a:p>
         </p:txBody>
       </p:sp>
@@ -3923,38 +3930,37 @@
           <a:p>
             <a:pPr lvl="0"/>
             <a:r>
-              <a:rPr lang="en-US" smtClean="0"/>
+              <a:rPr lang="en-US"/>
               <a:t>Click to edit Master text styles</a:t>
             </a:r>
           </a:p>
           <a:p>
             <a:pPr lvl="1"/>
             <a:r>
-              <a:rPr lang="en-US" smtClean="0"/>
+              <a:rPr lang="en-US"/>
               <a:t>Second level</a:t>
             </a:r>
           </a:p>
           <a:p>
             <a:pPr lvl="2"/>
             <a:r>
-              <a:rPr lang="en-US" smtClean="0"/>
+              <a:rPr lang="en-US"/>
               <a:t>Third level</a:t>
             </a:r>
           </a:p>
           <a:p>
             <a:pPr lvl="3"/>
             <a:r>
-              <a:rPr lang="en-US" smtClean="0"/>
+              <a:rPr lang="en-US"/>
               <a:t>Fourth level</a:t>
             </a:r>
           </a:p>
           <a:p>
             <a:pPr lvl="4"/>
             <a:r>
-              <a:rPr lang="en-US" smtClean="0"/>
+              <a:rPr lang="en-US"/>
               <a:t>Fifth level</a:t>
             </a:r>
-            <a:endParaRPr lang="en-US"/>
           </a:p>
         </p:txBody>
       </p:sp>
@@ -3975,7 +3981,7 @@
           <a:p>
             <a:fld id="{5BCAD085-E8A6-8845-BD4E-CB4CCA059FC4}" type="datetimeFigureOut">
               <a:rPr lang="en-US" smtClean="0"/>
-              <a:t>1/27/13</a:t>
+              <a:t>10/29/2026</a:t>
             </a:fld>
             <a:endParaRPr lang="en-US"/>
           </a:p>
@@ -4073,10 +4079,9 @@
           </a:lstStyle>
           <a:p>
             <a:r>
-              <a:rPr lang="en-US" smtClean="0"/>
+              <a:rPr lang="en-US"/>
               <a:t>Click to edit Master title style</a:t>
             </a:r>
-            <a:endParaRPr lang="en-US"/>
           </a:p>
         </p:txBody>
       </p:sp>
@@ -4139,7 +4144,7 @@
           <a:p>
             <a:pPr lvl="0"/>
             <a:r>
-              <a:rPr lang="en-US" smtClean="0"/>
+              <a:rPr lang="en-US"/>
               <a:t>Click to edit Master text styles</a:t>
             </a:r>
           </a:p>
@@ -4195,38 +4200,37 @@
           <a:p>
             <a:pPr lvl="0"/>
             <a:r>
-              <a:rPr lang="en-US" smtClean="0"/>
+              <a:rPr lang="en-US"/>
               <a:t>Click to edit Master text styles</a:t>
             </a:r>
           </a:p>
           <a:p>
             <a:pPr lvl="1"/>
             <a:r>
-              <a:rPr lang="en-US" smtClean="0"/>
+              <a:rPr lang="en-US"/>
               <a:t>Second level</a:t>
             </a:r>
           </a:p>
           <a:p>
             <a:pPr lvl="2"/>
             <a:r>
-              <a:rPr lang="en-US" smtClean="0"/>
+              <a:rPr lang="en-US"/>
               <a:t>Third level</a:t>
             </a:r>
           </a:p>
           <a:p>
             <a:pPr lvl="3"/>
             <a:r>
-              <a:rPr lang="en-US" smtClean="0"/>
+              <a:rPr lang="en-US"/>
               <a:t>Fourth level</a:t>
             </a:r>
           </a:p>
           <a:p>
             <a:pPr lvl="4"/>
             <a:r>
-              <a:rPr lang="en-US" smtClean="0"/>
+              <a:rPr lang="en-US"/>
               <a:t>Fifth level</a:t>
             </a:r>
-            <a:endParaRPr lang="en-US"/>
           </a:p>
         </p:txBody>
       </p:sp>
@@ -4289,7 +4293,7 @@
           <a:p>
             <a:pPr lvl="0"/>
             <a:r>
-              <a:rPr lang="en-US" smtClean="0"/>
+              <a:rPr lang="en-US"/>
               <a:t>Click to edit Master text styles</a:t>
             </a:r>
           </a:p>
@@ -4345,38 +4349,37 @@
           <a:p>
             <a:pPr lvl="0"/>
             <a:r>
-              <a:rPr lang="en-US" smtClean="0"/>
+              <a:rPr lang="en-US"/>
               <a:t>Click to edit Master text styles</a:t>
             </a:r>
           </a:p>
           <a:p>
             <a:pPr lvl="1"/>
             <a:r>
-              <a:rPr lang="en-US" smtClean="0"/>
+              <a:rPr lang="en-US"/>
               <a:t>Second level</a:t>
             </a:r>
           </a:p>
           <a:p>
             <a:pPr lvl="2"/>
             <a:r>
-              <a:rPr lang="en-US" smtClean="0"/>
+              <a:rPr lang="en-US"/>
               <a:t>Third level</a:t>
             </a:r>
           </a:p>
           <a:p>
             <a:pPr lvl="3"/>
             <a:r>
-              <a:rPr lang="en-US" smtClean="0"/>
+              <a:rPr lang="en-US"/>
               <a:t>Fourth level</a:t>
             </a:r>
           </a:p>
           <a:p>
             <a:pPr lvl="4"/>
             <a:r>
-              <a:rPr lang="en-US" smtClean="0"/>
+              <a:rPr lang="en-US"/>
               <a:t>Fifth level</a:t>
             </a:r>
-            <a:endParaRPr lang="en-US"/>
           </a:p>
         </p:txBody>
       </p:sp>
@@ -4397,7 +4400,7 @@
           <a:p>
             <a:fld id="{5BCAD085-E8A6-8845-BD4E-CB4CCA059FC4}" type="datetimeFigureOut">
               <a:rPr lang="en-US" smtClean="0"/>
-              <a:t>1/27/13</a:t>
+              <a:t>10/29/2026</a:t>
             </a:fld>
             <a:endParaRPr lang="en-US"/>
           </a:p>
@@ -4491,10 +4494,9 @@
           <a:lstStyle/>
           <a:p>
             <a:r>
-              <a:rPr lang="en-US" smtClean="0"/>
+              <a:rPr lang="en-US"/>
               <a:t>Click to edit Master title style</a:t>
             </a:r>
-            <a:endParaRPr lang="en-US"/>
           </a:p>
         </p:txBody>
       </p:sp>
@@ -4515,7 +4517,7 @@
           <a:p>
             <a:fld id="{5BCAD085-E8A6-8845-BD4E-CB4CCA059FC4}" type="datetimeFigureOut">
               <a:rPr lang="en-US" smtClean="0"/>
-              <a:t>1/27/13</a:t>
+              <a:t>10/29/2026</a:t>
             </a:fld>
             <a:endParaRPr lang="en-US"/>
           </a:p>
@@ -4610,7 +4612,7 @@
           <a:p>
             <a:fld id="{5BCAD085-E8A6-8845-BD4E-CB4CCA059FC4}" type="datetimeFigureOut">
               <a:rPr lang="en-US" smtClean="0"/>
-              <a:t>1/27/13</a:t>
+              <a:t>10/29/2026</a:t>
             </a:fld>
             <a:endParaRPr lang="en-US"/>
           </a:p>
@@ -4713,10 +4715,9 @@
           </a:lstStyle>
           <a:p>
             <a:r>
-              <a:rPr lang="en-US" smtClean="0"/>
+              <a:rPr lang="en-US"/>
               <a:t>Click to edit Master title style</a:t>
             </a:r>
-            <a:endParaRPr lang="en-US"/>
           </a:p>
         </p:txBody>
       </p:sp>
@@ -4770,38 +4771,37 @@
           <a:p>
             <a:pPr lvl="0"/>
             <a:r>
-              <a:rPr lang="en-US" smtClean="0"/>
+              <a:rPr lang="en-US"/>
               <a:t>Click to edit Master text styles</a:t>
             </a:r>
           </a:p>
           <a:p>
             <a:pPr lvl="1"/>
             <a:r>
-              <a:rPr lang="en-US" smtClean="0"/>
+              <a:rPr lang="en-US"/>
               <a:t>Second level</a:t>
             </a:r>
           </a:p>
           <a:p>
             <a:pPr lvl="2"/>
             <a:r>
-              <a:rPr lang="en-US" smtClean="0"/>
+              <a:rPr lang="en-US"/>
               <a:t>Third level</a:t>
             </a:r>
           </a:p>
           <a:p>
             <a:pPr lvl="3"/>
             <a:r>
-              <a:rPr lang="en-US" smtClean="0"/>
+              <a:rPr lang="en-US"/>
               <a:t>Fourth level</a:t>
             </a:r>
           </a:p>
           <a:p>
             <a:pPr lvl="4"/>
             <a:r>
-              <a:rPr lang="en-US" smtClean="0"/>
+              <a:rPr lang="en-US"/>
               <a:t>Fifth level</a:t>
             </a:r>
-            <a:endParaRPr lang="en-US"/>
           </a:p>
         </p:txBody>
       </p:sp>
@@ -4864,7 +4864,7 @@
           <a:p>
             <a:pPr lvl="0"/>
             <a:r>
-              <a:rPr lang="en-US" smtClean="0"/>
+              <a:rPr lang="en-US"/>
               <a:t>Click to edit Master text styles</a:t>
             </a:r>
           </a:p>
@@ -4887,7 +4887,7 @@
           <a:p>
             <a:fld id="{5BCAD085-E8A6-8845-BD4E-CB4CCA059FC4}" type="datetimeFigureOut">
               <a:rPr lang="en-US" smtClean="0"/>
-              <a:t>1/27/13</a:t>
+              <a:t>10/29/2026</a:t>
             </a:fld>
             <a:endParaRPr lang="en-US"/>
           </a:p>
@@ -4990,10 +4990,9 @@
           </a:lstStyle>
           <a:p>
             <a:r>
-              <a:rPr lang="en-US" smtClean="0"/>
+              <a:rPr lang="en-US"/>
               <a:t>Click to edit Master title style</a:t>
             </a:r>
-            <a:endParaRPr lang="en-US"/>
           </a:p>
         </p:txBody>
       </p:sp>
@@ -5117,7 +5116,7 @@
           <a:p>
             <a:pPr lvl="0"/>
             <a:r>
-              <a:rPr lang="en-US" smtClean="0"/>
+              <a:rPr lang="en-US"/>
               <a:t>Click to edit Master text styles</a:t>
             </a:r>
           </a:p>
@@ -5140,7 +5139,7 @@
           <a:p>
             <a:fld id="{5BCAD085-E8A6-8845-BD4E-CB4CCA059FC4}" type="datetimeFigureOut">
               <a:rPr lang="en-US" smtClean="0"/>
-              <a:t>1/27/13</a:t>
+              <a:t>10/29/2026</a:t>
             </a:fld>
             <a:endParaRPr lang="en-US"/>
           </a:p>
@@ -5249,10 +5248,9 @@
           <a:lstStyle/>
           <a:p>
             <a:r>
-              <a:rPr lang="en-US" smtClean="0"/>
+              <a:rPr lang="en-US"/>
               <a:t>Click to edit Master title style</a:t>
             </a:r>
-            <a:endParaRPr lang="en-US"/>
           </a:p>
         </p:txBody>
       </p:sp>
@@ -5283,38 +5281,37 @@
           <a:p>
             <a:pPr lvl="0"/>
             <a:r>
-              <a:rPr lang="en-US" smtClean="0"/>
+              <a:rPr lang="en-US"/>
               <a:t>Click to edit Master text styles</a:t>
             </a:r>
           </a:p>
           <a:p>
             <a:pPr lvl="1"/>
             <a:r>
-              <a:rPr lang="en-US" smtClean="0"/>
+              <a:rPr lang="en-US"/>
               <a:t>Second level</a:t>
             </a:r>
           </a:p>
           <a:p>
             <a:pPr lvl="2"/>
             <a:r>
-              <a:rPr lang="en-US" smtClean="0"/>
+              <a:rPr lang="en-US"/>
               <a:t>Third level</a:t>
             </a:r>
           </a:p>
           <a:p>
             <a:pPr lvl="3"/>
             <a:r>
-              <a:rPr lang="en-US" smtClean="0"/>
+              <a:rPr lang="en-US"/>
               <a:t>Fourth level</a:t>
             </a:r>
           </a:p>
           <a:p>
             <a:pPr lvl="4"/>
             <a:r>
-              <a:rPr lang="en-US" smtClean="0"/>
+              <a:rPr lang="en-US"/>
               <a:t>Fifth level</a:t>
             </a:r>
-            <a:endParaRPr lang="en-US"/>
           </a:p>
         </p:txBody>
       </p:sp>
@@ -5353,7 +5350,7 @@
           <a:p>
             <a:fld id="{5BCAD085-E8A6-8845-BD4E-CB4CCA059FC4}" type="datetimeFigureOut">
               <a:rPr lang="en-US" smtClean="0"/>
-              <a:t>1/27/13</a:t>
+              <a:t>10/29/2026</a:t>
             </a:fld>
             <a:endParaRPr lang="en-US"/>
           </a:p>
@@ -5712,7 +5709,7 @@
 </file>
 
 <file path=ppt/slides/slide1.xml><?xml version="1.0" encoding="utf-8"?>
-<p:sld xmlns:a="http://schemas.openxmlformats.org/drawingml/2006/main" xmlns:p="http://schemas.openxmlformats.org/presentationml/2006/main" xmlns:r="http://schemas.openxmlformats.org/officeDocument/2006/relationships">
+<p:sld xmlns:a="http://schemas.openxmlformats.org/drawingml/2006/main" xmlns:r="http://schemas.openxmlformats.org/officeDocument/2006/relationships" xmlns:p="http://schemas.openxmlformats.org/presentationml/2006/main">
   <p:cSld>
     <p:spTree>
       <p:nvGrpSpPr>
@@ -5720,7 +5717,14 @@
         <p:cNvGrpSpPr/>
         <p:nvPr/>
       </p:nvGrpSpPr>
-      <p:grpSpPr/>
+      <p:grpSpPr>
+        <a:xfrm>
+          <a:off x="0" y="0"/>
+          <a:ext cx="0" cy="0"/>
+          <a:chOff x="0" y="0"/>
+          <a:chExt cx="0" cy="0"/>
+        </a:xfrm>
+      </p:grpSpPr>
       <p:sp>
         <p:nvSpPr>
           <p:cNvPr id="2" name="Rectangle 1"/>
@@ -5762,6 +5766,7 @@
           <a:lstStyle/>
           <a:p>
             <a:pPr algn="ctr"/>
+            <a:endParaRPr/>
           </a:p>
         </p:txBody>
       </p:sp>
@@ -5806,6 +5811,7 @@
           <a:lstStyle/>
           <a:p>
             <a:pPr algn="ctr"/>
+            <a:endParaRPr/>
           </a:p>
         </p:txBody>
       </p:sp>
@@ -5850,6 +5856,7 @@
           <a:lstStyle/>
           <a:p>
             <a:pPr algn="ctr"/>
+            <a:endParaRPr/>
           </a:p>
         </p:txBody>
       </p:sp>
@@ -5901,7 +5908,7 @@
         <p:spPr>
           <a:xfrm>
             <a:off x="731520" y="2377440"/>
-            <a:ext cx="10698480" cy="1554480"/>
+            <a:ext cx="10698480" cy="615553"/>
           </a:xfrm>
           <a:prstGeom prst="rect">
             <a:avLst/>
@@ -5914,13 +5921,13 @@
           </a:bodyPr>
           <a:lstStyle/>
           <a:p>
-            <a:pPr algn="l">
+            <a:pPr>
               <a:spcAft>
                 <a:spcPts val="600"/>
               </a:spcAft>
             </a:pPr>
             <a:r>
-              <a:rPr sz="3400" b="1">
+              <a:rPr lang="en-US" sz="3400" b="1" dirty="0">
                 <a:solidFill>
                   <a:srgbClr val="C0392B"/>
                 </a:solidFill>
@@ -5928,6 +5935,21 @@
               </a:rPr>
               <a:t>RAC</a:t>
             </a:r>
+            <a:r>
+              <a:rPr lang="ko-KR" altLang="en-US" sz="3400" b="1" dirty="0">
+                <a:solidFill>
+                  <a:srgbClr val="C0392B"/>
+                </a:solidFill>
+                <a:latin typeface="맑은 고딕"/>
+              </a:rPr>
+              <a:t>백업과 복구</a:t>
+            </a:r>
+            <a:endParaRPr sz="3400" b="1" dirty="0">
+              <a:solidFill>
+                <a:srgbClr val="C0392B"/>
+              </a:solidFill>
+              <a:latin typeface="맑은 고딕"/>
+            </a:endParaRPr>
           </a:p>
         </p:txBody>
       </p:sp>
@@ -6018,7 +6040,7 @@
 </file>
 
 <file path=ppt/slides/slide10.xml><?xml version="1.0" encoding="utf-8"?>
-<p:sld xmlns:a="http://schemas.openxmlformats.org/drawingml/2006/main" xmlns:p="http://schemas.openxmlformats.org/presentationml/2006/main" xmlns:r="http://schemas.openxmlformats.org/officeDocument/2006/relationships">
+<p:sld xmlns:a="http://schemas.openxmlformats.org/drawingml/2006/main" xmlns:r="http://schemas.openxmlformats.org/officeDocument/2006/relationships" xmlns:p="http://schemas.openxmlformats.org/presentationml/2006/main">
   <p:cSld>
     <p:spTree>
       <p:nvGrpSpPr>
@@ -6026,7 +6048,14 @@
         <p:cNvGrpSpPr/>
         <p:nvPr/>
       </p:nvGrpSpPr>
-      <p:grpSpPr/>
+      <p:grpSpPr>
+        <a:xfrm>
+          <a:off x="0" y="0"/>
+          <a:ext cx="0" cy="0"/>
+          <a:chOff x="0" y="0"/>
+          <a:chExt cx="0" cy="0"/>
+        </a:xfrm>
+      </p:grpSpPr>
       <p:sp>
         <p:nvSpPr>
           <p:cNvPr id="2" name="Rectangle 1"/>
@@ -6068,6 +6097,7 @@
           <a:lstStyle/>
           <a:p>
             <a:pPr algn="ctr"/>
+            <a:endParaRPr/>
           </a:p>
         </p:txBody>
       </p:sp>
@@ -6261,7 +6291,7 @@
 </file>
 
 <file path=ppt/slides/slide11.xml><?xml version="1.0" encoding="utf-8"?>
-<p:sld xmlns:a="http://schemas.openxmlformats.org/drawingml/2006/main" xmlns:p="http://schemas.openxmlformats.org/presentationml/2006/main" xmlns:r="http://schemas.openxmlformats.org/officeDocument/2006/relationships">
+<p:sld xmlns:a="http://schemas.openxmlformats.org/drawingml/2006/main" xmlns:r="http://schemas.openxmlformats.org/officeDocument/2006/relationships" xmlns:p="http://schemas.openxmlformats.org/presentationml/2006/main">
   <p:cSld>
     <p:spTree>
       <p:nvGrpSpPr>
@@ -6269,7 +6299,14 @@
         <p:cNvGrpSpPr/>
         <p:nvPr/>
       </p:nvGrpSpPr>
-      <p:grpSpPr/>
+      <p:grpSpPr>
+        <a:xfrm>
+          <a:off x="0" y="0"/>
+          <a:ext cx="0" cy="0"/>
+          <a:chOff x="0" y="0"/>
+          <a:chExt cx="0" cy="0"/>
+        </a:xfrm>
+      </p:grpSpPr>
       <p:sp>
         <p:nvSpPr>
           <p:cNvPr id="2" name="Rectangle 1"/>
@@ -6311,6 +6348,7 @@
           <a:lstStyle/>
           <a:p>
             <a:pPr algn="ctr"/>
+            <a:endParaRPr/>
           </a:p>
         </p:txBody>
       </p:sp>
@@ -6433,6 +6471,7 @@
           <a:lstStyle/>
           <a:p>
             <a:pPr algn="ctr"/>
+            <a:endParaRPr/>
           </a:p>
         </p:txBody>
       </p:sp>
@@ -6500,7 +6539,7 @@
 </file>
 
 <file path=ppt/slides/slide12.xml><?xml version="1.0" encoding="utf-8"?>
-<p:sld xmlns:a="http://schemas.openxmlformats.org/drawingml/2006/main" xmlns:p="http://schemas.openxmlformats.org/presentationml/2006/main" xmlns:r="http://schemas.openxmlformats.org/officeDocument/2006/relationships">
+<p:sld xmlns:a="http://schemas.openxmlformats.org/drawingml/2006/main" xmlns:r="http://schemas.openxmlformats.org/officeDocument/2006/relationships" xmlns:p="http://schemas.openxmlformats.org/presentationml/2006/main">
   <p:cSld>
     <p:spTree>
       <p:nvGrpSpPr>
@@ -6508,7 +6547,14 @@
         <p:cNvGrpSpPr/>
         <p:nvPr/>
       </p:nvGrpSpPr>
-      <p:grpSpPr/>
+      <p:grpSpPr>
+        <a:xfrm>
+          <a:off x="0" y="0"/>
+          <a:ext cx="0" cy="0"/>
+          <a:chOff x="0" y="0"/>
+          <a:chExt cx="0" cy="0"/>
+        </a:xfrm>
+      </p:grpSpPr>
       <p:sp>
         <p:nvSpPr>
           <p:cNvPr id="2" name="Rectangle 1"/>
@@ -6550,6 +6596,7 @@
           <a:lstStyle/>
           <a:p>
             <a:pPr algn="ctr"/>
+            <a:endParaRPr/>
           </a:p>
         </p:txBody>
       </p:sp>
@@ -6743,7 +6790,7 @@
 </file>
 
 <file path=ppt/slides/slide13.xml><?xml version="1.0" encoding="utf-8"?>
-<p:sld xmlns:a="http://schemas.openxmlformats.org/drawingml/2006/main" xmlns:p="http://schemas.openxmlformats.org/presentationml/2006/main" xmlns:r="http://schemas.openxmlformats.org/officeDocument/2006/relationships">
+<p:sld xmlns:a="http://schemas.openxmlformats.org/drawingml/2006/main" xmlns:r="http://schemas.openxmlformats.org/officeDocument/2006/relationships" xmlns:p="http://schemas.openxmlformats.org/presentationml/2006/main">
   <p:cSld>
     <p:spTree>
       <p:nvGrpSpPr>
@@ -6751,7 +6798,14 @@
         <p:cNvGrpSpPr/>
         <p:nvPr/>
       </p:nvGrpSpPr>
-      <p:grpSpPr/>
+      <p:grpSpPr>
+        <a:xfrm>
+          <a:off x="0" y="0"/>
+          <a:ext cx="0" cy="0"/>
+          <a:chOff x="0" y="0"/>
+          <a:chExt cx="0" cy="0"/>
+        </a:xfrm>
+      </p:grpSpPr>
       <p:sp>
         <p:nvSpPr>
           <p:cNvPr id="2" name="Rectangle 1"/>
@@ -6793,6 +6847,7 @@
           <a:lstStyle/>
           <a:p>
             <a:pPr algn="ctr"/>
+            <a:endParaRPr/>
           </a:p>
         </p:txBody>
       </p:sp>
@@ -6986,7 +7041,7 @@
 </file>
 
 <file path=ppt/slides/slide14.xml><?xml version="1.0" encoding="utf-8"?>
-<p:sld xmlns:a="http://schemas.openxmlformats.org/drawingml/2006/main" xmlns:p="http://schemas.openxmlformats.org/presentationml/2006/main" xmlns:r="http://schemas.openxmlformats.org/officeDocument/2006/relationships">
+<p:sld xmlns:a="http://schemas.openxmlformats.org/drawingml/2006/main" xmlns:r="http://schemas.openxmlformats.org/officeDocument/2006/relationships" xmlns:p="http://schemas.openxmlformats.org/presentationml/2006/main">
   <p:cSld>
     <p:spTree>
       <p:nvGrpSpPr>
@@ -6994,7 +7049,14 @@
         <p:cNvGrpSpPr/>
         <p:nvPr/>
       </p:nvGrpSpPr>
-      <p:grpSpPr/>
+      <p:grpSpPr>
+        <a:xfrm>
+          <a:off x="0" y="0"/>
+          <a:ext cx="0" cy="0"/>
+          <a:chOff x="0" y="0"/>
+          <a:chExt cx="0" cy="0"/>
+        </a:xfrm>
+      </p:grpSpPr>
       <p:sp>
         <p:nvSpPr>
           <p:cNvPr id="2" name="Rectangle 1"/>
@@ -7036,6 +7098,7 @@
           <a:lstStyle/>
           <a:p>
             <a:pPr algn="ctr"/>
+            <a:endParaRPr/>
           </a:p>
         </p:txBody>
       </p:sp>
@@ -7229,7 +7292,7 @@
 </file>
 
 <file path=ppt/slides/slide15.xml><?xml version="1.0" encoding="utf-8"?>
-<p:sld xmlns:a="http://schemas.openxmlformats.org/drawingml/2006/main" xmlns:p="http://schemas.openxmlformats.org/presentationml/2006/main" xmlns:r="http://schemas.openxmlformats.org/officeDocument/2006/relationships">
+<p:sld xmlns:a="http://schemas.openxmlformats.org/drawingml/2006/main" xmlns:r="http://schemas.openxmlformats.org/officeDocument/2006/relationships" xmlns:p="http://schemas.openxmlformats.org/presentationml/2006/main">
   <p:cSld>
     <p:spTree>
       <p:nvGrpSpPr>
@@ -7237,7 +7300,14 @@
         <p:cNvGrpSpPr/>
         <p:nvPr/>
       </p:nvGrpSpPr>
-      <p:grpSpPr/>
+      <p:grpSpPr>
+        <a:xfrm>
+          <a:off x="0" y="0"/>
+          <a:ext cx="0" cy="0"/>
+          <a:chOff x="0" y="0"/>
+          <a:chExt cx="0" cy="0"/>
+        </a:xfrm>
+      </p:grpSpPr>
       <p:sp>
         <p:nvSpPr>
           <p:cNvPr id="2" name="Rectangle 1"/>
@@ -7279,6 +7349,7 @@
           <a:lstStyle/>
           <a:p>
             <a:pPr algn="ctr"/>
+            <a:endParaRPr/>
           </a:p>
         </p:txBody>
       </p:sp>
@@ -7472,7 +7543,7 @@
 </file>
 
 <file path=ppt/slides/slide16.xml><?xml version="1.0" encoding="utf-8"?>
-<p:sld xmlns:a="http://schemas.openxmlformats.org/drawingml/2006/main" xmlns:p="http://schemas.openxmlformats.org/presentationml/2006/main" xmlns:r="http://schemas.openxmlformats.org/officeDocument/2006/relationships">
+<p:sld xmlns:a="http://schemas.openxmlformats.org/drawingml/2006/main" xmlns:r="http://schemas.openxmlformats.org/officeDocument/2006/relationships" xmlns:p="http://schemas.openxmlformats.org/presentationml/2006/main">
   <p:cSld>
     <p:spTree>
       <p:nvGrpSpPr>
@@ -7480,7 +7551,14 @@
         <p:cNvGrpSpPr/>
         <p:nvPr/>
       </p:nvGrpSpPr>
-      <p:grpSpPr/>
+      <p:grpSpPr>
+        <a:xfrm>
+          <a:off x="0" y="0"/>
+          <a:ext cx="0" cy="0"/>
+          <a:chOff x="0" y="0"/>
+          <a:chExt cx="0" cy="0"/>
+        </a:xfrm>
+      </p:grpSpPr>
       <p:sp>
         <p:nvSpPr>
           <p:cNvPr id="2" name="Rectangle 1"/>
@@ -7522,6 +7600,7 @@
           <a:lstStyle/>
           <a:p>
             <a:pPr algn="ctr"/>
+            <a:endParaRPr/>
           </a:p>
         </p:txBody>
       </p:sp>
@@ -7715,7 +7794,7 @@
 </file>
 
 <file path=ppt/slides/slide17.xml><?xml version="1.0" encoding="utf-8"?>
-<p:sld xmlns:a="http://schemas.openxmlformats.org/drawingml/2006/main" xmlns:p="http://schemas.openxmlformats.org/presentationml/2006/main" xmlns:r="http://schemas.openxmlformats.org/officeDocument/2006/relationships">
+<p:sld xmlns:a="http://schemas.openxmlformats.org/drawingml/2006/main" xmlns:r="http://schemas.openxmlformats.org/officeDocument/2006/relationships" xmlns:p="http://schemas.openxmlformats.org/presentationml/2006/main">
   <p:cSld>
     <p:spTree>
       <p:nvGrpSpPr>
@@ -7723,7 +7802,14 @@
         <p:cNvGrpSpPr/>
         <p:nvPr/>
       </p:nvGrpSpPr>
-      <p:grpSpPr/>
+      <p:grpSpPr>
+        <a:xfrm>
+          <a:off x="0" y="0"/>
+          <a:ext cx="0" cy="0"/>
+          <a:chOff x="0" y="0"/>
+          <a:chExt cx="0" cy="0"/>
+        </a:xfrm>
+      </p:grpSpPr>
       <p:sp>
         <p:nvSpPr>
           <p:cNvPr id="2" name="Rectangle 1"/>
@@ -7765,6 +7851,7 @@
           <a:lstStyle/>
           <a:p>
             <a:pPr algn="ctr"/>
+            <a:endParaRPr/>
           </a:p>
         </p:txBody>
       </p:sp>
@@ -7887,6 +7974,7 @@
           <a:lstStyle/>
           <a:p>
             <a:pPr algn="ctr"/>
+            <a:endParaRPr/>
           </a:p>
         </p:txBody>
       </p:sp>
@@ -7954,7 +8042,7 @@
 </file>
 
 <file path=ppt/slides/slide18.xml><?xml version="1.0" encoding="utf-8"?>
-<p:sld xmlns:a="http://schemas.openxmlformats.org/drawingml/2006/main" xmlns:p="http://schemas.openxmlformats.org/presentationml/2006/main" xmlns:r="http://schemas.openxmlformats.org/officeDocument/2006/relationships">
+<p:sld xmlns:a="http://schemas.openxmlformats.org/drawingml/2006/main" xmlns:r="http://schemas.openxmlformats.org/officeDocument/2006/relationships" xmlns:p="http://schemas.openxmlformats.org/presentationml/2006/main">
   <p:cSld>
     <p:spTree>
       <p:nvGrpSpPr>
@@ -7962,7 +8050,14 @@
         <p:cNvGrpSpPr/>
         <p:nvPr/>
       </p:nvGrpSpPr>
-      <p:grpSpPr/>
+      <p:grpSpPr>
+        <a:xfrm>
+          <a:off x="0" y="0"/>
+          <a:ext cx="0" cy="0"/>
+          <a:chOff x="0" y="0"/>
+          <a:chExt cx="0" cy="0"/>
+        </a:xfrm>
+      </p:grpSpPr>
       <p:sp>
         <p:nvSpPr>
           <p:cNvPr id="2" name="Rectangle 1"/>
@@ -8004,6 +8099,7 @@
           <a:lstStyle/>
           <a:p>
             <a:pPr algn="ctr"/>
+            <a:endParaRPr/>
           </a:p>
         </p:txBody>
       </p:sp>
@@ -8197,7 +8293,7 @@
 </file>
 
 <file path=ppt/slides/slide19.xml><?xml version="1.0" encoding="utf-8"?>
-<p:sld xmlns:a="http://schemas.openxmlformats.org/drawingml/2006/main" xmlns:p="http://schemas.openxmlformats.org/presentationml/2006/main" xmlns:r="http://schemas.openxmlformats.org/officeDocument/2006/relationships">
+<p:sld xmlns:a="http://schemas.openxmlformats.org/drawingml/2006/main" xmlns:r="http://schemas.openxmlformats.org/officeDocument/2006/relationships" xmlns:p="http://schemas.openxmlformats.org/presentationml/2006/main">
   <p:cSld>
     <p:spTree>
       <p:nvGrpSpPr>
@@ -8205,7 +8301,14 @@
         <p:cNvGrpSpPr/>
         <p:nvPr/>
       </p:nvGrpSpPr>
-      <p:grpSpPr/>
+      <p:grpSpPr>
+        <a:xfrm>
+          <a:off x="0" y="0"/>
+          <a:ext cx="0" cy="0"/>
+          <a:chOff x="0" y="0"/>
+          <a:chExt cx="0" cy="0"/>
+        </a:xfrm>
+      </p:grpSpPr>
       <p:sp>
         <p:nvSpPr>
           <p:cNvPr id="2" name="Rectangle 1"/>
@@ -8247,6 +8350,7 @@
           <a:lstStyle/>
           <a:p>
             <a:pPr algn="ctr"/>
+            <a:endParaRPr/>
           </a:p>
         </p:txBody>
       </p:sp>
@@ -8440,7 +8544,7 @@
 </file>
 
 <file path=ppt/slides/slide2.xml><?xml version="1.0" encoding="utf-8"?>
-<p:sld xmlns:a="http://schemas.openxmlformats.org/drawingml/2006/main" xmlns:p="http://schemas.openxmlformats.org/presentationml/2006/main" xmlns:r="http://schemas.openxmlformats.org/officeDocument/2006/relationships">
+<p:sld xmlns:a="http://schemas.openxmlformats.org/drawingml/2006/main" xmlns:r="http://schemas.openxmlformats.org/officeDocument/2006/relationships" xmlns:p="http://schemas.openxmlformats.org/presentationml/2006/main">
   <p:cSld>
     <p:spTree>
       <p:nvGrpSpPr>
@@ -8448,7 +8552,14 @@
         <p:cNvGrpSpPr/>
         <p:nvPr/>
       </p:nvGrpSpPr>
-      <p:grpSpPr/>
+      <p:grpSpPr>
+        <a:xfrm>
+          <a:off x="0" y="0"/>
+          <a:ext cx="0" cy="0"/>
+          <a:chOff x="0" y="0"/>
+          <a:chExt cx="0" cy="0"/>
+        </a:xfrm>
+      </p:grpSpPr>
       <p:sp>
         <p:nvSpPr>
           <p:cNvPr id="2" name="Rectangle 1"/>
@@ -8490,6 +8601,7 @@
           <a:lstStyle/>
           <a:p>
             <a:pPr algn="ctr"/>
+            <a:endParaRPr/>
           </a:p>
         </p:txBody>
       </p:sp>
@@ -8660,7 +8772,7 @@
 </file>
 
 <file path=ppt/slides/slide20.xml><?xml version="1.0" encoding="utf-8"?>
-<p:sld xmlns:a="http://schemas.openxmlformats.org/drawingml/2006/main" xmlns:p="http://schemas.openxmlformats.org/presentationml/2006/main" xmlns:r="http://schemas.openxmlformats.org/officeDocument/2006/relationships">
+<p:sld xmlns:a="http://schemas.openxmlformats.org/drawingml/2006/main" xmlns:r="http://schemas.openxmlformats.org/officeDocument/2006/relationships" xmlns:p="http://schemas.openxmlformats.org/presentationml/2006/main">
   <p:cSld>
     <p:spTree>
       <p:nvGrpSpPr>
@@ -8668,7 +8780,14 @@
         <p:cNvGrpSpPr/>
         <p:nvPr/>
       </p:nvGrpSpPr>
-      <p:grpSpPr/>
+      <p:grpSpPr>
+        <a:xfrm>
+          <a:off x="0" y="0"/>
+          <a:ext cx="0" cy="0"/>
+          <a:chOff x="0" y="0"/>
+          <a:chExt cx="0" cy="0"/>
+        </a:xfrm>
+      </p:grpSpPr>
       <p:sp>
         <p:nvSpPr>
           <p:cNvPr id="2" name="Rectangle 1"/>
@@ -8710,6 +8829,7 @@
           <a:lstStyle/>
           <a:p>
             <a:pPr algn="ctr"/>
+            <a:endParaRPr/>
           </a:p>
         </p:txBody>
       </p:sp>
@@ -8903,7 +9023,7 @@
 </file>
 
 <file path=ppt/slides/slide21.xml><?xml version="1.0" encoding="utf-8"?>
-<p:sld xmlns:a="http://schemas.openxmlformats.org/drawingml/2006/main" xmlns:p="http://schemas.openxmlformats.org/presentationml/2006/main" xmlns:r="http://schemas.openxmlformats.org/officeDocument/2006/relationships">
+<p:sld xmlns:a="http://schemas.openxmlformats.org/drawingml/2006/main" xmlns:r="http://schemas.openxmlformats.org/officeDocument/2006/relationships" xmlns:p="http://schemas.openxmlformats.org/presentationml/2006/main">
   <p:cSld>
     <p:spTree>
       <p:nvGrpSpPr>
@@ -8911,7 +9031,14 @@
         <p:cNvGrpSpPr/>
         <p:nvPr/>
       </p:nvGrpSpPr>
-      <p:grpSpPr/>
+      <p:grpSpPr>
+        <a:xfrm>
+          <a:off x="0" y="0"/>
+          <a:ext cx="0" cy="0"/>
+          <a:chOff x="0" y="0"/>
+          <a:chExt cx="0" cy="0"/>
+        </a:xfrm>
+      </p:grpSpPr>
       <p:sp>
         <p:nvSpPr>
           <p:cNvPr id="2" name="Rectangle 1"/>
@@ -8953,6 +9080,7 @@
           <a:lstStyle/>
           <a:p>
             <a:pPr algn="ctr"/>
+            <a:endParaRPr/>
           </a:p>
         </p:txBody>
       </p:sp>
@@ -9075,6 +9203,7 @@
           <a:lstStyle/>
           <a:p>
             <a:pPr algn="ctr"/>
+            <a:endParaRPr/>
           </a:p>
         </p:txBody>
       </p:sp>
@@ -9099,7 +9228,9 @@
             <a:spAutoFit/>
           </a:bodyPr>
           <a:lstStyle/>
-          <a:p/>
+          <a:p>
+            <a:endParaRPr/>
+          </a:p>
         </p:txBody>
       </p:sp>
     </p:spTree>
@@ -9111,7 +9242,7 @@
 </file>
 
 <file path=ppt/slides/slide22.xml><?xml version="1.0" encoding="utf-8"?>
-<p:sld xmlns:a="http://schemas.openxmlformats.org/drawingml/2006/main" xmlns:p="http://schemas.openxmlformats.org/presentationml/2006/main" xmlns:r="http://schemas.openxmlformats.org/officeDocument/2006/relationships">
+<p:sld xmlns:a="http://schemas.openxmlformats.org/drawingml/2006/main" xmlns:r="http://schemas.openxmlformats.org/officeDocument/2006/relationships" xmlns:p="http://schemas.openxmlformats.org/presentationml/2006/main">
   <p:cSld>
     <p:spTree>
       <p:nvGrpSpPr>
@@ -9119,7 +9250,14 @@
         <p:cNvGrpSpPr/>
         <p:nvPr/>
       </p:nvGrpSpPr>
-      <p:grpSpPr/>
+      <p:grpSpPr>
+        <a:xfrm>
+          <a:off x="0" y="0"/>
+          <a:ext cx="0" cy="0"/>
+          <a:chOff x="0" y="0"/>
+          <a:chExt cx="0" cy="0"/>
+        </a:xfrm>
+      </p:grpSpPr>
       <p:sp>
         <p:nvSpPr>
           <p:cNvPr id="2" name="Rectangle 1"/>
@@ -9161,6 +9299,7 @@
           <a:lstStyle/>
           <a:p>
             <a:pPr algn="ctr"/>
+            <a:endParaRPr/>
           </a:p>
         </p:txBody>
       </p:sp>
@@ -9354,7 +9493,7 @@
 </file>
 
 <file path=ppt/slides/slide23.xml><?xml version="1.0" encoding="utf-8"?>
-<p:sld xmlns:a="http://schemas.openxmlformats.org/drawingml/2006/main" xmlns:p="http://schemas.openxmlformats.org/presentationml/2006/main" xmlns:r="http://schemas.openxmlformats.org/officeDocument/2006/relationships">
+<p:sld xmlns:a="http://schemas.openxmlformats.org/drawingml/2006/main" xmlns:r="http://schemas.openxmlformats.org/officeDocument/2006/relationships" xmlns:p="http://schemas.openxmlformats.org/presentationml/2006/main">
   <p:cSld>
     <p:spTree>
       <p:nvGrpSpPr>
@@ -9362,7 +9501,14 @@
         <p:cNvGrpSpPr/>
         <p:nvPr/>
       </p:nvGrpSpPr>
-      <p:grpSpPr/>
+      <p:grpSpPr>
+        <a:xfrm>
+          <a:off x="0" y="0"/>
+          <a:ext cx="0" cy="0"/>
+          <a:chOff x="0" y="0"/>
+          <a:chExt cx="0" cy="0"/>
+        </a:xfrm>
+      </p:grpSpPr>
       <p:sp>
         <p:nvSpPr>
           <p:cNvPr id="2" name="Rectangle 1"/>
@@ -9404,6 +9550,7 @@
           <a:lstStyle/>
           <a:p>
             <a:pPr algn="ctr"/>
+            <a:endParaRPr/>
           </a:p>
         </p:txBody>
       </p:sp>
@@ -9597,7 +9744,7 @@
 </file>
 
 <file path=ppt/slides/slide24.xml><?xml version="1.0" encoding="utf-8"?>
-<p:sld xmlns:a="http://schemas.openxmlformats.org/drawingml/2006/main" xmlns:p="http://schemas.openxmlformats.org/presentationml/2006/main" xmlns:r="http://schemas.openxmlformats.org/officeDocument/2006/relationships">
+<p:sld xmlns:a="http://schemas.openxmlformats.org/drawingml/2006/main" xmlns:r="http://schemas.openxmlformats.org/officeDocument/2006/relationships" xmlns:p="http://schemas.openxmlformats.org/presentationml/2006/main">
   <p:cSld>
     <p:spTree>
       <p:nvGrpSpPr>
@@ -9605,7 +9752,14 @@
         <p:cNvGrpSpPr/>
         <p:nvPr/>
       </p:nvGrpSpPr>
-      <p:grpSpPr/>
+      <p:grpSpPr>
+        <a:xfrm>
+          <a:off x="0" y="0"/>
+          <a:ext cx="0" cy="0"/>
+          <a:chOff x="0" y="0"/>
+          <a:chExt cx="0" cy="0"/>
+        </a:xfrm>
+      </p:grpSpPr>
       <p:sp>
         <p:nvSpPr>
           <p:cNvPr id="2" name="Rectangle 1"/>
@@ -9647,6 +9801,7 @@
           <a:lstStyle/>
           <a:p>
             <a:pPr algn="ctr"/>
+            <a:endParaRPr/>
           </a:p>
         </p:txBody>
       </p:sp>
@@ -9769,6 +9924,7 @@
           <a:lstStyle/>
           <a:p>
             <a:pPr algn="ctr"/>
+            <a:endParaRPr/>
           </a:p>
         </p:txBody>
       </p:sp>
@@ -9820,7 +9976,7 @@
 </file>
 
 <file path=ppt/slides/slide25.xml><?xml version="1.0" encoding="utf-8"?>
-<p:sld xmlns:a="http://schemas.openxmlformats.org/drawingml/2006/main" xmlns:p="http://schemas.openxmlformats.org/presentationml/2006/main" xmlns:r="http://schemas.openxmlformats.org/officeDocument/2006/relationships">
+<p:sld xmlns:a="http://schemas.openxmlformats.org/drawingml/2006/main" xmlns:r="http://schemas.openxmlformats.org/officeDocument/2006/relationships" xmlns:p="http://schemas.openxmlformats.org/presentationml/2006/main">
   <p:cSld>
     <p:spTree>
       <p:nvGrpSpPr>
@@ -9828,7 +9984,14 @@
         <p:cNvGrpSpPr/>
         <p:nvPr/>
       </p:nvGrpSpPr>
-      <p:grpSpPr/>
+      <p:grpSpPr>
+        <a:xfrm>
+          <a:off x="0" y="0"/>
+          <a:ext cx="0" cy="0"/>
+          <a:chOff x="0" y="0"/>
+          <a:chExt cx="0" cy="0"/>
+        </a:xfrm>
+      </p:grpSpPr>
       <p:sp>
         <p:nvSpPr>
           <p:cNvPr id="2" name="Rectangle 1"/>
@@ -9870,6 +10033,7 @@
           <a:lstStyle/>
           <a:p>
             <a:pPr algn="ctr"/>
+            <a:endParaRPr/>
           </a:p>
         </p:txBody>
       </p:sp>
@@ -10063,7 +10227,7 @@
 </file>
 
 <file path=ppt/slides/slide26.xml><?xml version="1.0" encoding="utf-8"?>
-<p:sld xmlns:a="http://schemas.openxmlformats.org/drawingml/2006/main" xmlns:p="http://schemas.openxmlformats.org/presentationml/2006/main" xmlns:r="http://schemas.openxmlformats.org/officeDocument/2006/relationships">
+<p:sld xmlns:a="http://schemas.openxmlformats.org/drawingml/2006/main" xmlns:r="http://schemas.openxmlformats.org/officeDocument/2006/relationships" xmlns:p="http://schemas.openxmlformats.org/presentationml/2006/main">
   <p:cSld>
     <p:spTree>
       <p:nvGrpSpPr>
@@ -10071,7 +10235,14 @@
         <p:cNvGrpSpPr/>
         <p:nvPr/>
       </p:nvGrpSpPr>
-      <p:grpSpPr/>
+      <p:grpSpPr>
+        <a:xfrm>
+          <a:off x="0" y="0"/>
+          <a:ext cx="0" cy="0"/>
+          <a:chOff x="0" y="0"/>
+          <a:chExt cx="0" cy="0"/>
+        </a:xfrm>
+      </p:grpSpPr>
       <p:sp>
         <p:nvSpPr>
           <p:cNvPr id="2" name="Rectangle 1"/>
@@ -10113,6 +10284,7 @@
           <a:lstStyle/>
           <a:p>
             <a:pPr algn="ctr"/>
+            <a:endParaRPr/>
           </a:p>
         </p:txBody>
       </p:sp>
@@ -10306,7 +10478,7 @@
 </file>
 
 <file path=ppt/slides/slide27.xml><?xml version="1.0" encoding="utf-8"?>
-<p:sld xmlns:a="http://schemas.openxmlformats.org/drawingml/2006/main" xmlns:p="http://schemas.openxmlformats.org/presentationml/2006/main" xmlns:r="http://schemas.openxmlformats.org/officeDocument/2006/relationships">
+<p:sld xmlns:a="http://schemas.openxmlformats.org/drawingml/2006/main" xmlns:r="http://schemas.openxmlformats.org/officeDocument/2006/relationships" xmlns:p="http://schemas.openxmlformats.org/presentationml/2006/main">
   <p:cSld>
     <p:spTree>
       <p:nvGrpSpPr>
@@ -10314,7 +10486,14 @@
         <p:cNvGrpSpPr/>
         <p:nvPr/>
       </p:nvGrpSpPr>
-      <p:grpSpPr/>
+      <p:grpSpPr>
+        <a:xfrm>
+          <a:off x="0" y="0"/>
+          <a:ext cx="0" cy="0"/>
+          <a:chOff x="0" y="0"/>
+          <a:chExt cx="0" cy="0"/>
+        </a:xfrm>
+      </p:grpSpPr>
       <p:sp>
         <p:nvSpPr>
           <p:cNvPr id="2" name="Rectangle 1"/>
@@ -10356,6 +10535,7 @@
           <a:lstStyle/>
           <a:p>
             <a:pPr algn="ctr"/>
+            <a:endParaRPr/>
           </a:p>
         </p:txBody>
       </p:sp>
@@ -10549,7 +10729,7 @@
 </file>
 
 <file path=ppt/slides/slide28.xml><?xml version="1.0" encoding="utf-8"?>
-<p:sld xmlns:a="http://schemas.openxmlformats.org/drawingml/2006/main" xmlns:p="http://schemas.openxmlformats.org/presentationml/2006/main" xmlns:r="http://schemas.openxmlformats.org/officeDocument/2006/relationships">
+<p:sld xmlns:a="http://schemas.openxmlformats.org/drawingml/2006/main" xmlns:r="http://schemas.openxmlformats.org/officeDocument/2006/relationships" xmlns:p="http://schemas.openxmlformats.org/presentationml/2006/main">
   <p:cSld>
     <p:spTree>
       <p:nvGrpSpPr>
@@ -10557,7 +10737,14 @@
         <p:cNvGrpSpPr/>
         <p:nvPr/>
       </p:nvGrpSpPr>
-      <p:grpSpPr/>
+      <p:grpSpPr>
+        <a:xfrm>
+          <a:off x="0" y="0"/>
+          <a:ext cx="0" cy="0"/>
+          <a:chOff x="0" y="0"/>
+          <a:chExt cx="0" cy="0"/>
+        </a:xfrm>
+      </p:grpSpPr>
       <p:sp>
         <p:nvSpPr>
           <p:cNvPr id="2" name="Rectangle 1"/>
@@ -10599,6 +10786,7 @@
           <a:lstStyle/>
           <a:p>
             <a:pPr algn="ctr"/>
+            <a:endParaRPr/>
           </a:p>
         </p:txBody>
       </p:sp>
@@ -10792,7 +10980,7 @@
 </file>
 
 <file path=ppt/slides/slide29.xml><?xml version="1.0" encoding="utf-8"?>
-<p:sld xmlns:a="http://schemas.openxmlformats.org/drawingml/2006/main" xmlns:p="http://schemas.openxmlformats.org/presentationml/2006/main" xmlns:r="http://schemas.openxmlformats.org/officeDocument/2006/relationships">
+<p:sld xmlns:a="http://schemas.openxmlformats.org/drawingml/2006/main" xmlns:r="http://schemas.openxmlformats.org/officeDocument/2006/relationships" xmlns:p="http://schemas.openxmlformats.org/presentationml/2006/main">
   <p:cSld>
     <p:spTree>
       <p:nvGrpSpPr>
@@ -10800,7 +10988,14 @@
         <p:cNvGrpSpPr/>
         <p:nvPr/>
       </p:nvGrpSpPr>
-      <p:grpSpPr/>
+      <p:grpSpPr>
+        <a:xfrm>
+          <a:off x="0" y="0"/>
+          <a:ext cx="0" cy="0"/>
+          <a:chOff x="0" y="0"/>
+          <a:chExt cx="0" cy="0"/>
+        </a:xfrm>
+      </p:grpSpPr>
       <p:sp>
         <p:nvSpPr>
           <p:cNvPr id="2" name="Rectangle 1"/>
@@ -10842,6 +11037,7 @@
           <a:lstStyle/>
           <a:p>
             <a:pPr algn="ctr"/>
+            <a:endParaRPr/>
           </a:p>
         </p:txBody>
       </p:sp>
@@ -11035,7 +11231,7 @@
 </file>
 
 <file path=ppt/slides/slide3.xml><?xml version="1.0" encoding="utf-8"?>
-<p:sld xmlns:a="http://schemas.openxmlformats.org/drawingml/2006/main" xmlns:p="http://schemas.openxmlformats.org/presentationml/2006/main" xmlns:r="http://schemas.openxmlformats.org/officeDocument/2006/relationships">
+<p:sld xmlns:a="http://schemas.openxmlformats.org/drawingml/2006/main" xmlns:r="http://schemas.openxmlformats.org/officeDocument/2006/relationships" xmlns:p="http://schemas.openxmlformats.org/presentationml/2006/main">
   <p:cSld>
     <p:spTree>
       <p:nvGrpSpPr>
@@ -11043,7 +11239,14 @@
         <p:cNvGrpSpPr/>
         <p:nvPr/>
       </p:nvGrpSpPr>
-      <p:grpSpPr/>
+      <p:grpSpPr>
+        <a:xfrm>
+          <a:off x="0" y="0"/>
+          <a:ext cx="0" cy="0"/>
+          <a:chOff x="0" y="0"/>
+          <a:chExt cx="0" cy="0"/>
+        </a:xfrm>
+      </p:grpSpPr>
       <p:sp>
         <p:nvSpPr>
           <p:cNvPr id="2" name="Rectangle 1"/>
@@ -11085,6 +11288,7 @@
           <a:lstStyle/>
           <a:p>
             <a:pPr algn="ctr"/>
+            <a:endParaRPr/>
           </a:p>
         </p:txBody>
       </p:sp>
@@ -11271,7 +11475,7 @@
 </file>
 
 <file path=ppt/slides/slide30.xml><?xml version="1.0" encoding="utf-8"?>
-<p:sld xmlns:a="http://schemas.openxmlformats.org/drawingml/2006/main" xmlns:p="http://schemas.openxmlformats.org/presentationml/2006/main" xmlns:r="http://schemas.openxmlformats.org/officeDocument/2006/relationships">
+<p:sld xmlns:a="http://schemas.openxmlformats.org/drawingml/2006/main" xmlns:r="http://schemas.openxmlformats.org/officeDocument/2006/relationships" xmlns:p="http://schemas.openxmlformats.org/presentationml/2006/main">
   <p:cSld>
     <p:spTree>
       <p:nvGrpSpPr>
@@ -11279,7 +11483,14 @@
         <p:cNvGrpSpPr/>
         <p:nvPr/>
       </p:nvGrpSpPr>
-      <p:grpSpPr/>
+      <p:grpSpPr>
+        <a:xfrm>
+          <a:off x="0" y="0"/>
+          <a:ext cx="0" cy="0"/>
+          <a:chOff x="0" y="0"/>
+          <a:chExt cx="0" cy="0"/>
+        </a:xfrm>
+      </p:grpSpPr>
       <p:sp>
         <p:nvSpPr>
           <p:cNvPr id="2" name="Rectangle 1"/>
@@ -11321,6 +11532,7 @@
           <a:lstStyle/>
           <a:p>
             <a:pPr algn="ctr"/>
+            <a:endParaRPr/>
           </a:p>
         </p:txBody>
       </p:sp>
@@ -11443,6 +11655,7 @@
           <a:lstStyle/>
           <a:p>
             <a:pPr algn="ctr"/>
+            <a:endParaRPr/>
           </a:p>
         </p:txBody>
       </p:sp>
@@ -11467,7 +11680,9 @@
             <a:spAutoFit/>
           </a:bodyPr>
           <a:lstStyle/>
-          <a:p/>
+          <a:p>
+            <a:endParaRPr/>
+          </a:p>
         </p:txBody>
       </p:sp>
     </p:spTree>
@@ -11479,7 +11694,7 @@
 </file>
 
 <file path=ppt/slides/slide31.xml><?xml version="1.0" encoding="utf-8"?>
-<p:sld xmlns:a="http://schemas.openxmlformats.org/drawingml/2006/main" xmlns:p="http://schemas.openxmlformats.org/presentationml/2006/main" xmlns:r="http://schemas.openxmlformats.org/officeDocument/2006/relationships">
+<p:sld xmlns:a="http://schemas.openxmlformats.org/drawingml/2006/main" xmlns:r="http://schemas.openxmlformats.org/officeDocument/2006/relationships" xmlns:p="http://schemas.openxmlformats.org/presentationml/2006/main">
   <p:cSld>
     <p:spTree>
       <p:nvGrpSpPr>
@@ -11487,7 +11702,14 @@
         <p:cNvGrpSpPr/>
         <p:nvPr/>
       </p:nvGrpSpPr>
-      <p:grpSpPr/>
+      <p:grpSpPr>
+        <a:xfrm>
+          <a:off x="0" y="0"/>
+          <a:ext cx="0" cy="0"/>
+          <a:chOff x="0" y="0"/>
+          <a:chExt cx="0" cy="0"/>
+        </a:xfrm>
+      </p:grpSpPr>
       <p:sp>
         <p:nvSpPr>
           <p:cNvPr id="2" name="Rectangle 1"/>
@@ -11529,6 +11751,7 @@
           <a:lstStyle/>
           <a:p>
             <a:pPr algn="ctr"/>
+            <a:endParaRPr/>
           </a:p>
         </p:txBody>
       </p:sp>
@@ -11722,7 +11945,7 @@
 </file>
 
 <file path=ppt/slides/slide32.xml><?xml version="1.0" encoding="utf-8"?>
-<p:sld xmlns:a="http://schemas.openxmlformats.org/drawingml/2006/main" xmlns:p="http://schemas.openxmlformats.org/presentationml/2006/main" xmlns:r="http://schemas.openxmlformats.org/officeDocument/2006/relationships">
+<p:sld xmlns:a="http://schemas.openxmlformats.org/drawingml/2006/main" xmlns:r="http://schemas.openxmlformats.org/officeDocument/2006/relationships" xmlns:p="http://schemas.openxmlformats.org/presentationml/2006/main">
   <p:cSld>
     <p:spTree>
       <p:nvGrpSpPr>
@@ -11730,7 +11953,14 @@
         <p:cNvGrpSpPr/>
         <p:nvPr/>
       </p:nvGrpSpPr>
-      <p:grpSpPr/>
+      <p:grpSpPr>
+        <a:xfrm>
+          <a:off x="0" y="0"/>
+          <a:ext cx="0" cy="0"/>
+          <a:chOff x="0" y="0"/>
+          <a:chExt cx="0" cy="0"/>
+        </a:xfrm>
+      </p:grpSpPr>
       <p:sp>
         <p:nvSpPr>
           <p:cNvPr id="2" name="Rectangle 1"/>
@@ -11772,6 +12002,7 @@
           <a:lstStyle/>
           <a:p>
             <a:pPr algn="ctr"/>
+            <a:endParaRPr/>
           </a:p>
         </p:txBody>
       </p:sp>
@@ -11965,7 +12196,7 @@
 </file>
 
 <file path=ppt/slides/slide33.xml><?xml version="1.0" encoding="utf-8"?>
-<p:sld xmlns:a="http://schemas.openxmlformats.org/drawingml/2006/main" xmlns:p="http://schemas.openxmlformats.org/presentationml/2006/main" xmlns:r="http://schemas.openxmlformats.org/officeDocument/2006/relationships">
+<p:sld xmlns:a="http://schemas.openxmlformats.org/drawingml/2006/main" xmlns:r="http://schemas.openxmlformats.org/officeDocument/2006/relationships" xmlns:p="http://schemas.openxmlformats.org/presentationml/2006/main">
   <p:cSld>
     <p:spTree>
       <p:nvGrpSpPr>
@@ -11973,7 +12204,14 @@
         <p:cNvGrpSpPr/>
         <p:nvPr/>
       </p:nvGrpSpPr>
-      <p:grpSpPr/>
+      <p:grpSpPr>
+        <a:xfrm>
+          <a:off x="0" y="0"/>
+          <a:ext cx="0" cy="0"/>
+          <a:chOff x="0" y="0"/>
+          <a:chExt cx="0" cy="0"/>
+        </a:xfrm>
+      </p:grpSpPr>
       <p:sp>
         <p:nvSpPr>
           <p:cNvPr id="2" name="Rectangle 1"/>
@@ -12015,6 +12253,7 @@
           <a:lstStyle/>
           <a:p>
             <a:pPr algn="ctr"/>
+            <a:endParaRPr/>
           </a:p>
         </p:txBody>
       </p:sp>
@@ -12208,7 +12447,7 @@
 </file>
 
 <file path=ppt/slides/slide34.xml><?xml version="1.0" encoding="utf-8"?>
-<p:sld xmlns:a="http://schemas.openxmlformats.org/drawingml/2006/main" xmlns:p="http://schemas.openxmlformats.org/presentationml/2006/main" xmlns:r="http://schemas.openxmlformats.org/officeDocument/2006/relationships">
+<p:sld xmlns:a="http://schemas.openxmlformats.org/drawingml/2006/main" xmlns:r="http://schemas.openxmlformats.org/officeDocument/2006/relationships" xmlns:p="http://schemas.openxmlformats.org/presentationml/2006/main">
   <p:cSld>
     <p:spTree>
       <p:nvGrpSpPr>
@@ -12216,7 +12455,14 @@
         <p:cNvGrpSpPr/>
         <p:nvPr/>
       </p:nvGrpSpPr>
-      <p:grpSpPr/>
+      <p:grpSpPr>
+        <a:xfrm>
+          <a:off x="0" y="0"/>
+          <a:ext cx="0" cy="0"/>
+          <a:chOff x="0" y="0"/>
+          <a:chExt cx="0" cy="0"/>
+        </a:xfrm>
+      </p:grpSpPr>
       <p:sp>
         <p:nvSpPr>
           <p:cNvPr id="2" name="Rectangle 1"/>
@@ -12258,6 +12504,7 @@
           <a:lstStyle/>
           <a:p>
             <a:pPr algn="ctr"/>
+            <a:endParaRPr/>
           </a:p>
         </p:txBody>
       </p:sp>
@@ -12380,6 +12627,7 @@
           <a:lstStyle/>
           <a:p>
             <a:pPr algn="ctr"/>
+            <a:endParaRPr/>
           </a:p>
         </p:txBody>
       </p:sp>
@@ -12404,7 +12652,9 @@
             <a:spAutoFit/>
           </a:bodyPr>
           <a:lstStyle/>
-          <a:p/>
+          <a:p>
+            <a:endParaRPr/>
+          </a:p>
         </p:txBody>
       </p:sp>
     </p:spTree>
@@ -12416,7 +12666,7 @@
 </file>
 
 <file path=ppt/slides/slide35.xml><?xml version="1.0" encoding="utf-8"?>
-<p:sld xmlns:a="http://schemas.openxmlformats.org/drawingml/2006/main" xmlns:p="http://schemas.openxmlformats.org/presentationml/2006/main" xmlns:r="http://schemas.openxmlformats.org/officeDocument/2006/relationships">
+<p:sld xmlns:a="http://schemas.openxmlformats.org/drawingml/2006/main" xmlns:r="http://schemas.openxmlformats.org/officeDocument/2006/relationships" xmlns:p="http://schemas.openxmlformats.org/presentationml/2006/main">
   <p:cSld>
     <p:spTree>
       <p:nvGrpSpPr>
@@ -12424,7 +12674,14 @@
         <p:cNvGrpSpPr/>
         <p:nvPr/>
       </p:nvGrpSpPr>
-      <p:grpSpPr/>
+      <p:grpSpPr>
+        <a:xfrm>
+          <a:off x="0" y="0"/>
+          <a:ext cx="0" cy="0"/>
+          <a:chOff x="0" y="0"/>
+          <a:chExt cx="0" cy="0"/>
+        </a:xfrm>
+      </p:grpSpPr>
       <p:sp>
         <p:nvSpPr>
           <p:cNvPr id="2" name="Rectangle 1"/>
@@ -12466,6 +12723,7 @@
           <a:lstStyle/>
           <a:p>
             <a:pPr algn="ctr"/>
+            <a:endParaRPr/>
           </a:p>
         </p:txBody>
       </p:sp>
@@ -12659,7 +12917,7 @@
 </file>
 
 <file path=ppt/slides/slide36.xml><?xml version="1.0" encoding="utf-8"?>
-<p:sld xmlns:a="http://schemas.openxmlformats.org/drawingml/2006/main" xmlns:p="http://schemas.openxmlformats.org/presentationml/2006/main" xmlns:r="http://schemas.openxmlformats.org/officeDocument/2006/relationships">
+<p:sld xmlns:a="http://schemas.openxmlformats.org/drawingml/2006/main" xmlns:r="http://schemas.openxmlformats.org/officeDocument/2006/relationships" xmlns:p="http://schemas.openxmlformats.org/presentationml/2006/main">
   <p:cSld>
     <p:spTree>
       <p:nvGrpSpPr>
@@ -12667,7 +12925,14 @@
         <p:cNvGrpSpPr/>
         <p:nvPr/>
       </p:nvGrpSpPr>
-      <p:grpSpPr/>
+      <p:grpSpPr>
+        <a:xfrm>
+          <a:off x="0" y="0"/>
+          <a:ext cx="0" cy="0"/>
+          <a:chOff x="0" y="0"/>
+          <a:chExt cx="0" cy="0"/>
+        </a:xfrm>
+      </p:grpSpPr>
       <p:sp>
         <p:nvSpPr>
           <p:cNvPr id="2" name="Rectangle 1"/>
@@ -12709,6 +12974,7 @@
           <a:lstStyle/>
           <a:p>
             <a:pPr algn="ctr"/>
+            <a:endParaRPr/>
           </a:p>
         </p:txBody>
       </p:sp>
@@ -12902,7 +13168,7 @@
 </file>
 
 <file path=ppt/slides/slide37.xml><?xml version="1.0" encoding="utf-8"?>
-<p:sld xmlns:a="http://schemas.openxmlformats.org/drawingml/2006/main" xmlns:p="http://schemas.openxmlformats.org/presentationml/2006/main" xmlns:r="http://schemas.openxmlformats.org/officeDocument/2006/relationships">
+<p:sld xmlns:a="http://schemas.openxmlformats.org/drawingml/2006/main" xmlns:r="http://schemas.openxmlformats.org/officeDocument/2006/relationships" xmlns:p="http://schemas.openxmlformats.org/presentationml/2006/main">
   <p:cSld>
     <p:spTree>
       <p:nvGrpSpPr>
@@ -12910,7 +13176,14 @@
         <p:cNvGrpSpPr/>
         <p:nvPr/>
       </p:nvGrpSpPr>
-      <p:grpSpPr/>
+      <p:grpSpPr>
+        <a:xfrm>
+          <a:off x="0" y="0"/>
+          <a:ext cx="0" cy="0"/>
+          <a:chOff x="0" y="0"/>
+          <a:chExt cx="0" cy="0"/>
+        </a:xfrm>
+      </p:grpSpPr>
       <p:sp>
         <p:nvSpPr>
           <p:cNvPr id="2" name="Rectangle 1"/>
@@ -12952,6 +13225,7 @@
           <a:lstStyle/>
           <a:p>
             <a:pPr algn="ctr"/>
+            <a:endParaRPr/>
           </a:p>
         </p:txBody>
       </p:sp>
@@ -13145,7 +13419,7 @@
 </file>
 
 <file path=ppt/slides/slide38.xml><?xml version="1.0" encoding="utf-8"?>
-<p:sld xmlns:a="http://schemas.openxmlformats.org/drawingml/2006/main" xmlns:p="http://schemas.openxmlformats.org/presentationml/2006/main" xmlns:r="http://schemas.openxmlformats.org/officeDocument/2006/relationships">
+<p:sld xmlns:a="http://schemas.openxmlformats.org/drawingml/2006/main" xmlns:r="http://schemas.openxmlformats.org/officeDocument/2006/relationships" xmlns:p="http://schemas.openxmlformats.org/presentationml/2006/main">
   <p:cSld>
     <p:spTree>
       <p:nvGrpSpPr>
@@ -13153,7 +13427,14 @@
         <p:cNvGrpSpPr/>
         <p:nvPr/>
       </p:nvGrpSpPr>
-      <p:grpSpPr/>
+      <p:grpSpPr>
+        <a:xfrm>
+          <a:off x="0" y="0"/>
+          <a:ext cx="0" cy="0"/>
+          <a:chOff x="0" y="0"/>
+          <a:chExt cx="0" cy="0"/>
+        </a:xfrm>
+      </p:grpSpPr>
       <p:sp>
         <p:nvSpPr>
           <p:cNvPr id="2" name="Rectangle 1"/>
@@ -13195,6 +13476,7 @@
           <a:lstStyle/>
           <a:p>
             <a:pPr algn="ctr"/>
+            <a:endParaRPr/>
           </a:p>
         </p:txBody>
       </p:sp>
@@ -13388,7 +13670,7 @@
 </file>
 
 <file path=ppt/slides/slide39.xml><?xml version="1.0" encoding="utf-8"?>
-<p:sld xmlns:a="http://schemas.openxmlformats.org/drawingml/2006/main" xmlns:p="http://schemas.openxmlformats.org/presentationml/2006/main" xmlns:r="http://schemas.openxmlformats.org/officeDocument/2006/relationships">
+<p:sld xmlns:a="http://schemas.openxmlformats.org/drawingml/2006/main" xmlns:r="http://schemas.openxmlformats.org/officeDocument/2006/relationships" xmlns:p="http://schemas.openxmlformats.org/presentationml/2006/main">
   <p:cSld>
     <p:spTree>
       <p:nvGrpSpPr>
@@ -13396,7 +13678,14 @@
         <p:cNvGrpSpPr/>
         <p:nvPr/>
       </p:nvGrpSpPr>
-      <p:grpSpPr/>
+      <p:grpSpPr>
+        <a:xfrm>
+          <a:off x="0" y="0"/>
+          <a:ext cx="0" cy="0"/>
+          <a:chOff x="0" y="0"/>
+          <a:chExt cx="0" cy="0"/>
+        </a:xfrm>
+      </p:grpSpPr>
       <p:sp>
         <p:nvSpPr>
           <p:cNvPr id="2" name="Rectangle 1"/>
@@ -13438,6 +13727,7 @@
           <a:lstStyle/>
           <a:p>
             <a:pPr algn="ctr"/>
+            <a:endParaRPr/>
           </a:p>
         </p:txBody>
       </p:sp>
@@ -13631,7 +13921,7 @@
 </file>
 
 <file path=ppt/slides/slide4.xml><?xml version="1.0" encoding="utf-8"?>
-<p:sld xmlns:a="http://schemas.openxmlformats.org/drawingml/2006/main" xmlns:p="http://schemas.openxmlformats.org/presentationml/2006/main" xmlns:r="http://schemas.openxmlformats.org/officeDocument/2006/relationships">
+<p:sld xmlns:a="http://schemas.openxmlformats.org/drawingml/2006/main" xmlns:r="http://schemas.openxmlformats.org/officeDocument/2006/relationships" xmlns:p="http://schemas.openxmlformats.org/presentationml/2006/main">
   <p:cSld>
     <p:spTree>
       <p:nvGrpSpPr>
@@ -13639,7 +13929,14 @@
         <p:cNvGrpSpPr/>
         <p:nvPr/>
       </p:nvGrpSpPr>
-      <p:grpSpPr/>
+      <p:grpSpPr>
+        <a:xfrm>
+          <a:off x="0" y="0"/>
+          <a:ext cx="0" cy="0"/>
+          <a:chOff x="0" y="0"/>
+          <a:chExt cx="0" cy="0"/>
+        </a:xfrm>
+      </p:grpSpPr>
       <p:sp>
         <p:nvSpPr>
           <p:cNvPr id="2" name="Rectangle 1"/>
@@ -13681,6 +13978,7 @@
           <a:lstStyle/>
           <a:p>
             <a:pPr algn="ctr"/>
+            <a:endParaRPr/>
           </a:p>
         </p:txBody>
       </p:sp>
@@ -13874,7 +14172,7 @@
 </file>
 
 <file path=ppt/slides/slide40.xml><?xml version="1.0" encoding="utf-8"?>
-<p:sld xmlns:a="http://schemas.openxmlformats.org/drawingml/2006/main" xmlns:p="http://schemas.openxmlformats.org/presentationml/2006/main" xmlns:r="http://schemas.openxmlformats.org/officeDocument/2006/relationships">
+<p:sld xmlns:a="http://schemas.openxmlformats.org/drawingml/2006/main" xmlns:r="http://schemas.openxmlformats.org/officeDocument/2006/relationships" xmlns:p="http://schemas.openxmlformats.org/presentationml/2006/main">
   <p:cSld>
     <p:spTree>
       <p:nvGrpSpPr>
@@ -13882,7 +14180,14 @@
         <p:cNvGrpSpPr/>
         <p:nvPr/>
       </p:nvGrpSpPr>
-      <p:grpSpPr/>
+      <p:grpSpPr>
+        <a:xfrm>
+          <a:off x="0" y="0"/>
+          <a:ext cx="0" cy="0"/>
+          <a:chOff x="0" y="0"/>
+          <a:chExt cx="0" cy="0"/>
+        </a:xfrm>
+      </p:grpSpPr>
       <p:sp>
         <p:nvSpPr>
           <p:cNvPr id="2" name="Rectangle 1"/>
@@ -13924,6 +14229,7 @@
           <a:lstStyle/>
           <a:p>
             <a:pPr algn="ctr"/>
+            <a:endParaRPr/>
           </a:p>
         </p:txBody>
       </p:sp>
@@ -14046,6 +14352,7 @@
           <a:lstStyle/>
           <a:p>
             <a:pPr algn="ctr"/>
+            <a:endParaRPr/>
           </a:p>
         </p:txBody>
       </p:sp>
@@ -14070,7 +14377,9 @@
             <a:spAutoFit/>
           </a:bodyPr>
           <a:lstStyle/>
-          <a:p/>
+          <a:p>
+            <a:endParaRPr/>
+          </a:p>
         </p:txBody>
       </p:sp>
     </p:spTree>
@@ -14082,7 +14391,7 @@
 </file>
 
 <file path=ppt/slides/slide41.xml><?xml version="1.0" encoding="utf-8"?>
-<p:sld xmlns:a="http://schemas.openxmlformats.org/drawingml/2006/main" xmlns:p="http://schemas.openxmlformats.org/presentationml/2006/main" xmlns:r="http://schemas.openxmlformats.org/officeDocument/2006/relationships">
+<p:sld xmlns:a="http://schemas.openxmlformats.org/drawingml/2006/main" xmlns:r="http://schemas.openxmlformats.org/officeDocument/2006/relationships" xmlns:p="http://schemas.openxmlformats.org/presentationml/2006/main">
   <p:cSld>
     <p:spTree>
       <p:nvGrpSpPr>
@@ -14090,7 +14399,14 @@
         <p:cNvGrpSpPr/>
         <p:nvPr/>
       </p:nvGrpSpPr>
-      <p:grpSpPr/>
+      <p:grpSpPr>
+        <a:xfrm>
+          <a:off x="0" y="0"/>
+          <a:ext cx="0" cy="0"/>
+          <a:chOff x="0" y="0"/>
+          <a:chExt cx="0" cy="0"/>
+        </a:xfrm>
+      </p:grpSpPr>
       <p:sp>
         <p:nvSpPr>
           <p:cNvPr id="2" name="Rectangle 1"/>
@@ -14132,6 +14448,7 @@
           <a:lstStyle/>
           <a:p>
             <a:pPr algn="ctr"/>
+            <a:endParaRPr/>
           </a:p>
         </p:txBody>
       </p:sp>
@@ -14325,7 +14642,7 @@
 </file>
 
 <file path=ppt/slides/slide42.xml><?xml version="1.0" encoding="utf-8"?>
-<p:sld xmlns:a="http://schemas.openxmlformats.org/drawingml/2006/main" xmlns:p="http://schemas.openxmlformats.org/presentationml/2006/main" xmlns:r="http://schemas.openxmlformats.org/officeDocument/2006/relationships">
+<p:sld xmlns:a="http://schemas.openxmlformats.org/drawingml/2006/main" xmlns:r="http://schemas.openxmlformats.org/officeDocument/2006/relationships" xmlns:p="http://schemas.openxmlformats.org/presentationml/2006/main">
   <p:cSld>
     <p:spTree>
       <p:nvGrpSpPr>
@@ -14333,7 +14650,14 @@
         <p:cNvGrpSpPr/>
         <p:nvPr/>
       </p:nvGrpSpPr>
-      <p:grpSpPr/>
+      <p:grpSpPr>
+        <a:xfrm>
+          <a:off x="0" y="0"/>
+          <a:ext cx="0" cy="0"/>
+          <a:chOff x="0" y="0"/>
+          <a:chExt cx="0" cy="0"/>
+        </a:xfrm>
+      </p:grpSpPr>
       <p:sp>
         <p:nvSpPr>
           <p:cNvPr id="2" name="Rectangle 1"/>
@@ -14375,6 +14699,7 @@
           <a:lstStyle/>
           <a:p>
             <a:pPr algn="ctr"/>
+            <a:endParaRPr/>
           </a:p>
         </p:txBody>
       </p:sp>
@@ -14568,7 +14893,7 @@
 </file>
 
 <file path=ppt/slides/slide43.xml><?xml version="1.0" encoding="utf-8"?>
-<p:sld xmlns:a="http://schemas.openxmlformats.org/drawingml/2006/main" xmlns:p="http://schemas.openxmlformats.org/presentationml/2006/main" xmlns:r="http://schemas.openxmlformats.org/officeDocument/2006/relationships">
+<p:sld xmlns:a="http://schemas.openxmlformats.org/drawingml/2006/main" xmlns:r="http://schemas.openxmlformats.org/officeDocument/2006/relationships" xmlns:p="http://schemas.openxmlformats.org/presentationml/2006/main">
   <p:cSld>
     <p:spTree>
       <p:nvGrpSpPr>
@@ -14576,7 +14901,14 @@
         <p:cNvGrpSpPr/>
         <p:nvPr/>
       </p:nvGrpSpPr>
-      <p:grpSpPr/>
+      <p:grpSpPr>
+        <a:xfrm>
+          <a:off x="0" y="0"/>
+          <a:ext cx="0" cy="0"/>
+          <a:chOff x="0" y="0"/>
+          <a:chExt cx="0" cy="0"/>
+        </a:xfrm>
+      </p:grpSpPr>
       <p:sp>
         <p:nvSpPr>
           <p:cNvPr id="2" name="Rectangle 1"/>
@@ -14618,6 +14950,7 @@
           <a:lstStyle/>
           <a:p>
             <a:pPr algn="ctr"/>
+            <a:endParaRPr/>
           </a:p>
         </p:txBody>
       </p:sp>
@@ -14827,7 +15160,7 @@
 </file>
 
 <file path=ppt/slides/slide44.xml><?xml version="1.0" encoding="utf-8"?>
-<p:sld xmlns:a="http://schemas.openxmlformats.org/drawingml/2006/main" xmlns:p="http://schemas.openxmlformats.org/presentationml/2006/main" xmlns:r="http://schemas.openxmlformats.org/officeDocument/2006/relationships">
+<p:sld xmlns:a="http://schemas.openxmlformats.org/drawingml/2006/main" xmlns:r="http://schemas.openxmlformats.org/officeDocument/2006/relationships" xmlns:p="http://schemas.openxmlformats.org/presentationml/2006/main">
   <p:cSld>
     <p:spTree>
       <p:nvGrpSpPr>
@@ -14835,7 +15168,14 @@
         <p:cNvGrpSpPr/>
         <p:nvPr/>
       </p:nvGrpSpPr>
-      <p:grpSpPr/>
+      <p:grpSpPr>
+        <a:xfrm>
+          <a:off x="0" y="0"/>
+          <a:ext cx="0" cy="0"/>
+          <a:chOff x="0" y="0"/>
+          <a:chExt cx="0" cy="0"/>
+        </a:xfrm>
+      </p:grpSpPr>
       <p:sp>
         <p:nvSpPr>
           <p:cNvPr id="2" name="Rectangle 1"/>
@@ -14877,6 +15217,7 @@
           <a:lstStyle/>
           <a:p>
             <a:pPr algn="ctr"/>
+            <a:endParaRPr/>
           </a:p>
         </p:txBody>
       </p:sp>
@@ -15070,7 +15411,7 @@
 </file>
 
 <file path=ppt/slides/slide5.xml><?xml version="1.0" encoding="utf-8"?>
-<p:sld xmlns:a="http://schemas.openxmlformats.org/drawingml/2006/main" xmlns:p="http://schemas.openxmlformats.org/presentationml/2006/main" xmlns:r="http://schemas.openxmlformats.org/officeDocument/2006/relationships">
+<p:sld xmlns:a="http://schemas.openxmlformats.org/drawingml/2006/main" xmlns:r="http://schemas.openxmlformats.org/officeDocument/2006/relationships" xmlns:p="http://schemas.openxmlformats.org/presentationml/2006/main">
   <p:cSld>
     <p:spTree>
       <p:nvGrpSpPr>
@@ -15078,7 +15419,14 @@
         <p:cNvGrpSpPr/>
         <p:nvPr/>
       </p:nvGrpSpPr>
-      <p:grpSpPr/>
+      <p:grpSpPr>
+        <a:xfrm>
+          <a:off x="0" y="0"/>
+          <a:ext cx="0" cy="0"/>
+          <a:chOff x="0" y="0"/>
+          <a:chExt cx="0" cy="0"/>
+        </a:xfrm>
+      </p:grpSpPr>
       <p:sp>
         <p:nvSpPr>
           <p:cNvPr id="2" name="Rectangle 1"/>
@@ -15120,6 +15468,7 @@
           <a:lstStyle/>
           <a:p>
             <a:pPr algn="ctr"/>
+            <a:endParaRPr/>
           </a:p>
         </p:txBody>
       </p:sp>
@@ -15242,6 +15591,7 @@
           <a:lstStyle/>
           <a:p>
             <a:pPr algn="ctr"/>
+            <a:endParaRPr/>
           </a:p>
         </p:txBody>
       </p:sp>
@@ -15309,7 +15659,7 @@
 </file>
 
 <file path=ppt/slides/slide6.xml><?xml version="1.0" encoding="utf-8"?>
-<p:sld xmlns:a="http://schemas.openxmlformats.org/drawingml/2006/main" xmlns:p="http://schemas.openxmlformats.org/presentationml/2006/main" xmlns:r="http://schemas.openxmlformats.org/officeDocument/2006/relationships">
+<p:sld xmlns:a="http://schemas.openxmlformats.org/drawingml/2006/main" xmlns:r="http://schemas.openxmlformats.org/officeDocument/2006/relationships" xmlns:p="http://schemas.openxmlformats.org/presentationml/2006/main">
   <p:cSld>
     <p:spTree>
       <p:nvGrpSpPr>
@@ -15317,7 +15667,14 @@
         <p:cNvGrpSpPr/>
         <p:nvPr/>
       </p:nvGrpSpPr>
-      <p:grpSpPr/>
+      <p:grpSpPr>
+        <a:xfrm>
+          <a:off x="0" y="0"/>
+          <a:ext cx="0" cy="0"/>
+          <a:chOff x="0" y="0"/>
+          <a:chExt cx="0" cy="0"/>
+        </a:xfrm>
+      </p:grpSpPr>
       <p:sp>
         <p:nvSpPr>
           <p:cNvPr id="2" name="Rectangle 1"/>
@@ -15359,6 +15716,7 @@
           <a:lstStyle/>
           <a:p>
             <a:pPr algn="ctr"/>
+            <a:endParaRPr/>
           </a:p>
         </p:txBody>
       </p:sp>
@@ -15552,7 +15910,7 @@
 </file>
 
 <file path=ppt/slides/slide7.xml><?xml version="1.0" encoding="utf-8"?>
-<p:sld xmlns:a="http://schemas.openxmlformats.org/drawingml/2006/main" xmlns:p="http://schemas.openxmlformats.org/presentationml/2006/main" xmlns:r="http://schemas.openxmlformats.org/officeDocument/2006/relationships">
+<p:sld xmlns:a="http://schemas.openxmlformats.org/drawingml/2006/main" xmlns:r="http://schemas.openxmlformats.org/officeDocument/2006/relationships" xmlns:p="http://schemas.openxmlformats.org/presentationml/2006/main">
   <p:cSld>
     <p:spTree>
       <p:nvGrpSpPr>
@@ -15560,7 +15918,14 @@
         <p:cNvGrpSpPr/>
         <p:nvPr/>
       </p:nvGrpSpPr>
-      <p:grpSpPr/>
+      <p:grpSpPr>
+        <a:xfrm>
+          <a:off x="0" y="0"/>
+          <a:ext cx="0" cy="0"/>
+          <a:chOff x="0" y="0"/>
+          <a:chExt cx="0" cy="0"/>
+        </a:xfrm>
+      </p:grpSpPr>
       <p:sp>
         <p:nvSpPr>
           <p:cNvPr id="2" name="Rectangle 1"/>
@@ -15602,6 +15967,7 @@
           <a:lstStyle/>
           <a:p>
             <a:pPr algn="ctr"/>
+            <a:endParaRPr/>
           </a:p>
         </p:txBody>
       </p:sp>
@@ -15795,7 +16161,7 @@
 </file>
 
 <file path=ppt/slides/slide8.xml><?xml version="1.0" encoding="utf-8"?>
-<p:sld xmlns:a="http://schemas.openxmlformats.org/drawingml/2006/main" xmlns:p="http://schemas.openxmlformats.org/presentationml/2006/main" xmlns:r="http://schemas.openxmlformats.org/officeDocument/2006/relationships">
+<p:sld xmlns:a="http://schemas.openxmlformats.org/drawingml/2006/main" xmlns:r="http://schemas.openxmlformats.org/officeDocument/2006/relationships" xmlns:p="http://schemas.openxmlformats.org/presentationml/2006/main">
   <p:cSld>
     <p:spTree>
       <p:nvGrpSpPr>
@@ -15803,7 +16169,14 @@
         <p:cNvGrpSpPr/>
         <p:nvPr/>
       </p:nvGrpSpPr>
-      <p:grpSpPr/>
+      <p:grpSpPr>
+        <a:xfrm>
+          <a:off x="0" y="0"/>
+          <a:ext cx="0" cy="0"/>
+          <a:chOff x="0" y="0"/>
+          <a:chExt cx="0" cy="0"/>
+        </a:xfrm>
+      </p:grpSpPr>
       <p:sp>
         <p:nvSpPr>
           <p:cNvPr id="2" name="Rectangle 1"/>
@@ -15845,6 +16218,7 @@
           <a:lstStyle/>
           <a:p>
             <a:pPr algn="ctr"/>
+            <a:endParaRPr/>
           </a:p>
         </p:txBody>
       </p:sp>
@@ -16038,7 +16412,7 @@
 </file>
 
 <file path=ppt/slides/slide9.xml><?xml version="1.0" encoding="utf-8"?>
-<p:sld xmlns:a="http://schemas.openxmlformats.org/drawingml/2006/main" xmlns:p="http://schemas.openxmlformats.org/presentationml/2006/main" xmlns:r="http://schemas.openxmlformats.org/officeDocument/2006/relationships">
+<p:sld xmlns:a="http://schemas.openxmlformats.org/drawingml/2006/main" xmlns:r="http://schemas.openxmlformats.org/officeDocument/2006/relationships" xmlns:p="http://schemas.openxmlformats.org/presentationml/2006/main">
   <p:cSld>
     <p:spTree>
       <p:nvGrpSpPr>
@@ -16046,7 +16420,14 @@
         <p:cNvGrpSpPr/>
         <p:nvPr/>
       </p:nvGrpSpPr>
-      <p:grpSpPr/>
+      <p:grpSpPr>
+        <a:xfrm>
+          <a:off x="0" y="0"/>
+          <a:ext cx="0" cy="0"/>
+          <a:chOff x="0" y="0"/>
+          <a:chExt cx="0" cy="0"/>
+        </a:xfrm>
+      </p:grpSpPr>
       <p:sp>
         <p:nvSpPr>
           <p:cNvPr id="2" name="Rectangle 1"/>
@@ -16088,6 +16469,7 @@
           <a:lstStyle/>
           <a:p>
             <a:pPr algn="ctr"/>
+            <a:endParaRPr/>
           </a:p>
         </p:txBody>
       </p:sp>
@@ -16601,7 +16983,7 @@
 </file>
 
 <file path=ppt/theme/theme2.xml><?xml version="1.0" encoding="utf-8"?>
-<a:theme xmlns:a="http://schemas.openxmlformats.org/drawingml/2006/main" name="Office Theme">
+<a:theme xmlns:a="http://schemas.openxmlformats.org/drawingml/2006/main" name="Office 테마">
   <a:themeElements>
     <a:clrScheme name="Office">
       <a:dk1>
@@ -16611,44 +16993,44 @@
         <a:sysClr val="window" lastClr="FFFFFF"/>
       </a:lt1>
       <a:dk2>
-        <a:srgbClr val="1F497D"/>
+        <a:srgbClr val="0E2841"/>
       </a:dk2>
       <a:lt2>
-        <a:srgbClr val="EEECE1"/>
+        <a:srgbClr val="E8E8E8"/>
       </a:lt2>
       <a:accent1>
-        <a:srgbClr val="4F81BD"/>
+        <a:srgbClr val="156082"/>
       </a:accent1>
       <a:accent2>
-        <a:srgbClr val="C0504D"/>
+        <a:srgbClr val="E97132"/>
       </a:accent2>
       <a:accent3>
-        <a:srgbClr val="9BBB59"/>
+        <a:srgbClr val="196B24"/>
       </a:accent3>
       <a:accent4>
-        <a:srgbClr val="8064A2"/>
+        <a:srgbClr val="0F9ED5"/>
       </a:accent4>
       <a:accent5>
-        <a:srgbClr val="4BACC6"/>
+        <a:srgbClr val="A02B93"/>
       </a:accent5>
       <a:accent6>
-        <a:srgbClr val="F79646"/>
+        <a:srgbClr val="4EA72E"/>
       </a:accent6>
       <a:hlink>
-        <a:srgbClr val="0000FF"/>
+        <a:srgbClr val="467886"/>
       </a:hlink>
       <a:folHlink>
-        <a:srgbClr val="800080"/>
+        <a:srgbClr val="96607D"/>
       </a:folHlink>
     </a:clrScheme>
     <a:fontScheme name="Office">
       <a:majorFont>
-        <a:latin typeface="Calibri"/>
+        <a:latin typeface="맑은 고딕" panose="02110004020202020204"/>
         <a:ea typeface=""/>
         <a:cs typeface=""/>
-        <a:font script="Jpan" typeface="ＭＳ Ｐゴシック"/>
+        <a:font script="Jpan" typeface="游ゴシック Light"/>
         <a:font script="Hang" typeface="맑은 고딕"/>
-        <a:font script="Hans" typeface="宋体"/>
+        <a:font script="Hans" typeface="等线 Light"/>
         <a:font script="Hant" typeface="新細明體"/>
         <a:font script="Arab" typeface="Times New Roman"/>
         <a:font script="Hebr" typeface="Times New Roman"/>
@@ -16676,14 +17058,31 @@
         <a:font script="Viet" typeface="Times New Roman"/>
         <a:font script="Uigh" typeface="Microsoft Uighur"/>
         <a:font script="Geor" typeface="Sylfaen"/>
+        <a:font script="Armn" typeface="Arial"/>
+        <a:font script="Bugi" typeface="Leelawadee UI"/>
+        <a:font script="Bopo" typeface="Microsoft JhengHei"/>
+        <a:font script="Java" typeface="Javanese Text"/>
+        <a:font script="Lisu" typeface="Segoe UI"/>
+        <a:font script="Mymr" typeface="Myanmar Text"/>
+        <a:font script="Nkoo" typeface="Ebrima"/>
+        <a:font script="Olck" typeface="Nirmala UI"/>
+        <a:font script="Osma" typeface="Ebrima"/>
+        <a:font script="Phag" typeface="Phagspa"/>
+        <a:font script="Syrn" typeface="Estrangelo Edessa"/>
+        <a:font script="Syrj" typeface="Estrangelo Edessa"/>
+        <a:font script="Syre" typeface="Estrangelo Edessa"/>
+        <a:font script="Sora" typeface="Nirmala UI"/>
+        <a:font script="Tale" typeface="Microsoft Tai Le"/>
+        <a:font script="Talu" typeface="Microsoft New Tai Lue"/>
+        <a:font script="Tfng" typeface="Ebrima"/>
       </a:majorFont>
       <a:minorFont>
-        <a:latin typeface="Calibri"/>
+        <a:latin typeface="맑은 고딕" panose="02110004020202020204"/>
         <a:ea typeface=""/>
         <a:cs typeface=""/>
-        <a:font script="Jpan" typeface="ＭＳ Ｐゴシック"/>
+        <a:font script="Jpan" typeface="游ゴシック"/>
         <a:font script="Hang" typeface="맑은 고딕"/>
-        <a:font script="Hans" typeface="宋体"/>
+        <a:font script="Hans" typeface="等线"/>
         <a:font script="Hant" typeface="新細明體"/>
         <a:font script="Arab" typeface="Arial"/>
         <a:font script="Hebr" typeface="Arial"/>
@@ -16711,6 +17110,23 @@
         <a:font script="Viet" typeface="Arial"/>
         <a:font script="Uigh" typeface="Microsoft Uighur"/>
         <a:font script="Geor" typeface="Sylfaen"/>
+        <a:font script="Armn" typeface="Arial"/>
+        <a:font script="Bugi" typeface="Leelawadee UI"/>
+        <a:font script="Bopo" typeface="Microsoft JhengHei"/>
+        <a:font script="Java" typeface="Javanese Text"/>
+        <a:font script="Lisu" typeface="Segoe UI"/>
+        <a:font script="Mymr" typeface="Myanmar Text"/>
+        <a:font script="Nkoo" typeface="Ebrima"/>
+        <a:font script="Olck" typeface="Nirmala UI"/>
+        <a:font script="Osma" typeface="Ebrima"/>
+        <a:font script="Phag" typeface="Phagspa"/>
+        <a:font script="Syrn" typeface="Estrangelo Edessa"/>
+        <a:font script="Syrj" typeface="Estrangelo Edessa"/>
+        <a:font script="Syre" typeface="Estrangelo Edessa"/>
+        <a:font script="Sora" typeface="Nirmala UI"/>
+        <a:font script="Tale" typeface="Microsoft Tai Le"/>
+        <a:font script="Talu" typeface="Microsoft New Tai Lue"/>
+        <a:font script="Tfng" typeface="Ebrima"/>
       </a:minorFont>
     </a:fontScheme>
     <a:fmtScheme name="Office">
@@ -16722,180 +17138,136 @@
           <a:gsLst>
             <a:gs pos="0">
               <a:schemeClr val="phClr">
-                <a:tint val="50000"/>
-                <a:satMod val="300000"/>
+                <a:lumMod val="110000"/>
+                <a:satMod val="105000"/>
+                <a:tint val="67000"/>
               </a:schemeClr>
             </a:gs>
-            <a:gs pos="35000">
+            <a:gs pos="50000">
               <a:schemeClr val="phClr">
-                <a:tint val="37000"/>
-                <a:satMod val="300000"/>
+                <a:lumMod val="105000"/>
+                <a:satMod val="103000"/>
+                <a:tint val="73000"/>
               </a:schemeClr>
             </a:gs>
             <a:gs pos="100000">
               <a:schemeClr val="phClr">
-                <a:tint val="15000"/>
-                <a:satMod val="350000"/>
+                <a:lumMod val="105000"/>
+                <a:satMod val="109000"/>
+                <a:tint val="81000"/>
               </a:schemeClr>
             </a:gs>
           </a:gsLst>
-          <a:lin ang="16200000" scaled="1"/>
+          <a:lin ang="5400000" scaled="0"/>
         </a:gradFill>
         <a:gradFill rotWithShape="1">
           <a:gsLst>
             <a:gs pos="0">
               <a:schemeClr val="phClr">
-                <a:tint val="100000"/>
+                <a:satMod val="103000"/>
+                <a:lumMod val="102000"/>
+                <a:tint val="94000"/>
+              </a:schemeClr>
+            </a:gs>
+            <a:gs pos="50000">
+              <a:schemeClr val="phClr">
+                <a:satMod val="110000"/>
+                <a:lumMod val="100000"/>
                 <a:shade val="100000"/>
-                <a:satMod val="130000"/>
               </a:schemeClr>
             </a:gs>
             <a:gs pos="100000">
               <a:schemeClr val="phClr">
-                <a:tint val="50000"/>
-                <a:shade val="100000"/>
-                <a:satMod val="350000"/>
+                <a:lumMod val="99000"/>
+                <a:satMod val="120000"/>
+                <a:shade val="78000"/>
               </a:schemeClr>
             </a:gs>
           </a:gsLst>
-          <a:lin ang="16200000" scaled="0"/>
+          <a:lin ang="5400000" scaled="0"/>
         </a:gradFill>
       </a:fillStyleLst>
       <a:lnStyleLst>
-        <a:ln w="9525" cap="flat" cmpd="sng" algn="ctr">
+        <a:ln w="12700" cap="flat" cmpd="sng" algn="ctr">
           <a:solidFill>
-            <a:schemeClr val="phClr">
-              <a:shade val="95000"/>
-              <a:satMod val="105000"/>
-            </a:schemeClr>
+            <a:schemeClr val="phClr"/>
           </a:solidFill>
           <a:prstDash val="solid"/>
+          <a:miter lim="800000"/>
+        </a:ln>
+        <a:ln w="19050" cap="flat" cmpd="sng" algn="ctr">
+          <a:solidFill>
+            <a:schemeClr val="phClr"/>
+          </a:solidFill>
+          <a:prstDash val="solid"/>
+          <a:miter lim="800000"/>
         </a:ln>
         <a:ln w="25400" cap="flat" cmpd="sng" algn="ctr">
           <a:solidFill>
             <a:schemeClr val="phClr"/>
           </a:solidFill>
           <a:prstDash val="solid"/>
-        </a:ln>
-        <a:ln w="38100" cap="flat" cmpd="sng" algn="ctr">
-          <a:solidFill>
-            <a:schemeClr val="phClr"/>
-          </a:solidFill>
-          <a:prstDash val="solid"/>
+          <a:miter lim="800000"/>
         </a:ln>
       </a:lnStyleLst>
       <a:effectStyleLst>
         <a:effectStyle>
+          <a:effectLst/>
+        </a:effectStyle>
+        <a:effectStyle>
+          <a:effectLst/>
+        </a:effectStyle>
+        <a:effectStyle>
           <a:effectLst>
-            <a:outerShdw blurRad="40000" dist="20000" dir="5400000" rotWithShape="0">
+            <a:outerShdw blurRad="57150" dist="19050" dir="5400000" algn="ctr" rotWithShape="0">
               <a:srgbClr val="000000">
-                <a:alpha val="38000"/>
+                <a:alpha val="63000"/>
               </a:srgbClr>
             </a:outerShdw>
           </a:effectLst>
-        </a:effectStyle>
-        <a:effectStyle>
-          <a:effectLst>
-            <a:outerShdw blurRad="40000" dist="23000" dir="5400000" rotWithShape="0">
-              <a:srgbClr val="000000">
-                <a:alpha val="35000"/>
-              </a:srgbClr>
-            </a:outerShdw>
-          </a:effectLst>
-        </a:effectStyle>
-        <a:effectStyle>
-          <a:effectLst>
-            <a:outerShdw blurRad="40000" dist="23000" dir="5400000" rotWithShape="0">
-              <a:srgbClr val="000000">
-                <a:alpha val="35000"/>
-              </a:srgbClr>
-            </a:outerShdw>
-          </a:effectLst>
-          <a:scene3d>
-            <a:camera prst="orthographicFront">
-              <a:rot lat="0" lon="0" rev="0"/>
-            </a:camera>
-            <a:lightRig rig="threePt" dir="t">
-              <a:rot lat="0" lon="0" rev="1200000"/>
-            </a:lightRig>
-          </a:scene3d>
-          <a:sp3d>
-            <a:bevelT w="63500" h="25400"/>
-          </a:sp3d>
         </a:effectStyle>
       </a:effectStyleLst>
       <a:bgFillStyleLst>
         <a:solidFill>
           <a:schemeClr val="phClr"/>
         </a:solidFill>
+        <a:solidFill>
+          <a:schemeClr val="phClr">
+            <a:tint val="95000"/>
+            <a:satMod val="170000"/>
+          </a:schemeClr>
+        </a:solidFill>
         <a:gradFill rotWithShape="1">
           <a:gsLst>
             <a:gs pos="0">
               <a:schemeClr val="phClr">
-                <a:tint val="40000"/>
-                <a:satMod val="350000"/>
+                <a:tint val="93000"/>
+                <a:satMod val="150000"/>
+                <a:shade val="98000"/>
+                <a:lumMod val="102000"/>
               </a:schemeClr>
             </a:gs>
-            <a:gs pos="40000">
+            <a:gs pos="50000">
               <a:schemeClr val="phClr">
-                <a:tint val="45000"/>
-                <a:shade val="99000"/>
-                <a:satMod val="350000"/>
+                <a:tint val="98000"/>
+                <a:satMod val="130000"/>
+                <a:shade val="90000"/>
+                <a:lumMod val="103000"/>
               </a:schemeClr>
             </a:gs>
             <a:gs pos="100000">
               <a:schemeClr val="phClr">
-                <a:shade val="20000"/>
-                <a:satMod val="255000"/>
+                <a:shade val="63000"/>
+                <a:satMod val="120000"/>
               </a:schemeClr>
             </a:gs>
           </a:gsLst>
-          <a:path path="circle">
-            <a:fillToRect l="50000" t="-80000" r="50000" b="180000"/>
-          </a:path>
-        </a:gradFill>
-        <a:gradFill rotWithShape="1">
-          <a:gsLst>
-            <a:gs pos="0">
-              <a:schemeClr val="phClr">
-                <a:tint val="80000"/>
-                <a:satMod val="300000"/>
-              </a:schemeClr>
-            </a:gs>
-            <a:gs pos="100000">
-              <a:schemeClr val="phClr">
-                <a:shade val="30000"/>
-                <a:satMod val="200000"/>
-              </a:schemeClr>
-            </a:gs>
-          </a:gsLst>
-          <a:path path="circle">
-            <a:fillToRect l="50000" t="50000" r="50000" b="50000"/>
-          </a:path>
+          <a:lin ang="5400000" scaled="0"/>
         </a:gradFill>
       </a:bgFillStyleLst>
     </a:fmtScheme>
   </a:themeElements>
   <a:objectDefaults>
-    <a:spDef>
-      <a:spPr/>
-      <a:bodyPr/>
-      <a:lstStyle/>
-      <a:style>
-        <a:lnRef idx="1">
-          <a:schemeClr val="accent1"/>
-        </a:lnRef>
-        <a:fillRef idx="3">
-          <a:schemeClr val="accent1"/>
-        </a:fillRef>
-        <a:effectRef idx="2">
-          <a:schemeClr val="accent1"/>
-        </a:effectRef>
-        <a:fontRef idx="minor">
-          <a:schemeClr val="lt1"/>
-        </a:fontRef>
-      </a:style>
-    </a:spDef>
     <a:lnDef>
       <a:spPr/>
       <a:bodyPr/>
@@ -16917,5 +17289,10 @@
     </a:lnDef>
   </a:objectDefaults>
   <a:extraClrSchemeLst/>
+  <a:extLst>
+    <a:ext uri="{05A4C25C-085E-4340-85A3-A5531E510DB2}">
+      <thm15:themeFamily xmlns:thm15="http://schemas.microsoft.com/office/thememl/2012/main" name="Office Theme" id="{2E142A2C-CD16-42D6-873A-C26D2A0506FA}" vid="{1BDDFF52-6CD6-40A5-AB3C-68EB2F1E4D0A}"/>
+    </a:ext>
+  </a:extLst>
 </a:theme>
 </file>